--- a/docs/ascend_verl_intro_deck.pptx
+++ b/docs/ascend_verl_intro_deck.pptx
@@ -2,20 +2,20 @@
 <file path=ppt/presentation.xml><?xml version="1.0" encoding="utf-8"?>
 <p:presentation xmlns:p="http://schemas.openxmlformats.org/presentationml/2006/main">
   <p:sldMasterIdLst>
-    <p:sldMasterId xmlns:r="http://schemas.openxmlformats.org/officeDocument/2006/relationships" id="2147483648" r:id="R17afa608fad247db"/>
+    <p:sldMasterId xmlns:r="http://schemas.openxmlformats.org/officeDocument/2006/relationships" id="2147483648" r:id="R2607bbb16ea84f9e"/>
   </p:sldMasterIdLst>
   <p:notesMasterIdLst>
-    <p:notesMasterId xmlns:r="http://schemas.openxmlformats.org/officeDocument/2006/relationships" r:id="R410c29d8989d498e"/>
+    <p:notesMasterId xmlns:r="http://schemas.openxmlformats.org/officeDocument/2006/relationships" r:id="Rf557b52ad1174aa4"/>
   </p:notesMasterIdLst>
   <p:sldIdLst>
-    <p:sldId xmlns:r="http://schemas.openxmlformats.org/officeDocument/2006/relationships" id="256" r:id="Rac72a3005d454afb"/>
-    <p:sldId xmlns:r="http://schemas.openxmlformats.org/officeDocument/2006/relationships" id="257" r:id="R015d477ec5ed4b09"/>
-    <p:sldId xmlns:r="http://schemas.openxmlformats.org/officeDocument/2006/relationships" id="258" r:id="R06a453c68a2c4db0"/>
-    <p:sldId xmlns:r="http://schemas.openxmlformats.org/officeDocument/2006/relationships" id="259" r:id="Ra5690cd878f04a04"/>
-    <p:sldId xmlns:r="http://schemas.openxmlformats.org/officeDocument/2006/relationships" id="260" r:id="Rca6e401c7ff14bcb"/>
-    <p:sldId xmlns:r="http://schemas.openxmlformats.org/officeDocument/2006/relationships" id="261" r:id="Rfa0818f134af4754"/>
-    <p:sldId xmlns:r="http://schemas.openxmlformats.org/officeDocument/2006/relationships" id="262" r:id="R351d129e777c4a94"/>
-    <p:sldId xmlns:r="http://schemas.openxmlformats.org/officeDocument/2006/relationships" id="263" r:id="R62f1a51c531d4641"/>
+    <p:sldId xmlns:r="http://schemas.openxmlformats.org/officeDocument/2006/relationships" id="256" r:id="Ra52e153dc7564795"/>
+    <p:sldId xmlns:r="http://schemas.openxmlformats.org/officeDocument/2006/relationships" id="257" r:id="R6d30ec08f82e4512"/>
+    <p:sldId xmlns:r="http://schemas.openxmlformats.org/officeDocument/2006/relationships" id="258" r:id="R55d0a60ab71548d3"/>
+    <p:sldId xmlns:r="http://schemas.openxmlformats.org/officeDocument/2006/relationships" id="259" r:id="R2f18b9cebe6744b8"/>
+    <p:sldId xmlns:r="http://schemas.openxmlformats.org/officeDocument/2006/relationships" id="260" r:id="R9936846558e14285"/>
+    <p:sldId xmlns:r="http://schemas.openxmlformats.org/officeDocument/2006/relationships" id="261" r:id="Raab5377e9d6e493b"/>
+    <p:sldId xmlns:r="http://schemas.openxmlformats.org/officeDocument/2006/relationships" id="262" r:id="Rbd3900b3108e4a4c"/>
+    <p:sldId xmlns:r="http://schemas.openxmlformats.org/officeDocument/2006/relationships" id="263" r:id="R565fd1565a214f4d"/>
   </p:sldIdLst>
   <p:sldSz cx="12192000" cy="6858000"/>
   <p:notesSz cx="6858000" cy="9144000"/>
@@ -1024,7 +1024,7 @@
   </p:cSld>
   <p:clrMap bg1="lt1" tx1="dk1" bg2="lt2" tx2="dk2" accent1="accent1" accent2="accent2" accent3="accent3" accent4="accent4" accent5="accent5" accent6="accent6" hlink="hlink" folHlink="folHlink"/>
   <p:sldLayoutIdLst>
-    <p:sldLayoutId xmlns:r="http://schemas.openxmlformats.org/officeDocument/2006/relationships" id="2147483649" r:id="R849955d44a7945d7"/>
+    <p:sldLayoutId xmlns:r="http://schemas.openxmlformats.org/officeDocument/2006/relationships" id="2147483649" r:id="R2359ace70095417a"/>
   </p:sldLayoutIdLst>
   <p:txStyles>
     <p:titleStyle>
@@ -1323,7 +1323,7 @@
           <p:cNvPr id="1" name="">
             <a:extLst xmlns:a="http://schemas.openxmlformats.org/drawingml/2006/main">
               <a:ext uri="{FF2B5EF4-FFF2-40B4-BE49-F238E27FC236}">
-                <a16:creationId xmlns:a16="http://schemas.microsoft.com/office/drawing/2014/main" id="{D4EADC52-D802-48AF-AE08-3010F98068AB}"/>
+                <a16:creationId xmlns:a16="http://schemas.microsoft.com/office/drawing/2014/main" id="{C1FF68F9-EDDB-48B5-8998-C927EC8C52DF}"/>
               </a:ext>
             </a:extLst>
           </p:cNvPr>
@@ -1358,7 +1358,7 @@
           <p:cNvPr id="2" name="">
             <a:extLst xmlns:a="http://schemas.openxmlformats.org/drawingml/2006/main">
               <a:ext uri="{FF2B5EF4-FFF2-40B4-BE49-F238E27FC236}">
-                <a16:creationId xmlns:a16="http://schemas.microsoft.com/office/drawing/2014/main" id="{12152FCC-7B89-4632-9B9D-3F2B7B222B98}"/>
+                <a16:creationId xmlns:a16="http://schemas.microsoft.com/office/drawing/2014/main" id="{56CD42A5-E738-4755-909B-A7ABC5F65F74}"/>
               </a:ext>
             </a:extLst>
           </p:cNvPr>
@@ -1393,7 +1393,7 @@
           <p:cNvPr id="3" name="">
             <a:extLst xmlns:a="http://schemas.openxmlformats.org/drawingml/2006/main">
               <a:ext uri="{FF2B5EF4-FFF2-40B4-BE49-F238E27FC236}">
-                <a16:creationId xmlns:a16="http://schemas.microsoft.com/office/drawing/2014/main" id="{25CE60E5-0437-4014-848B-63980DABA7A2}"/>
+                <a16:creationId xmlns:a16="http://schemas.microsoft.com/office/drawing/2014/main" id="{311CB43E-17EF-4B1E-9F57-A1CE3A87DB4F}"/>
               </a:ext>
             </a:extLst>
           </p:cNvPr>
@@ -1457,7 +1457,7 @@
           <p:cNvPr id="4" name="">
             <a:extLst xmlns:a="http://schemas.openxmlformats.org/drawingml/2006/main">
               <a:ext uri="{FF2B5EF4-FFF2-40B4-BE49-F238E27FC236}">
-                <a16:creationId xmlns:a16="http://schemas.microsoft.com/office/drawing/2014/main" id="{8DAE9118-2561-4A7D-987B-876ED4F3DCC5}"/>
+                <a16:creationId xmlns:a16="http://schemas.microsoft.com/office/drawing/2014/main" id="{4D45F472-4DB0-476F-B75F-E2C8FA50D70F}"/>
               </a:ext>
             </a:extLst>
           </p:cNvPr>
@@ -1493,7 +1493,7 @@
           <a:lstStyle xmlns:a="http://schemas.openxmlformats.org/drawingml/2006/main"/>
           <a:p xmlns:a="http://schemas.openxmlformats.org/drawingml/2006/main">
             <a:pPr algn="l">
-              <a:defRPr sz="3150" b="1">
+              <a:defRPr sz="3450" b="1">
                 <a:solidFill>
                   <a:srgbClr val="16201E"/>
                 </a:solidFill>
@@ -1503,7 +1503,7 @@
               </a:defRPr>
             </a:pPr>
             <a:r>
-              <a:rPr sz="3150" b="1">
+              <a:rPr sz="3450" b="1">
                 <a:solidFill>
                   <a:srgbClr val="16201E"/>
                 </a:solidFill>
@@ -1511,7 +1511,7 @@
                 <a:ea typeface="Aptos Display"/>
                 <a:cs typeface="Aptos Display"/>
               </a:rPr>
-              <a:t>在讲优化前，先把系统讲清楚</a:t>
+              <a:t>Ascend verl 系统介绍</a:t>
             </a:r>
           </a:p>
         </p:txBody>
@@ -1521,7 +1521,7 @@
           <p:cNvPr id="5" name="">
             <a:extLst xmlns:a="http://schemas.openxmlformats.org/drawingml/2006/main">
               <a:ext uri="{FF2B5EF4-FFF2-40B4-BE49-F238E27FC236}">
-                <a16:creationId xmlns:a16="http://schemas.microsoft.com/office/drawing/2014/main" id="{BBC26AA1-2C7D-4388-A294-DAB19F5B5934}"/>
+                <a16:creationId xmlns:a16="http://schemas.microsoft.com/office/drawing/2014/main" id="{F9888A34-5E4F-4606-8AF3-0D03BA654791}"/>
               </a:ext>
             </a:extLst>
           </p:cNvPr>
@@ -1585,7 +1585,7 @@
           <p:cNvPr id="6" name="">
             <a:extLst xmlns:a="http://schemas.openxmlformats.org/drawingml/2006/main">
               <a:ext uri="{FF2B5EF4-FFF2-40B4-BE49-F238E27FC236}">
-                <a16:creationId xmlns:a16="http://schemas.microsoft.com/office/drawing/2014/main" id="{C39EEB7A-124B-43FC-8B84-4F9C3D6C38AB}"/>
+                <a16:creationId xmlns:a16="http://schemas.microsoft.com/office/drawing/2014/main" id="{3B8903B4-8EAE-4A55-B5EB-0F26B2114F8E}"/>
               </a:ext>
             </a:extLst>
           </p:cNvPr>
@@ -1620,7 +1620,7 @@
           <p:cNvPr id="7" name="">
             <a:extLst xmlns:a="http://schemas.openxmlformats.org/drawingml/2006/main">
               <a:ext uri="{FF2B5EF4-FFF2-40B4-BE49-F238E27FC236}">
-                <a16:creationId xmlns:a16="http://schemas.microsoft.com/office/drawing/2014/main" id="{2F613D18-FDA6-4E73-8DB6-2612A633CCE6}"/>
+                <a16:creationId xmlns:a16="http://schemas.microsoft.com/office/drawing/2014/main" id="{2182177F-5726-450B-9DFE-1B6EF8B27928}"/>
               </a:ext>
             </a:extLst>
           </p:cNvPr>
@@ -1655,7 +1655,7 @@
           <p:cNvPr id="8" name="">
             <a:extLst xmlns:a="http://schemas.openxmlformats.org/drawingml/2006/main">
               <a:ext uri="{FF2B5EF4-FFF2-40B4-BE49-F238E27FC236}">
-                <a16:creationId xmlns:a16="http://schemas.microsoft.com/office/drawing/2014/main" id="{50119C00-3EFE-4E37-BE42-DAAF2E2F7CF7}"/>
+                <a16:creationId xmlns:a16="http://schemas.microsoft.com/office/drawing/2014/main" id="{52AB6C1D-0F25-4B9D-B29C-2D80CB6E2453}"/>
               </a:ext>
             </a:extLst>
           </p:cNvPr>
@@ -1719,7 +1719,7 @@
           <p:cNvPr id="9" name="">
             <a:extLst xmlns:a="http://schemas.openxmlformats.org/drawingml/2006/main">
               <a:ext uri="{FF2B5EF4-FFF2-40B4-BE49-F238E27FC236}">
-                <a16:creationId xmlns:a16="http://schemas.microsoft.com/office/drawing/2014/main" id="{364613D2-2011-483E-B41C-643A78890941}"/>
+                <a16:creationId xmlns:a16="http://schemas.microsoft.com/office/drawing/2014/main" id="{51BEE5B8-D409-46AE-B4F5-E21B8E2BFD41}"/>
               </a:ext>
             </a:extLst>
           </p:cNvPr>
@@ -1754,7 +1754,7 @@
           <p:cNvPr id="10" name="">
             <a:extLst xmlns:a="http://schemas.openxmlformats.org/drawingml/2006/main">
               <a:ext uri="{FF2B5EF4-FFF2-40B4-BE49-F238E27FC236}">
-                <a16:creationId xmlns:a16="http://schemas.microsoft.com/office/drawing/2014/main" id="{9F7FBA17-A3B5-4D45-8204-E86DCCCA7C70}"/>
+                <a16:creationId xmlns:a16="http://schemas.microsoft.com/office/drawing/2014/main" id="{6507B939-62DE-4D58-B4B1-540CEAB2AAAE}"/>
               </a:ext>
             </a:extLst>
           </p:cNvPr>
@@ -1818,7 +1818,7 @@
           <p:cNvPr id="11" name="">
             <a:extLst xmlns:a="http://schemas.openxmlformats.org/drawingml/2006/main">
               <a:ext uri="{FF2B5EF4-FFF2-40B4-BE49-F238E27FC236}">
-                <a16:creationId xmlns:a16="http://schemas.microsoft.com/office/drawing/2014/main" id="{2F51CF1E-78CC-4372-8010-5893C5F0BA54}"/>
+                <a16:creationId xmlns:a16="http://schemas.microsoft.com/office/drawing/2014/main" id="{D921CBF1-B12B-41D4-82C9-D37AFA5987A7}"/>
               </a:ext>
             </a:extLst>
           </p:cNvPr>
@@ -1853,7 +1853,7 @@
           <p:cNvPr id="12" name="">
             <a:extLst xmlns:a="http://schemas.openxmlformats.org/drawingml/2006/main">
               <a:ext uri="{FF2B5EF4-FFF2-40B4-BE49-F238E27FC236}">
-                <a16:creationId xmlns:a16="http://schemas.microsoft.com/office/drawing/2014/main" id="{4B16DCF2-33A1-4E89-8FD9-9CE9C95E4AE0}"/>
+                <a16:creationId xmlns:a16="http://schemas.microsoft.com/office/drawing/2014/main" id="{EEC5BF62-706D-48EC-A7E3-1F05A17A0B5F}"/>
               </a:ext>
             </a:extLst>
           </p:cNvPr>
@@ -1917,7 +1917,7 @@
           <p:cNvPr id="13" name="">
             <a:extLst xmlns:a="http://schemas.openxmlformats.org/drawingml/2006/main">
               <a:ext uri="{FF2B5EF4-FFF2-40B4-BE49-F238E27FC236}">
-                <a16:creationId xmlns:a16="http://schemas.microsoft.com/office/drawing/2014/main" id="{B2535458-0650-4232-AC7D-7153B8EDFBCA}"/>
+                <a16:creationId xmlns:a16="http://schemas.microsoft.com/office/drawing/2014/main" id="{3DD0E0A3-17DD-4333-9638-CCDF84A445F0}"/>
               </a:ext>
             </a:extLst>
           </p:cNvPr>
@@ -1952,7 +1952,7 @@
           <p:cNvPr id="14" name="">
             <a:extLst xmlns:a="http://schemas.openxmlformats.org/drawingml/2006/main">
               <a:ext uri="{FF2B5EF4-FFF2-40B4-BE49-F238E27FC236}">
-                <a16:creationId xmlns:a16="http://schemas.microsoft.com/office/drawing/2014/main" id="{C4B1B8DA-8124-4F5B-9901-7A408A2D31E4}"/>
+                <a16:creationId xmlns:a16="http://schemas.microsoft.com/office/drawing/2014/main" id="{39DCB60D-27EA-4DC4-BF9B-82916BA8FE9E}"/>
               </a:ext>
             </a:extLst>
           </p:cNvPr>
@@ -2016,7 +2016,7 @@
           <p:cNvPr id="15" name="">
             <a:extLst xmlns:a="http://schemas.openxmlformats.org/drawingml/2006/main">
               <a:ext uri="{FF2B5EF4-FFF2-40B4-BE49-F238E27FC236}">
-                <a16:creationId xmlns:a16="http://schemas.microsoft.com/office/drawing/2014/main" id="{73AA53EF-0298-4024-A0FA-E28E4EF26DC3}"/>
+                <a16:creationId xmlns:a16="http://schemas.microsoft.com/office/drawing/2014/main" id="{419B7A86-9BC8-47FE-A4A5-F6FA80E8CC31}"/>
               </a:ext>
             </a:extLst>
           </p:cNvPr>
@@ -2051,7 +2051,7 @@
           <p:cNvPr id="16" name="">
             <a:extLst xmlns:a="http://schemas.openxmlformats.org/drawingml/2006/main">
               <a:ext uri="{FF2B5EF4-FFF2-40B4-BE49-F238E27FC236}">
-                <a16:creationId xmlns:a16="http://schemas.microsoft.com/office/drawing/2014/main" id="{341BC6D5-2E64-4275-8FAC-2E2325825891}"/>
+                <a16:creationId xmlns:a16="http://schemas.microsoft.com/office/drawing/2014/main" id="{1A3BCCF2-B3F9-4F2C-93B0-2EE98E526065}"/>
               </a:ext>
             </a:extLst>
           </p:cNvPr>
@@ -2115,7 +2115,7 @@
           <p:cNvPr id="17" name="">
             <a:extLst xmlns:a="http://schemas.openxmlformats.org/drawingml/2006/main">
               <a:ext uri="{FF2B5EF4-FFF2-40B4-BE49-F238E27FC236}">
-                <a16:creationId xmlns:a16="http://schemas.microsoft.com/office/drawing/2014/main" id="{51BF7CDA-13EB-417D-9F4E-D5173B5AAA51}"/>
+                <a16:creationId xmlns:a16="http://schemas.microsoft.com/office/drawing/2014/main" id="{155D61F0-609F-45B9-89F3-A0B9FC57002B}"/>
               </a:ext>
             </a:extLst>
           </p:cNvPr>
@@ -2148,7 +2148,7 @@
           <p:cNvPr id="18" name="">
             <a:extLst xmlns:a="http://schemas.openxmlformats.org/drawingml/2006/main">
               <a:ext uri="{FF2B5EF4-FFF2-40B4-BE49-F238E27FC236}">
-                <a16:creationId xmlns:a16="http://schemas.microsoft.com/office/drawing/2014/main" id="{8771FC8E-C4DA-47F8-B496-ACD2EED6F307}"/>
+                <a16:creationId xmlns:a16="http://schemas.microsoft.com/office/drawing/2014/main" id="{682C00F0-AD09-4B8D-AFFD-6BA9DB90796D}"/>
               </a:ext>
             </a:extLst>
           </p:cNvPr>
@@ -2212,7 +2212,7 @@
           <p:cNvPr id="19" name="">
             <a:extLst xmlns:a="http://schemas.openxmlformats.org/drawingml/2006/main">
               <a:ext uri="{FF2B5EF4-FFF2-40B4-BE49-F238E27FC236}">
-                <a16:creationId xmlns:a16="http://schemas.microsoft.com/office/drawing/2014/main" id="{E96E22B6-A85B-45B7-A70F-DCA4AE69DF24}"/>
+                <a16:creationId xmlns:a16="http://schemas.microsoft.com/office/drawing/2014/main" id="{29628ABE-4B8A-4684-B688-F26F5430E532}"/>
               </a:ext>
             </a:extLst>
           </p:cNvPr>
@@ -2276,7 +2276,7 @@
           <p:cNvPr id="20" name="">
             <a:extLst xmlns:a="http://schemas.openxmlformats.org/drawingml/2006/main">
               <a:ext uri="{FF2B5EF4-FFF2-40B4-BE49-F238E27FC236}">
-                <a16:creationId xmlns:a16="http://schemas.microsoft.com/office/drawing/2014/main" id="{96BE4921-E1F3-481C-8CDA-596816F7EC86}"/>
+                <a16:creationId xmlns:a16="http://schemas.microsoft.com/office/drawing/2014/main" id="{ECD4D4E3-147D-4508-BA13-242B0F0B8C84}"/>
               </a:ext>
             </a:extLst>
           </p:cNvPr>
@@ -2340,7 +2340,7 @@
           <p:cNvPr id="21" name="">
             <a:extLst xmlns:a="http://schemas.openxmlformats.org/drawingml/2006/main">
               <a:ext uri="{FF2B5EF4-FFF2-40B4-BE49-F238E27FC236}">
-                <a16:creationId xmlns:a16="http://schemas.microsoft.com/office/drawing/2014/main" id="{4DD6932E-0A23-4377-ACA5-2D8EC92445FE}"/>
+                <a16:creationId xmlns:a16="http://schemas.microsoft.com/office/drawing/2014/main" id="{AF8A88DB-DE2A-4370-8697-8A9DCD3DF55C}"/>
               </a:ext>
             </a:extLst>
           </p:cNvPr>
@@ -2404,7 +2404,7 @@
           <p:cNvPr id="22" name="">
             <a:extLst xmlns:a="http://schemas.openxmlformats.org/drawingml/2006/main">
               <a:ext uri="{FF2B5EF4-FFF2-40B4-BE49-F238E27FC236}">
-                <a16:creationId xmlns:a16="http://schemas.microsoft.com/office/drawing/2014/main" id="{4733D1B4-C3C9-4343-8B92-3704DD1CE025}"/>
+                <a16:creationId xmlns:a16="http://schemas.microsoft.com/office/drawing/2014/main" id="{A35FAC65-6D78-4D73-86B1-F4545E887736}"/>
               </a:ext>
             </a:extLst>
           </p:cNvPr>
@@ -2468,7 +2468,7 @@
           <p:cNvPr id="23" name="">
             <a:extLst xmlns:a="http://schemas.openxmlformats.org/drawingml/2006/main">
               <a:ext uri="{FF2B5EF4-FFF2-40B4-BE49-F238E27FC236}">
-                <a16:creationId xmlns:a16="http://schemas.microsoft.com/office/drawing/2014/main" id="{A58DEEB5-E65E-40CC-8EC3-2167340393C0}"/>
+                <a16:creationId xmlns:a16="http://schemas.microsoft.com/office/drawing/2014/main" id="{9802D79F-E211-4B86-B073-CD7DFFDB9F67}"/>
               </a:ext>
             </a:extLst>
           </p:cNvPr>
@@ -2532,7 +2532,7 @@
           <p:cNvPr id="24" name="">
             <a:extLst xmlns:a="http://schemas.openxmlformats.org/drawingml/2006/main">
               <a:ext uri="{FF2B5EF4-FFF2-40B4-BE49-F238E27FC236}">
-                <a16:creationId xmlns:a16="http://schemas.microsoft.com/office/drawing/2014/main" id="{EDAB4A6F-27FE-4837-8FC3-57CF2C15AE4B}"/>
+                <a16:creationId xmlns:a16="http://schemas.microsoft.com/office/drawing/2014/main" id="{73BB5DB1-A38C-4813-BE52-66D3C1080A59}"/>
               </a:ext>
             </a:extLst>
           </p:cNvPr>
@@ -2586,7 +2586,7 @@
                 <a:ea typeface="Aptos"/>
                 <a:cs typeface="Aptos"/>
               </a:rPr>
-              <a:t>为什么推理侧是关键路径</a:t>
+              <a:t>训练推理闭环怎么跑</a:t>
             </a:r>
           </a:p>
         </p:txBody>
@@ -2596,7 +2596,7 @@
           <p:cNvPr id="25" name="">
             <a:extLst xmlns:a="http://schemas.openxmlformats.org/drawingml/2006/main">
               <a:ext uri="{FF2B5EF4-FFF2-40B4-BE49-F238E27FC236}">
-                <a16:creationId xmlns:a16="http://schemas.microsoft.com/office/drawing/2014/main" id="{5FF091A1-A26E-4F39-BC65-4C763F70AE85}"/>
+                <a16:creationId xmlns:a16="http://schemas.microsoft.com/office/drawing/2014/main" id="{C356011D-3881-4DAF-96AA-64C7F2F9D0F8}"/>
               </a:ext>
             </a:extLst>
           </p:cNvPr>
@@ -2631,7 +2631,7 @@
           <p:cNvPr id="26" name="">
             <a:extLst xmlns:a="http://schemas.openxmlformats.org/drawingml/2006/main">
               <a:ext uri="{FF2B5EF4-FFF2-40B4-BE49-F238E27FC236}">
-                <a16:creationId xmlns:a16="http://schemas.microsoft.com/office/drawing/2014/main" id="{CF396369-8214-4F0C-925A-AE29D4431CEE}"/>
+                <a16:creationId xmlns:a16="http://schemas.microsoft.com/office/drawing/2014/main" id="{F9EE378A-C8CF-462D-818C-C7CC95187ED5}"/>
               </a:ext>
             </a:extLst>
           </p:cNvPr>
@@ -2685,7 +2685,7 @@
                 <a:ea typeface="Aptos"/>
                 <a:cs typeface="Aptos"/>
               </a:rPr>
-              <a:t>Part 0 | shared context before optimization design</a:t>
+              <a:t>Ascend verl system overview</a:t>
             </a:r>
           </a:p>
         </p:txBody>
@@ -2695,7 +2695,7 @@
           <p:cNvPr id="27" name="">
             <a:extLst xmlns:a="http://schemas.openxmlformats.org/drawingml/2006/main">
               <a:ext uri="{FF2B5EF4-FFF2-40B4-BE49-F238E27FC236}">
-                <a16:creationId xmlns:a16="http://schemas.microsoft.com/office/drawing/2014/main" id="{E77F6535-F526-4919-ACB3-97F2401963F9}"/>
+                <a16:creationId xmlns:a16="http://schemas.microsoft.com/office/drawing/2014/main" id="{8834AE84-803B-45DB-8AE7-032ABEA9D62C}"/>
               </a:ext>
             </a:extLst>
           </p:cNvPr>
@@ -2757,7 +2757,7 @@
     </p:spTree>
     <p:extLst>
       <p:ext uri="{BB962C8B-B14F-4D97-AF65-F5344CB8AC3E}">
-        <p14:creationId xmlns:p14="http://schemas.microsoft.com/office/powerpoint/2010/main" val="205413353"/>
+        <p14:creationId xmlns:p14="http://schemas.microsoft.com/office/powerpoint/2010/main" val="1213667967"/>
       </p:ext>
     </p:extLst>
   </p:cSld>
@@ -2781,7 +2781,7 @@
           <p:cNvPr id="1" name="">
             <a:extLst xmlns:a="http://schemas.openxmlformats.org/drawingml/2006/main">
               <a:ext uri="{FF2B5EF4-FFF2-40B4-BE49-F238E27FC236}">
-                <a16:creationId xmlns:a16="http://schemas.microsoft.com/office/drawing/2014/main" id="{3E93200E-EF03-4A48-9460-74E4045FCDA0}"/>
+                <a16:creationId xmlns:a16="http://schemas.microsoft.com/office/drawing/2014/main" id="{BAF4182B-7497-413F-9646-F784F928C794}"/>
               </a:ext>
             </a:extLst>
           </p:cNvPr>
@@ -2816,7 +2816,7 @@
           <p:cNvPr id="2" name="">
             <a:extLst xmlns:a="http://schemas.openxmlformats.org/drawingml/2006/main">
               <a:ext uri="{FF2B5EF4-FFF2-40B4-BE49-F238E27FC236}">
-                <a16:creationId xmlns:a16="http://schemas.microsoft.com/office/drawing/2014/main" id="{CAA6FACB-C4E0-4A52-8915-6D5D2F77199D}"/>
+                <a16:creationId xmlns:a16="http://schemas.microsoft.com/office/drawing/2014/main" id="{BD357FF3-8F7F-4AEC-B456-F5D7F65E591F}"/>
               </a:ext>
             </a:extLst>
           </p:cNvPr>
@@ -2851,7 +2851,7 @@
           <p:cNvPr id="3" name="">
             <a:extLst xmlns:a="http://schemas.openxmlformats.org/drawingml/2006/main">
               <a:ext uri="{FF2B5EF4-FFF2-40B4-BE49-F238E27FC236}">
-                <a16:creationId xmlns:a16="http://schemas.microsoft.com/office/drawing/2014/main" id="{E3BA229E-AD95-4AE7-8732-24C4D4DFACC8}"/>
+                <a16:creationId xmlns:a16="http://schemas.microsoft.com/office/drawing/2014/main" id="{099BD0A9-4B3F-447A-AB4B-4D10B23B7C5B}"/>
               </a:ext>
             </a:extLst>
           </p:cNvPr>
@@ -2915,7 +2915,7 @@
           <p:cNvPr id="4" name="">
             <a:extLst xmlns:a="http://schemas.openxmlformats.org/drawingml/2006/main">
               <a:ext uri="{FF2B5EF4-FFF2-40B4-BE49-F238E27FC236}">
-                <a16:creationId xmlns:a16="http://schemas.microsoft.com/office/drawing/2014/main" id="{602380D5-4CF2-4A4F-8081-6682C8F9EE45}"/>
+                <a16:creationId xmlns:a16="http://schemas.microsoft.com/office/drawing/2014/main" id="{5F4A3612-DE90-4660-A48C-3B3BE9EFAFC5}"/>
               </a:ext>
             </a:extLst>
           </p:cNvPr>
@@ -2979,7 +2979,7 @@
           <p:cNvPr id="5" name="">
             <a:extLst xmlns:a="http://schemas.openxmlformats.org/drawingml/2006/main">
               <a:ext uri="{FF2B5EF4-FFF2-40B4-BE49-F238E27FC236}">
-                <a16:creationId xmlns:a16="http://schemas.microsoft.com/office/drawing/2014/main" id="{7D493BC7-D670-49C4-8BA3-EA1A860AE69A}"/>
+                <a16:creationId xmlns:a16="http://schemas.microsoft.com/office/drawing/2014/main" id="{4ECE62A5-F240-4DB5-9640-BD7E6231F612}"/>
               </a:ext>
             </a:extLst>
           </p:cNvPr>
@@ -3043,29 +3043,29 @@
           <p:cNvPr id="6" name="">
             <a:extLst xmlns:a="http://schemas.openxmlformats.org/drawingml/2006/main">
               <a:ext uri="{FF2B5EF4-FFF2-40B4-BE49-F238E27FC236}">
-                <a16:creationId xmlns:a16="http://schemas.microsoft.com/office/drawing/2014/main" id="{F81F83F3-DEDD-4924-9CF1-969D3FBA60F1}"/>
-              </a:ext>
-            </a:extLst>
-          </p:cNvPr>
-          <p:cNvSpPr>
-            <a:spLocks xmlns:a="http://schemas.openxmlformats.org/drawingml/2006/main" noGrp="1"/>
-          </p:cNvSpPr>
-          <p:nvPr/>
-        </p:nvSpPr>
-        <p:spPr>
-          <a:xfrm xmlns:a="http://schemas.openxmlformats.org/drawingml/2006/main">
-            <a:off x="4000500" y="2628900"/>
-            <a:ext cx="3143250" cy="1200150"/>
-          </a:xfrm>
-          <a:prstGeom xmlns:a="http://schemas.openxmlformats.org/drawingml/2006/main" prst="rect">
-            <a:avLst/>
-          </a:prstGeom>
-          <a:solidFill xmlns:a="http://schemas.openxmlformats.org/drawingml/2006/main">
-            <a:srgbClr val="F0FAF8"/>
-          </a:solidFill>
-          <a:ln xmlns:a="http://schemas.openxmlformats.org/drawingml/2006/main" w="19050">
-            <a:solidFill>
-              <a:srgbClr val="007C74"/>
+                <a16:creationId xmlns:a16="http://schemas.microsoft.com/office/drawing/2014/main" id="{63C50D01-077D-4B9F-8DE3-6D83FEE88FDD}"/>
+              </a:ext>
+            </a:extLst>
+          </p:cNvPr>
+          <p:cNvSpPr>
+            <a:spLocks xmlns:a="http://schemas.openxmlformats.org/drawingml/2006/main" noGrp="1"/>
+          </p:cNvSpPr>
+          <p:nvPr/>
+        </p:nvSpPr>
+        <p:spPr>
+          <a:xfrm xmlns:a="http://schemas.openxmlformats.org/drawingml/2006/main">
+            <a:off x="742950" y="2076450"/>
+            <a:ext cx="10096500" cy="2609850"/>
+          </a:xfrm>
+          <a:prstGeom xmlns:a="http://schemas.openxmlformats.org/drawingml/2006/main" prst="rect">
+            <a:avLst/>
+          </a:prstGeom>
+          <a:solidFill xmlns:a="http://schemas.openxmlformats.org/drawingml/2006/main">
+            <a:srgbClr val="FFFDF7"/>
+          </a:solidFill>
+          <a:ln xmlns:a="http://schemas.openxmlformats.org/drawingml/2006/main" w="9525">
+            <a:solidFill>
+              <a:srgbClr val="D8D0C1"/>
             </a:solidFill>
             <a:prstDash val="solid"/>
           </a:ln>
@@ -3076,43 +3076,43 @@
           <p:cNvPr id="7" name="">
             <a:extLst xmlns:a="http://schemas.openxmlformats.org/drawingml/2006/main">
               <a:ext uri="{FF2B5EF4-FFF2-40B4-BE49-F238E27FC236}">
-                <a16:creationId xmlns:a16="http://schemas.microsoft.com/office/drawing/2014/main" id="{EF0A7639-422B-4EBD-9B06-E31A73164C17}"/>
-              </a:ext>
-            </a:extLst>
-          </p:cNvPr>
-          <p:cNvSpPr>
-            <a:spLocks xmlns:a="http://schemas.openxmlformats.org/drawingml/2006/main" noGrp="1"/>
-          </p:cNvSpPr>
-          <p:nvPr/>
-        </p:nvSpPr>
-        <p:spPr>
-          <a:xfrm xmlns:a="http://schemas.openxmlformats.org/drawingml/2006/main">
-            <a:off x="4476750" y="2876550"/>
-            <a:ext cx="2190750" cy="285750"/>
-          </a:xfrm>
-          <a:prstGeom xmlns:a="http://schemas.openxmlformats.org/drawingml/2006/main" prst="rect">
-            <a:avLst/>
-          </a:prstGeom>
-          <a:solidFill xmlns:a="http://schemas.openxmlformats.org/drawingml/2006/main">
-            <a:srgbClr val="000000">
-              <a:alpha val="0"/>
-            </a:srgbClr>
-          </a:solidFill>
-          <a:ln xmlns:a="http://schemas.openxmlformats.org/drawingml/2006/main" w="0">
-            <a:solidFill>
-              <a:srgbClr val="000000">
-                <a:alpha val="0"/>
-              </a:srgbClr>
-            </a:solidFill>
-            <a:prstDash val="solid"/>
-          </a:ln>
-        </p:spPr>
-        <p:txBody>
-          <a:bodyPr xmlns:a="http://schemas.openxmlformats.org/drawingml/2006/main" lIns="0" tIns="0" rIns="0" bIns="0" anchor="t"/>
-          <a:lstStyle xmlns:a="http://schemas.openxmlformats.org/drawingml/2006/main"/>
-          <a:p xmlns:a="http://schemas.openxmlformats.org/drawingml/2006/main">
-            <a:pPr algn="ctr">
-              <a:defRPr sz="1950" b="1">
+                <a16:creationId xmlns:a16="http://schemas.microsoft.com/office/drawing/2014/main" id="{2D2BFB33-3585-4E8D-B15F-63A829BEA50F}"/>
+              </a:ext>
+            </a:extLst>
+          </p:cNvPr>
+          <p:cNvSpPr>
+            <a:spLocks xmlns:a="http://schemas.openxmlformats.org/drawingml/2006/main" noGrp="1"/>
+          </p:cNvSpPr>
+          <p:nvPr/>
+        </p:nvSpPr>
+        <p:spPr>
+          <a:xfrm xmlns:a="http://schemas.openxmlformats.org/drawingml/2006/main">
+            <a:off x="990600" y="2286000"/>
+            <a:ext cx="2667000" cy="228600"/>
+          </a:xfrm>
+          <a:prstGeom xmlns:a="http://schemas.openxmlformats.org/drawingml/2006/main" prst="rect">
+            <a:avLst/>
+          </a:prstGeom>
+          <a:solidFill xmlns:a="http://schemas.openxmlformats.org/drawingml/2006/main">
+            <a:srgbClr val="000000">
+              <a:alpha val="0"/>
+            </a:srgbClr>
+          </a:solidFill>
+          <a:ln xmlns:a="http://schemas.openxmlformats.org/drawingml/2006/main" w="0">
+            <a:solidFill>
+              <a:srgbClr val="000000">
+                <a:alpha val="0"/>
+              </a:srgbClr>
+            </a:solidFill>
+            <a:prstDash val="solid"/>
+          </a:ln>
+        </p:spPr>
+        <p:txBody>
+          <a:bodyPr xmlns:a="http://schemas.openxmlformats.org/drawingml/2006/main" lIns="0" tIns="0" rIns="0" bIns="0" anchor="t"/>
+          <a:lstStyle xmlns:a="http://schemas.openxmlformats.org/drawingml/2006/main"/>
+          <a:p xmlns:a="http://schemas.openxmlformats.org/drawingml/2006/main">
+            <a:pPr algn="l">
+              <a:defRPr sz="1350" b="1">
                 <a:solidFill>
                   <a:srgbClr val="0B4D4A"/>
                 </a:solidFill>
@@ -3122,7 +3122,7 @@
               </a:defRPr>
             </a:pPr>
             <a:r>
-              <a:rPr sz="1950" b="1">
+              <a:rPr sz="1350" b="1">
                 <a:solidFill>
                   <a:srgbClr val="0B4D4A"/>
                 </a:solidFill>
@@ -3130,7 +3130,7 @@
                 <a:ea typeface="Aptos"/>
                 <a:cs typeface="Aptos"/>
               </a:rPr>
-              <a:t>Ray + Trainer</a:t>
+              <a:t>一轮 RL step 的角色闭环</a:t>
             </a:r>
           </a:p>
         </p:txBody>
@@ -3140,43 +3140,43 @@
           <p:cNvPr id="8" name="">
             <a:extLst xmlns:a="http://schemas.openxmlformats.org/drawingml/2006/main">
               <a:ext uri="{FF2B5EF4-FFF2-40B4-BE49-F238E27FC236}">
-                <a16:creationId xmlns:a16="http://schemas.microsoft.com/office/drawing/2014/main" id="{0D7A10E2-E0A0-4C9D-8E64-63C555EBF472}"/>
-              </a:ext>
-            </a:extLst>
-          </p:cNvPr>
-          <p:cNvSpPr>
-            <a:spLocks xmlns:a="http://schemas.openxmlformats.org/drawingml/2006/main" noGrp="1"/>
-          </p:cNvSpPr>
-          <p:nvPr/>
-        </p:nvSpPr>
-        <p:spPr>
-          <a:xfrm xmlns:a="http://schemas.openxmlformats.org/drawingml/2006/main">
-            <a:off x="4305300" y="3257550"/>
-            <a:ext cx="2552700" cy="400050"/>
-          </a:xfrm>
-          <a:prstGeom xmlns:a="http://schemas.openxmlformats.org/drawingml/2006/main" prst="rect">
-            <a:avLst/>
-          </a:prstGeom>
-          <a:solidFill xmlns:a="http://schemas.openxmlformats.org/drawingml/2006/main">
-            <a:srgbClr val="000000">
-              <a:alpha val="0"/>
-            </a:srgbClr>
-          </a:solidFill>
-          <a:ln xmlns:a="http://schemas.openxmlformats.org/drawingml/2006/main" w="0">
-            <a:solidFill>
-              <a:srgbClr val="000000">
-                <a:alpha val="0"/>
-              </a:srgbClr>
-            </a:solidFill>
-            <a:prstDash val="solid"/>
-          </a:ln>
-        </p:spPr>
-        <p:txBody>
-          <a:bodyPr xmlns:a="http://schemas.openxmlformats.org/drawingml/2006/main" lIns="0" tIns="0" rIns="0" bIns="0" anchor="t"/>
-          <a:lstStyle xmlns:a="http://schemas.openxmlformats.org/drawingml/2006/main"/>
-          <a:p xmlns:a="http://schemas.openxmlformats.org/drawingml/2006/main">
-            <a:pPr algn="ctr">
-              <a:defRPr sz="975" b="0">
+                <a16:creationId xmlns:a16="http://schemas.microsoft.com/office/drawing/2014/main" id="{0329E228-847E-4EE9-8842-6A2232BDEE88}"/>
+              </a:ext>
+            </a:extLst>
+          </p:cNvPr>
+          <p:cNvSpPr>
+            <a:spLocks xmlns:a="http://schemas.openxmlformats.org/drawingml/2006/main" noGrp="1"/>
+          </p:cNvSpPr>
+          <p:nvPr/>
+        </p:nvSpPr>
+        <p:spPr>
+          <a:xfrm xmlns:a="http://schemas.openxmlformats.org/drawingml/2006/main">
+            <a:off x="990600" y="2552700"/>
+            <a:ext cx="5905500" cy="228600"/>
+          </a:xfrm>
+          <a:prstGeom xmlns:a="http://schemas.openxmlformats.org/drawingml/2006/main" prst="rect">
+            <a:avLst/>
+          </a:prstGeom>
+          <a:solidFill xmlns:a="http://schemas.openxmlformats.org/drawingml/2006/main">
+            <a:srgbClr val="000000">
+              <a:alpha val="0"/>
+            </a:srgbClr>
+          </a:solidFill>
+          <a:ln xmlns:a="http://schemas.openxmlformats.org/drawingml/2006/main" w="0">
+            <a:solidFill>
+              <a:srgbClr val="000000">
+                <a:alpha val="0"/>
+              </a:srgbClr>
+            </a:solidFill>
+            <a:prstDash val="solid"/>
+          </a:ln>
+        </p:spPr>
+        <p:txBody>
+          <a:bodyPr xmlns:a="http://schemas.openxmlformats.org/drawingml/2006/main" lIns="0" tIns="0" rIns="0" bIns="0" anchor="t"/>
+          <a:lstStyle xmlns:a="http://schemas.openxmlformats.org/drawingml/2006/main"/>
+          <a:p xmlns:a="http://schemas.openxmlformats.org/drawingml/2006/main">
+            <a:pPr algn="l">
+              <a:defRPr sz="938" b="0">
                 <a:solidFill>
                   <a:srgbClr val="65706B"/>
                 </a:solidFill>
@@ -3186,7 +3186,7 @@
               </a:defRPr>
             </a:pPr>
             <a:r>
-              <a:rPr sz="975" b="0">
+              <a:rPr sz="938" b="0">
                 <a:solidFill>
                   <a:srgbClr val="65706B"/>
                 </a:solidFill>
@@ -3194,7 +3194,7 @@
                 <a:ea typeface="Aptos"/>
                 <a:cs typeface="Aptos"/>
               </a:rPr>
-              <a:t>统一调度 worker、数据流、训练 step 和权重同步</a:t>
+              <a:t>Ray 负责把这些角色放到不同 worker / resource pool 上，并驱动远程调用和数据流转。</a:t>
             </a:r>
           </a:p>
         </p:txBody>
@@ -3204,19 +3204,19 @@
           <p:cNvPr id="9" name="">
             <a:extLst xmlns:a="http://schemas.openxmlformats.org/drawingml/2006/main">
               <a:ext uri="{FF2B5EF4-FFF2-40B4-BE49-F238E27FC236}">
-                <a16:creationId xmlns:a16="http://schemas.microsoft.com/office/drawing/2014/main" id="{9B979E1C-865F-4E2F-B490-5DF09C62D031}"/>
-              </a:ext>
-            </a:extLst>
-          </p:cNvPr>
-          <p:cNvSpPr>
-            <a:spLocks xmlns:a="http://schemas.openxmlformats.org/drawingml/2006/main" noGrp="1"/>
-          </p:cNvSpPr>
-          <p:nvPr/>
-        </p:nvSpPr>
-        <p:spPr>
-          <a:xfrm xmlns:a="http://schemas.openxmlformats.org/drawingml/2006/main">
-            <a:off x="1028700" y="2133600"/>
-            <a:ext cx="2095500" cy="781050"/>
+                <a16:creationId xmlns:a16="http://schemas.microsoft.com/office/drawing/2014/main" id="{63724797-62C2-4591-879A-F90E88953C09}"/>
+              </a:ext>
+            </a:extLst>
+          </p:cNvPr>
+          <p:cNvSpPr>
+            <a:spLocks xmlns:a="http://schemas.openxmlformats.org/drawingml/2006/main" noGrp="1"/>
+          </p:cNvSpPr>
+          <p:nvPr/>
+        </p:nvSpPr>
+        <p:spPr>
+          <a:xfrm xmlns:a="http://schemas.openxmlformats.org/drawingml/2006/main">
+            <a:off x="990600" y="3105150"/>
+            <a:ext cx="1485900" cy="781050"/>
           </a:xfrm>
           <a:prstGeom xmlns:a="http://schemas.openxmlformats.org/drawingml/2006/main" prst="rect">
             <a:avLst/>
@@ -3226,7 +3226,7 @@
           </a:solidFill>
           <a:ln xmlns:a="http://schemas.openxmlformats.org/drawingml/2006/main" w="13335">
             <a:solidFill>
-              <a:srgbClr val="D45B47"/>
+              <a:srgbClr val="4F8A5B"/>
             </a:solidFill>
             <a:prstDash val="solid"/>
           </a:ln>
@@ -3237,19 +3237,19 @@
           <p:cNvPr id="10" name="">
             <a:extLst xmlns:a="http://schemas.openxmlformats.org/drawingml/2006/main">
               <a:ext uri="{FF2B5EF4-FFF2-40B4-BE49-F238E27FC236}">
-                <a16:creationId xmlns:a16="http://schemas.microsoft.com/office/drawing/2014/main" id="{316D7D87-AA03-4814-85C5-C4F862FE8E43}"/>
-              </a:ext>
-            </a:extLst>
-          </p:cNvPr>
-          <p:cNvSpPr>
-            <a:spLocks xmlns:a="http://schemas.openxmlformats.org/drawingml/2006/main" noGrp="1"/>
-          </p:cNvSpPr>
-          <p:nvPr/>
-        </p:nvSpPr>
-        <p:spPr>
-          <a:xfrm xmlns:a="http://schemas.openxmlformats.org/drawingml/2006/main">
-            <a:off x="1181100" y="2257425"/>
-            <a:ext cx="1790700" cy="228600"/>
+                <a16:creationId xmlns:a16="http://schemas.microsoft.com/office/drawing/2014/main" id="{14310D6F-DFE4-4216-A99F-3DC681BCB93F}"/>
+              </a:ext>
+            </a:extLst>
+          </p:cNvPr>
+          <p:cNvSpPr>
+            <a:spLocks xmlns:a="http://schemas.openxmlformats.org/drawingml/2006/main" noGrp="1"/>
+          </p:cNvSpPr>
+          <p:nvPr/>
+        </p:nvSpPr>
+        <p:spPr>
+          <a:xfrm xmlns:a="http://schemas.openxmlformats.org/drawingml/2006/main">
+            <a:off x="1143000" y="3228975"/>
+            <a:ext cx="1181100" cy="228600"/>
           </a:xfrm>
           <a:prstGeom xmlns:a="http://schemas.openxmlformats.org/drawingml/2006/main" prst="rect">
             <a:avLst/>
@@ -3291,7 +3291,7 @@
                 <a:ea typeface="Aptos"/>
                 <a:cs typeface="Aptos"/>
               </a:rPr>
-              <a:t>Actor</a:t>
+              <a:t>Prompt batch</a:t>
             </a:r>
           </a:p>
         </p:txBody>
@@ -3301,19 +3301,19 @@
           <p:cNvPr id="11" name="">
             <a:extLst xmlns:a="http://schemas.openxmlformats.org/drawingml/2006/main">
               <a:ext uri="{FF2B5EF4-FFF2-40B4-BE49-F238E27FC236}">
-                <a16:creationId xmlns:a16="http://schemas.microsoft.com/office/drawing/2014/main" id="{F7BBAE4B-BCAA-4444-ACE0-57B9588578C1}"/>
-              </a:ext>
-            </a:extLst>
-          </p:cNvPr>
-          <p:cNvSpPr>
-            <a:spLocks xmlns:a="http://schemas.openxmlformats.org/drawingml/2006/main" noGrp="1"/>
-          </p:cNvSpPr>
-          <p:nvPr/>
-        </p:nvSpPr>
-        <p:spPr>
-          <a:xfrm xmlns:a="http://schemas.openxmlformats.org/drawingml/2006/main">
-            <a:off x="1181100" y="2533650"/>
-            <a:ext cx="1790700" cy="323850"/>
+                <a16:creationId xmlns:a16="http://schemas.microsoft.com/office/drawing/2014/main" id="{139A8380-C9DA-4A56-AB23-687713AF5D72}"/>
+              </a:ext>
+            </a:extLst>
+          </p:cNvPr>
+          <p:cNvSpPr>
+            <a:spLocks xmlns:a="http://schemas.openxmlformats.org/drawingml/2006/main" noGrp="1"/>
+          </p:cNvSpPr>
+          <p:nvPr/>
+        </p:nvSpPr>
+        <p:spPr>
+          <a:xfrm xmlns:a="http://schemas.openxmlformats.org/drawingml/2006/main">
+            <a:off x="1143000" y="3505200"/>
+            <a:ext cx="1181100" cy="323850"/>
           </a:xfrm>
           <a:prstGeom xmlns:a="http://schemas.openxmlformats.org/drawingml/2006/main" prst="rect">
             <a:avLst/>
@@ -3355,7 +3355,7 @@
                 <a:ea typeface="Aptos"/>
                 <a:cs typeface="Aptos"/>
               </a:rPr>
-              <a:t>当前训练的策略模型</a:t>
+              <a:t>DataProto 输入</a:t>
             </a:r>
           </a:p>
         </p:txBody>
@@ -3365,19 +3365,19 @@
           <p:cNvPr id="12" name="">
             <a:extLst xmlns:a="http://schemas.openxmlformats.org/drawingml/2006/main">
               <a:ext uri="{FF2B5EF4-FFF2-40B4-BE49-F238E27FC236}">
-                <a16:creationId xmlns:a16="http://schemas.microsoft.com/office/drawing/2014/main" id="{7FD94D54-5A67-474B-AD37-D3C56EB67FF7}"/>
-              </a:ext>
-            </a:extLst>
-          </p:cNvPr>
-          <p:cNvSpPr>
-            <a:spLocks xmlns:a="http://schemas.openxmlformats.org/drawingml/2006/main" noGrp="1"/>
-          </p:cNvSpPr>
-          <p:nvPr/>
-        </p:nvSpPr>
-        <p:spPr>
-          <a:xfrm xmlns:a="http://schemas.openxmlformats.org/drawingml/2006/main">
-            <a:off x="990600" y="4057650"/>
-            <a:ext cx="2095500" cy="781050"/>
+                <a16:creationId xmlns:a16="http://schemas.microsoft.com/office/drawing/2014/main" id="{A898CD3A-CE5B-47B4-811D-10162155A53B}"/>
+              </a:ext>
+            </a:extLst>
+          </p:cNvPr>
+          <p:cNvSpPr>
+            <a:spLocks xmlns:a="http://schemas.openxmlformats.org/drawingml/2006/main" noGrp="1"/>
+          </p:cNvSpPr>
+          <p:nvPr/>
+        </p:nvSpPr>
+        <p:spPr>
+          <a:xfrm xmlns:a="http://schemas.openxmlformats.org/drawingml/2006/main">
+            <a:off x="2857500" y="3105150"/>
+            <a:ext cx="1485900" cy="781050"/>
           </a:xfrm>
           <a:prstGeom xmlns:a="http://schemas.openxmlformats.org/drawingml/2006/main" prst="rect">
             <a:avLst/>
@@ -3398,19 +3398,19 @@
           <p:cNvPr id="13" name="">
             <a:extLst xmlns:a="http://schemas.openxmlformats.org/drawingml/2006/main">
               <a:ext uri="{FF2B5EF4-FFF2-40B4-BE49-F238E27FC236}">
-                <a16:creationId xmlns:a16="http://schemas.microsoft.com/office/drawing/2014/main" id="{D3C87167-D67D-4167-9D24-A3E9C14D858D}"/>
-              </a:ext>
-            </a:extLst>
-          </p:cNvPr>
-          <p:cNvSpPr>
-            <a:spLocks xmlns:a="http://schemas.openxmlformats.org/drawingml/2006/main" noGrp="1"/>
-          </p:cNvSpPr>
-          <p:nvPr/>
-        </p:nvSpPr>
-        <p:spPr>
-          <a:xfrm xmlns:a="http://schemas.openxmlformats.org/drawingml/2006/main">
-            <a:off x="1143000" y="4181475"/>
-            <a:ext cx="1790700" cy="228600"/>
+                <a16:creationId xmlns:a16="http://schemas.microsoft.com/office/drawing/2014/main" id="{E67E2007-D25E-4289-92D4-E1CB669920D7}"/>
+              </a:ext>
+            </a:extLst>
+          </p:cNvPr>
+          <p:cNvSpPr>
+            <a:spLocks xmlns:a="http://schemas.openxmlformats.org/drawingml/2006/main" noGrp="1"/>
+          </p:cNvSpPr>
+          <p:nvPr/>
+        </p:nvSpPr>
+        <p:spPr>
+          <a:xfrm xmlns:a="http://schemas.openxmlformats.org/drawingml/2006/main">
+            <a:off x="3009900" y="3228975"/>
+            <a:ext cx="1181100" cy="228600"/>
           </a:xfrm>
           <a:prstGeom xmlns:a="http://schemas.openxmlformats.org/drawingml/2006/main" prst="rect">
             <a:avLst/>
@@ -3462,19 +3462,19 @@
           <p:cNvPr id="14" name="">
             <a:extLst xmlns:a="http://schemas.openxmlformats.org/drawingml/2006/main">
               <a:ext uri="{FF2B5EF4-FFF2-40B4-BE49-F238E27FC236}">
-                <a16:creationId xmlns:a16="http://schemas.microsoft.com/office/drawing/2014/main" id="{670B5CDA-9E94-4087-8E3F-EFCB3F0B1D72}"/>
-              </a:ext>
-            </a:extLst>
-          </p:cNvPr>
-          <p:cNvSpPr>
-            <a:spLocks xmlns:a="http://schemas.openxmlformats.org/drawingml/2006/main" noGrp="1"/>
-          </p:cNvSpPr>
-          <p:nvPr/>
-        </p:nvSpPr>
-        <p:spPr>
-          <a:xfrm xmlns:a="http://schemas.openxmlformats.org/drawingml/2006/main">
-            <a:off x="1143000" y="4457700"/>
-            <a:ext cx="1790700" cy="323850"/>
+                <a16:creationId xmlns:a16="http://schemas.microsoft.com/office/drawing/2014/main" id="{5F77D7DF-3DAC-467A-BD3E-E9EDBD3C0D56}"/>
+              </a:ext>
+            </a:extLst>
+          </p:cNvPr>
+          <p:cNvSpPr>
+            <a:spLocks xmlns:a="http://schemas.openxmlformats.org/drawingml/2006/main" noGrp="1"/>
+          </p:cNvSpPr>
+          <p:nvPr/>
+        </p:nvSpPr>
+        <p:spPr>
+          <a:xfrm xmlns:a="http://schemas.openxmlformats.org/drawingml/2006/main">
+            <a:off x="3009900" y="3505200"/>
+            <a:ext cx="1181100" cy="323850"/>
           </a:xfrm>
           <a:prstGeom xmlns:a="http://schemas.openxmlformats.org/drawingml/2006/main" prst="rect">
             <a:avLst/>
@@ -3516,7 +3516,7 @@
                 <a:ea typeface="Aptos"/>
                 <a:cs typeface="Aptos"/>
               </a:rPr>
-              <a:t>用策略模型生成 response</a:t>
+              <a:t>vLLM / SGLang 生成 response</a:t>
             </a:r>
           </a:p>
         </p:txBody>
@@ -3526,19 +3526,19 @@
           <p:cNvPr id="15" name="">
             <a:extLst xmlns:a="http://schemas.openxmlformats.org/drawingml/2006/main">
               <a:ext uri="{FF2B5EF4-FFF2-40B4-BE49-F238E27FC236}">
-                <a16:creationId xmlns:a16="http://schemas.microsoft.com/office/drawing/2014/main" id="{4164A401-D345-472A-A912-1C2E457EFE9B}"/>
-              </a:ext>
-            </a:extLst>
-          </p:cNvPr>
-          <p:cNvSpPr>
-            <a:spLocks xmlns:a="http://schemas.openxmlformats.org/drawingml/2006/main" noGrp="1"/>
-          </p:cNvSpPr>
-          <p:nvPr/>
-        </p:nvSpPr>
-        <p:spPr>
-          <a:xfrm xmlns:a="http://schemas.openxmlformats.org/drawingml/2006/main">
-            <a:off x="7848600" y="2076450"/>
-            <a:ext cx="2095500" cy="781050"/>
+                <a16:creationId xmlns:a16="http://schemas.microsoft.com/office/drawing/2014/main" id="{6FD2A74D-8B7F-4B0B-A7B6-031459A3AA43}"/>
+              </a:ext>
+            </a:extLst>
+          </p:cNvPr>
+          <p:cNvSpPr>
+            <a:spLocks xmlns:a="http://schemas.openxmlformats.org/drawingml/2006/main" noGrp="1"/>
+          </p:cNvSpPr>
+          <p:nvPr/>
+        </p:nvSpPr>
+        <p:spPr>
+          <a:xfrm xmlns:a="http://schemas.openxmlformats.org/drawingml/2006/main">
+            <a:off x="4819650" y="3105150"/>
+            <a:ext cx="1485900" cy="781050"/>
           </a:xfrm>
           <a:prstGeom xmlns:a="http://schemas.openxmlformats.org/drawingml/2006/main" prst="rect">
             <a:avLst/>
@@ -3548,7 +3548,7 @@
           </a:solidFill>
           <a:ln xmlns:a="http://schemas.openxmlformats.org/drawingml/2006/main" w="13335">
             <a:solidFill>
-              <a:srgbClr val="7E5AA6"/>
+              <a:srgbClr val="C78528"/>
             </a:solidFill>
             <a:prstDash val="solid"/>
           </a:ln>
@@ -3559,19 +3559,19 @@
           <p:cNvPr id="16" name="">
             <a:extLst xmlns:a="http://schemas.openxmlformats.org/drawingml/2006/main">
               <a:ext uri="{FF2B5EF4-FFF2-40B4-BE49-F238E27FC236}">
-                <a16:creationId xmlns:a16="http://schemas.microsoft.com/office/drawing/2014/main" id="{557C42F5-6DC2-40F6-AF14-64AF2B77F88E}"/>
-              </a:ext>
-            </a:extLst>
-          </p:cNvPr>
-          <p:cNvSpPr>
-            <a:spLocks xmlns:a="http://schemas.openxmlformats.org/drawingml/2006/main" noGrp="1"/>
-          </p:cNvSpPr>
-          <p:nvPr/>
-        </p:nvSpPr>
-        <p:spPr>
-          <a:xfrm xmlns:a="http://schemas.openxmlformats.org/drawingml/2006/main">
-            <a:off x="8001000" y="2200275"/>
-            <a:ext cx="1790700" cy="228600"/>
+                <a16:creationId xmlns:a16="http://schemas.microsoft.com/office/drawing/2014/main" id="{AD62BA41-7AFC-4B6C-BE72-53B35E9CC59F}"/>
+              </a:ext>
+            </a:extLst>
+          </p:cNvPr>
+          <p:cNvSpPr>
+            <a:spLocks xmlns:a="http://schemas.openxmlformats.org/drawingml/2006/main" noGrp="1"/>
+          </p:cNvSpPr>
+          <p:nvPr/>
+        </p:nvSpPr>
+        <p:spPr>
+          <a:xfrm xmlns:a="http://schemas.openxmlformats.org/drawingml/2006/main">
+            <a:off x="4972050" y="3228975"/>
+            <a:ext cx="1181100" cy="228600"/>
           </a:xfrm>
           <a:prstGeom xmlns:a="http://schemas.openxmlformats.org/drawingml/2006/main" prst="rect">
             <a:avLst/>
@@ -3613,7 +3613,7 @@
                 <a:ea typeface="Aptos"/>
                 <a:cs typeface="Aptos"/>
               </a:rPr>
-              <a:t>Reference</a:t>
+              <a:t>Scoring</a:t>
             </a:r>
           </a:p>
         </p:txBody>
@@ -3623,19 +3623,19 @@
           <p:cNvPr id="17" name="">
             <a:extLst xmlns:a="http://schemas.openxmlformats.org/drawingml/2006/main">
               <a:ext uri="{FF2B5EF4-FFF2-40B4-BE49-F238E27FC236}">
-                <a16:creationId xmlns:a16="http://schemas.microsoft.com/office/drawing/2014/main" id="{9C0F433A-D2D2-415D-B834-BBD6A8F4A1A8}"/>
-              </a:ext>
-            </a:extLst>
-          </p:cNvPr>
-          <p:cNvSpPr>
-            <a:spLocks xmlns:a="http://schemas.openxmlformats.org/drawingml/2006/main" noGrp="1"/>
-          </p:cNvSpPr>
-          <p:nvPr/>
-        </p:nvSpPr>
-        <p:spPr>
-          <a:xfrm xmlns:a="http://schemas.openxmlformats.org/drawingml/2006/main">
-            <a:off x="8001000" y="2476500"/>
-            <a:ext cx="1790700" cy="323850"/>
+                <a16:creationId xmlns:a16="http://schemas.microsoft.com/office/drawing/2014/main" id="{097443C7-8613-434C-99A5-390A50348A95}"/>
+              </a:ext>
+            </a:extLst>
+          </p:cNvPr>
+          <p:cNvSpPr>
+            <a:spLocks xmlns:a="http://schemas.openxmlformats.org/drawingml/2006/main" noGrp="1"/>
+          </p:cNvSpPr>
+          <p:nvPr/>
+        </p:nvSpPr>
+        <p:spPr>
+          <a:xfrm xmlns:a="http://schemas.openxmlformats.org/drawingml/2006/main">
+            <a:off x="4972050" y="3505200"/>
+            <a:ext cx="1181100" cy="323850"/>
           </a:xfrm>
           <a:prstGeom xmlns:a="http://schemas.openxmlformats.org/drawingml/2006/main" prst="rect">
             <a:avLst/>
@@ -3677,7 +3677,7 @@
                 <a:ea typeface="Aptos"/>
                 <a:cs typeface="Aptos"/>
               </a:rPr>
-              <a:t>计算 KL / 行为约束</a:t>
+              <a:t>Reward / Ref / Critic</a:t>
             </a:r>
           </a:p>
         </p:txBody>
@@ -3687,19 +3687,19 @@
           <p:cNvPr id="18" name="">
             <a:extLst xmlns:a="http://schemas.openxmlformats.org/drawingml/2006/main">
               <a:ext uri="{FF2B5EF4-FFF2-40B4-BE49-F238E27FC236}">
-                <a16:creationId xmlns:a16="http://schemas.microsoft.com/office/drawing/2014/main" id="{7702458C-C064-4746-9B75-386BB94C8885}"/>
-              </a:ext>
-            </a:extLst>
-          </p:cNvPr>
-          <p:cNvSpPr>
-            <a:spLocks xmlns:a="http://schemas.openxmlformats.org/drawingml/2006/main" noGrp="1"/>
-          </p:cNvSpPr>
-          <p:nvPr/>
-        </p:nvSpPr>
-        <p:spPr>
-          <a:xfrm xmlns:a="http://schemas.openxmlformats.org/drawingml/2006/main">
-            <a:off x="8477250" y="4057650"/>
-            <a:ext cx="2095500" cy="781050"/>
+                <a16:creationId xmlns:a16="http://schemas.microsoft.com/office/drawing/2014/main" id="{456003F0-C600-44B9-81D8-DEE9910060DF}"/>
+              </a:ext>
+            </a:extLst>
+          </p:cNvPr>
+          <p:cNvSpPr>
+            <a:spLocks xmlns:a="http://schemas.openxmlformats.org/drawingml/2006/main" noGrp="1"/>
+          </p:cNvSpPr>
+          <p:nvPr/>
+        </p:nvSpPr>
+        <p:spPr>
+          <a:xfrm xmlns:a="http://schemas.openxmlformats.org/drawingml/2006/main">
+            <a:off x="7048500" y="3105150"/>
+            <a:ext cx="1485900" cy="781050"/>
           </a:xfrm>
           <a:prstGeom xmlns:a="http://schemas.openxmlformats.org/drawingml/2006/main" prst="rect">
             <a:avLst/>
@@ -3709,7 +3709,7 @@
           </a:solidFill>
           <a:ln xmlns:a="http://schemas.openxmlformats.org/drawingml/2006/main" w="13335">
             <a:solidFill>
-              <a:srgbClr val="C78528"/>
+              <a:srgbClr val="D45B47"/>
             </a:solidFill>
             <a:prstDash val="solid"/>
           </a:ln>
@@ -3720,19 +3720,19 @@
           <p:cNvPr id="19" name="">
             <a:extLst xmlns:a="http://schemas.openxmlformats.org/drawingml/2006/main">
               <a:ext uri="{FF2B5EF4-FFF2-40B4-BE49-F238E27FC236}">
-                <a16:creationId xmlns:a16="http://schemas.microsoft.com/office/drawing/2014/main" id="{16DA7311-C6E1-4CE1-A853-99159903A07B}"/>
-              </a:ext>
-            </a:extLst>
-          </p:cNvPr>
-          <p:cNvSpPr>
-            <a:spLocks xmlns:a="http://schemas.openxmlformats.org/drawingml/2006/main" noGrp="1"/>
-          </p:cNvSpPr>
-          <p:nvPr/>
-        </p:nvSpPr>
-        <p:spPr>
-          <a:xfrm xmlns:a="http://schemas.openxmlformats.org/drawingml/2006/main">
-            <a:off x="8629650" y="4181475"/>
-            <a:ext cx="1790700" cy="228600"/>
+                <a16:creationId xmlns:a16="http://schemas.microsoft.com/office/drawing/2014/main" id="{7A5928F8-BFD7-4CAE-A29C-63113C4C9524}"/>
+              </a:ext>
+            </a:extLst>
+          </p:cNvPr>
+          <p:cNvSpPr>
+            <a:spLocks xmlns:a="http://schemas.openxmlformats.org/drawingml/2006/main" noGrp="1"/>
+          </p:cNvSpPr>
+          <p:nvPr/>
+        </p:nvSpPr>
+        <p:spPr>
+          <a:xfrm xmlns:a="http://schemas.openxmlformats.org/drawingml/2006/main">
+            <a:off x="7200900" y="3228975"/>
+            <a:ext cx="1181100" cy="228600"/>
           </a:xfrm>
           <a:prstGeom xmlns:a="http://schemas.openxmlformats.org/drawingml/2006/main" prst="rect">
             <a:avLst/>
@@ -3774,7 +3774,7 @@
                 <a:ea typeface="Aptos"/>
                 <a:cs typeface="Aptos"/>
               </a:rPr>
-              <a:t>Critic</a:t>
+              <a:t>Trainer</a:t>
             </a:r>
           </a:p>
         </p:txBody>
@@ -3784,19 +3784,19 @@
           <p:cNvPr id="20" name="">
             <a:extLst xmlns:a="http://schemas.openxmlformats.org/drawingml/2006/main">
               <a:ext uri="{FF2B5EF4-FFF2-40B4-BE49-F238E27FC236}">
-                <a16:creationId xmlns:a16="http://schemas.microsoft.com/office/drawing/2014/main" id="{EAD7D93A-3DB0-460C-9BE9-55FF78A16B6E}"/>
-              </a:ext>
-            </a:extLst>
-          </p:cNvPr>
-          <p:cNvSpPr>
-            <a:spLocks xmlns:a="http://schemas.openxmlformats.org/drawingml/2006/main" noGrp="1"/>
-          </p:cNvSpPr>
-          <p:nvPr/>
-        </p:nvSpPr>
-        <p:spPr>
-          <a:xfrm xmlns:a="http://schemas.openxmlformats.org/drawingml/2006/main">
-            <a:off x="8629650" y="4457700"/>
-            <a:ext cx="1790700" cy="323850"/>
+                <a16:creationId xmlns:a16="http://schemas.microsoft.com/office/drawing/2014/main" id="{78C3A61B-E1EB-4DEC-8F21-69FAF5D2339B}"/>
+              </a:ext>
+            </a:extLst>
+          </p:cNvPr>
+          <p:cNvSpPr>
+            <a:spLocks xmlns:a="http://schemas.openxmlformats.org/drawingml/2006/main" noGrp="1"/>
+          </p:cNvSpPr>
+          <p:nvPr/>
+        </p:nvSpPr>
+        <p:spPr>
+          <a:xfrm xmlns:a="http://schemas.openxmlformats.org/drawingml/2006/main">
+            <a:off x="7200900" y="3505200"/>
+            <a:ext cx="1181100" cy="323850"/>
           </a:xfrm>
           <a:prstGeom xmlns:a="http://schemas.openxmlformats.org/drawingml/2006/main" prst="rect">
             <a:avLst/>
@@ -3838,7 +3838,7 @@
                 <a:ea typeface="Aptos"/>
                 <a:cs typeface="Aptos"/>
               </a:rPr>
-              <a:t>PPO value 估计</a:t>
+              <a:t>advantage、loss、参数更新</a:t>
             </a:r>
           </a:p>
         </p:txBody>
@@ -3848,19 +3848,19 @@
           <p:cNvPr id="21" name="">
             <a:extLst xmlns:a="http://schemas.openxmlformats.org/drawingml/2006/main">
               <a:ext uri="{FF2B5EF4-FFF2-40B4-BE49-F238E27FC236}">
-                <a16:creationId xmlns:a16="http://schemas.microsoft.com/office/drawing/2014/main" id="{63678239-9AC4-4AA8-BBE9-E082690BA1D6}"/>
-              </a:ext>
-            </a:extLst>
-          </p:cNvPr>
-          <p:cNvSpPr>
-            <a:spLocks xmlns:a="http://schemas.openxmlformats.org/drawingml/2006/main" noGrp="1"/>
-          </p:cNvSpPr>
-          <p:nvPr/>
-        </p:nvSpPr>
-        <p:spPr>
-          <a:xfrm xmlns:a="http://schemas.openxmlformats.org/drawingml/2006/main">
-            <a:off x="4724400" y="4819650"/>
-            <a:ext cx="2095500" cy="781050"/>
+                <a16:creationId xmlns:a16="http://schemas.microsoft.com/office/drawing/2014/main" id="{25D88980-66A6-429E-B356-5207F68A3374}"/>
+              </a:ext>
+            </a:extLst>
+          </p:cNvPr>
+          <p:cNvSpPr>
+            <a:spLocks xmlns:a="http://schemas.openxmlformats.org/drawingml/2006/main" noGrp="1"/>
+          </p:cNvSpPr>
+          <p:nvPr/>
+        </p:nvSpPr>
+        <p:spPr>
+          <a:xfrm xmlns:a="http://schemas.openxmlformats.org/drawingml/2006/main">
+            <a:off x="8972550" y="3105150"/>
+            <a:ext cx="1485900" cy="781050"/>
           </a:xfrm>
           <a:prstGeom xmlns:a="http://schemas.openxmlformats.org/drawingml/2006/main" prst="rect">
             <a:avLst/>
@@ -3870,7 +3870,7 @@
           </a:solidFill>
           <a:ln xmlns:a="http://schemas.openxmlformats.org/drawingml/2006/main" w="13335">
             <a:solidFill>
-              <a:srgbClr val="4F8A5B"/>
+              <a:srgbClr val="7E5AA6"/>
             </a:solidFill>
             <a:prstDash val="solid"/>
           </a:ln>
@@ -3881,19 +3881,19 @@
           <p:cNvPr id="22" name="">
             <a:extLst xmlns:a="http://schemas.openxmlformats.org/drawingml/2006/main">
               <a:ext uri="{FF2B5EF4-FFF2-40B4-BE49-F238E27FC236}">
-                <a16:creationId xmlns:a16="http://schemas.microsoft.com/office/drawing/2014/main" id="{9F955320-9BF3-4F86-95F6-B306CEEAFC76}"/>
-              </a:ext>
-            </a:extLst>
-          </p:cNvPr>
-          <p:cNvSpPr>
-            <a:spLocks xmlns:a="http://schemas.openxmlformats.org/drawingml/2006/main" noGrp="1"/>
-          </p:cNvSpPr>
-          <p:nvPr/>
-        </p:nvSpPr>
-        <p:spPr>
-          <a:xfrm xmlns:a="http://schemas.openxmlformats.org/drawingml/2006/main">
-            <a:off x="4876800" y="4943475"/>
-            <a:ext cx="1790700" cy="228600"/>
+                <a16:creationId xmlns:a16="http://schemas.microsoft.com/office/drawing/2014/main" id="{04A2ED59-28F0-4C06-AEFF-EA035C2E4197}"/>
+              </a:ext>
+            </a:extLst>
+          </p:cNvPr>
+          <p:cNvSpPr>
+            <a:spLocks xmlns:a="http://schemas.openxmlformats.org/drawingml/2006/main" noGrp="1"/>
+          </p:cNvSpPr>
+          <p:nvPr/>
+        </p:nvSpPr>
+        <p:spPr>
+          <a:xfrm xmlns:a="http://schemas.openxmlformats.org/drawingml/2006/main">
+            <a:off x="9124950" y="3228975"/>
+            <a:ext cx="1181100" cy="228600"/>
           </a:xfrm>
           <a:prstGeom xmlns:a="http://schemas.openxmlformats.org/drawingml/2006/main" prst="rect">
             <a:avLst/>
@@ -3935,7 +3935,7 @@
                 <a:ea typeface="Aptos"/>
                 <a:cs typeface="Aptos"/>
               </a:rPr>
-              <a:t>Reward</a:t>
+              <a:t>Actor</a:t>
             </a:r>
           </a:p>
         </p:txBody>
@@ -3945,19 +3945,19 @@
           <p:cNvPr id="23" name="">
             <a:extLst xmlns:a="http://schemas.openxmlformats.org/drawingml/2006/main">
               <a:ext uri="{FF2B5EF4-FFF2-40B4-BE49-F238E27FC236}">
-                <a16:creationId xmlns:a16="http://schemas.microsoft.com/office/drawing/2014/main" id="{297A0EC4-5B0C-4699-ADF5-177393827498}"/>
-              </a:ext>
-            </a:extLst>
-          </p:cNvPr>
-          <p:cNvSpPr>
-            <a:spLocks xmlns:a="http://schemas.openxmlformats.org/drawingml/2006/main" noGrp="1"/>
-          </p:cNvSpPr>
-          <p:nvPr/>
-        </p:nvSpPr>
-        <p:spPr>
-          <a:xfrm xmlns:a="http://schemas.openxmlformats.org/drawingml/2006/main">
-            <a:off x="4876800" y="5219700"/>
-            <a:ext cx="1790700" cy="323850"/>
+                <a16:creationId xmlns:a16="http://schemas.microsoft.com/office/drawing/2014/main" id="{193986FC-F38A-4F49-94CC-D07EA52CE608}"/>
+              </a:ext>
+            </a:extLst>
+          </p:cNvPr>
+          <p:cNvSpPr>
+            <a:spLocks xmlns:a="http://schemas.openxmlformats.org/drawingml/2006/main" noGrp="1"/>
+          </p:cNvSpPr>
+          <p:nvPr/>
+        </p:nvSpPr>
+        <p:spPr>
+          <a:xfrm xmlns:a="http://schemas.openxmlformats.org/drawingml/2006/main">
+            <a:off x="9124950" y="3505200"/>
+            <a:ext cx="1181100" cy="323850"/>
           </a:xfrm>
           <a:prstGeom xmlns:a="http://schemas.openxmlformats.org/drawingml/2006/main" prst="rect">
             <a:avLst/>
@@ -3999,7 +3999,7 @@
                 <a:ea typeface="Aptos"/>
                 <a:cs typeface="Aptos"/>
               </a:rPr>
-              <a:t>规则或模型打分</a:t>
+              <a:t>当前训练的策略模型</a:t>
             </a:r>
           </a:p>
         </p:txBody>
@@ -4009,25 +4009,25 @@
           <p:cNvPr id="24" name="">
             <a:extLst xmlns:a="http://schemas.openxmlformats.org/drawingml/2006/main">
               <a:ext uri="{FF2B5EF4-FFF2-40B4-BE49-F238E27FC236}">
-                <a16:creationId xmlns:a16="http://schemas.microsoft.com/office/drawing/2014/main" id="{AE335EF1-0F62-4056-86C4-C953B2B2E1BA}"/>
-              </a:ext>
-            </a:extLst>
-          </p:cNvPr>
-          <p:cNvSpPr>
-            <a:spLocks xmlns:a="http://schemas.openxmlformats.org/drawingml/2006/main" noGrp="1"/>
-          </p:cNvSpPr>
-          <p:nvPr/>
-        </p:nvSpPr>
-        <p:spPr>
-          <a:xfrm xmlns:a="http://schemas.openxmlformats.org/drawingml/2006/main">
-            <a:off x="3124200" y="2514600"/>
-            <a:ext cx="762000" cy="19050"/>
-          </a:xfrm>
-          <a:prstGeom xmlns:a="http://schemas.openxmlformats.org/drawingml/2006/main" prst="rect">
-            <a:avLst/>
-          </a:prstGeom>
-          <a:solidFill xmlns:a="http://schemas.openxmlformats.org/drawingml/2006/main">
-            <a:srgbClr val="D45B47"/>
+                <a16:creationId xmlns:a16="http://schemas.microsoft.com/office/drawing/2014/main" id="{F9E30FD0-E681-436F-AA07-4690CED4447C}"/>
+              </a:ext>
+            </a:extLst>
+          </p:cNvPr>
+          <p:cNvSpPr>
+            <a:spLocks xmlns:a="http://schemas.openxmlformats.org/drawingml/2006/main" noGrp="1"/>
+          </p:cNvSpPr>
+          <p:nvPr/>
+        </p:nvSpPr>
+        <p:spPr>
+          <a:xfrm xmlns:a="http://schemas.openxmlformats.org/drawingml/2006/main">
+            <a:off x="2476500" y="3486150"/>
+            <a:ext cx="266700" cy="19050"/>
+          </a:xfrm>
+          <a:prstGeom xmlns:a="http://schemas.openxmlformats.org/drawingml/2006/main" prst="rect">
+            <a:avLst/>
+          </a:prstGeom>
+          <a:solidFill xmlns:a="http://schemas.openxmlformats.org/drawingml/2006/main">
+            <a:srgbClr val="4F8A5B"/>
           </a:solidFill>
           <a:ln xmlns:a="http://schemas.openxmlformats.org/drawingml/2006/main" w="0">
             <a:solidFill>
@@ -4044,18 +4044,18 @@
           <p:cNvPr id="25" name="">
             <a:extLst xmlns:a="http://schemas.openxmlformats.org/drawingml/2006/main">
               <a:ext uri="{FF2B5EF4-FFF2-40B4-BE49-F238E27FC236}">
-                <a16:creationId xmlns:a16="http://schemas.microsoft.com/office/drawing/2014/main" id="{F08968D5-FCD7-407F-97E2-BA8E46849A2A}"/>
-              </a:ext>
-            </a:extLst>
-          </p:cNvPr>
-          <p:cNvSpPr>
-            <a:spLocks xmlns:a="http://schemas.openxmlformats.org/drawingml/2006/main" noGrp="1"/>
-          </p:cNvSpPr>
-          <p:nvPr/>
-        </p:nvSpPr>
-        <p:spPr>
-          <a:xfrm xmlns:a="http://schemas.openxmlformats.org/drawingml/2006/main">
-            <a:off x="3886200" y="2400300"/>
+                <a16:creationId xmlns:a16="http://schemas.microsoft.com/office/drawing/2014/main" id="{C8CB2054-E8A4-4807-95F3-44265D73B9D9}"/>
+              </a:ext>
+            </a:extLst>
+          </p:cNvPr>
+          <p:cNvSpPr>
+            <a:spLocks xmlns:a="http://schemas.openxmlformats.org/drawingml/2006/main" noGrp="1"/>
+          </p:cNvSpPr>
+          <p:nvPr/>
+        </p:nvSpPr>
+        <p:spPr>
+          <a:xfrm xmlns:a="http://schemas.openxmlformats.org/drawingml/2006/main">
+            <a:off x="2743200" y="3371850"/>
             <a:ext cx="171450" cy="209550"/>
           </a:xfrm>
           <a:prstGeom xmlns:a="http://schemas.openxmlformats.org/drawingml/2006/main" prst="rect">
@@ -4082,7 +4082,7 @@
             <a:pPr algn="ctr">
               <a:defRPr sz="1500" b="1">
                 <a:solidFill>
-                  <a:srgbClr val="D45B47"/>
+                  <a:srgbClr val="4F8A5B"/>
                 </a:solidFill>
                 <a:latin typeface="Aptos"/>
                 <a:ea typeface="Aptos"/>
@@ -4092,7 +4092,7 @@
             <a:r>
               <a:rPr sz="1500" b="1">
                 <a:solidFill>
-                  <a:srgbClr val="D45B47"/>
+                  <a:srgbClr val="4F8A5B"/>
                 </a:solidFill>
                 <a:latin typeface="Aptos"/>
                 <a:ea typeface="Aptos"/>
@@ -4108,19 +4108,19 @@
           <p:cNvPr id="26" name="">
             <a:extLst xmlns:a="http://schemas.openxmlformats.org/drawingml/2006/main">
               <a:ext uri="{FF2B5EF4-FFF2-40B4-BE49-F238E27FC236}">
-                <a16:creationId xmlns:a16="http://schemas.microsoft.com/office/drawing/2014/main" id="{FF39927D-32E4-456B-A618-3CA53DE50351}"/>
-              </a:ext>
-            </a:extLst>
-          </p:cNvPr>
-          <p:cNvSpPr>
-            <a:spLocks xmlns:a="http://schemas.openxmlformats.org/drawingml/2006/main" noGrp="1"/>
-          </p:cNvSpPr>
-          <p:nvPr/>
-        </p:nvSpPr>
-        <p:spPr>
-          <a:xfrm xmlns:a="http://schemas.openxmlformats.org/drawingml/2006/main">
-            <a:off x="3076575" y="3486150"/>
-            <a:ext cx="19050" cy="838200"/>
+                <a16:creationId xmlns:a16="http://schemas.microsoft.com/office/drawing/2014/main" id="{0B2F7ED0-FE53-4499-85A2-FF33CDCFAE97}"/>
+              </a:ext>
+            </a:extLst>
+          </p:cNvPr>
+          <p:cNvSpPr>
+            <a:spLocks xmlns:a="http://schemas.openxmlformats.org/drawingml/2006/main" noGrp="1"/>
+          </p:cNvSpPr>
+          <p:nvPr/>
+        </p:nvSpPr>
+        <p:spPr>
+          <a:xfrm xmlns:a="http://schemas.openxmlformats.org/drawingml/2006/main">
+            <a:off x="4343400" y="3486150"/>
+            <a:ext cx="361950" cy="19050"/>
           </a:xfrm>
           <a:prstGeom xmlns:a="http://schemas.openxmlformats.org/drawingml/2006/main" prst="rect">
             <a:avLst/>
@@ -4143,117 +4143,18 @@
           <p:cNvPr id="27" name="">
             <a:extLst xmlns:a="http://schemas.openxmlformats.org/drawingml/2006/main">
               <a:ext uri="{FF2B5EF4-FFF2-40B4-BE49-F238E27FC236}">
-                <a16:creationId xmlns:a16="http://schemas.microsoft.com/office/drawing/2014/main" id="{B96CCBDD-536F-49A1-A954-230E30156E44}"/>
-              </a:ext>
-            </a:extLst>
-          </p:cNvPr>
-          <p:cNvSpPr>
-            <a:spLocks xmlns:a="http://schemas.openxmlformats.org/drawingml/2006/main" noGrp="1"/>
-          </p:cNvSpPr>
-          <p:nvPr/>
-        </p:nvSpPr>
-        <p:spPr>
-          <a:xfrm xmlns:a="http://schemas.openxmlformats.org/drawingml/2006/main">
-            <a:off x="3000375" y="3467100"/>
-            <a:ext cx="171450" cy="171450"/>
-          </a:xfrm>
-          <a:prstGeom xmlns:a="http://schemas.openxmlformats.org/drawingml/2006/main" prst="rect">
-            <a:avLst/>
-          </a:prstGeom>
-          <a:solidFill xmlns:a="http://schemas.openxmlformats.org/drawingml/2006/main">
-            <a:srgbClr val="000000">
-              <a:alpha val="0"/>
-            </a:srgbClr>
-          </a:solidFill>
-          <a:ln xmlns:a="http://schemas.openxmlformats.org/drawingml/2006/main" w="0">
-            <a:solidFill>
-              <a:srgbClr val="000000">
-                <a:alpha val="0"/>
-              </a:srgbClr>
-            </a:solidFill>
-            <a:prstDash val="solid"/>
-          </a:ln>
-        </p:spPr>
-        <p:txBody>
-          <a:bodyPr xmlns:a="http://schemas.openxmlformats.org/drawingml/2006/main" lIns="0" tIns="0" rIns="0" bIns="0" anchor="t"/>
-          <a:lstStyle xmlns:a="http://schemas.openxmlformats.org/drawingml/2006/main"/>
-          <a:p xmlns:a="http://schemas.openxmlformats.org/drawingml/2006/main">
-            <a:pPr algn="ctr">
-              <a:defRPr sz="1125" b="1">
-                <a:solidFill>
-                  <a:srgbClr val="007C74"/>
-                </a:solidFill>
-                <a:latin typeface="Aptos"/>
-                <a:ea typeface="Aptos"/>
-                <a:cs typeface="Aptos"/>
-              </a:defRPr>
-            </a:pPr>
-            <a:r>
-              <a:rPr sz="1125" b="1">
-                <a:solidFill>
-                  <a:srgbClr val="007C74"/>
-                </a:solidFill>
-                <a:latin typeface="Aptos"/>
-                <a:ea typeface="Aptos"/>
-                <a:cs typeface="Aptos"/>
-              </a:rPr>
-              <a:t>^</a:t>
-            </a:r>
-          </a:p>
-        </p:txBody>
-      </p:sp>
-      <p:sp>
-        <p:nvSpPr>
-          <p:cNvPr id="28" name="">
-            <a:extLst xmlns:a="http://schemas.openxmlformats.org/drawingml/2006/main">
-              <a:ext uri="{FF2B5EF4-FFF2-40B4-BE49-F238E27FC236}">
-                <a16:creationId xmlns:a16="http://schemas.microsoft.com/office/drawing/2014/main" id="{D0CC6A1A-DF60-40D4-8E44-BEF42E9735E3}"/>
-              </a:ext>
-            </a:extLst>
-          </p:cNvPr>
-          <p:cNvSpPr>
-            <a:spLocks xmlns:a="http://schemas.openxmlformats.org/drawingml/2006/main" noGrp="1"/>
-          </p:cNvSpPr>
-          <p:nvPr/>
-        </p:nvSpPr>
-        <p:spPr>
-          <a:xfrm xmlns:a="http://schemas.openxmlformats.org/drawingml/2006/main">
-            <a:off x="7143750" y="2981325"/>
-            <a:ext cx="590550" cy="19050"/>
-          </a:xfrm>
-          <a:prstGeom xmlns:a="http://schemas.openxmlformats.org/drawingml/2006/main" prst="rect">
-            <a:avLst/>
-          </a:prstGeom>
-          <a:solidFill xmlns:a="http://schemas.openxmlformats.org/drawingml/2006/main">
-            <a:srgbClr val="7E5AA6"/>
-          </a:solidFill>
-          <a:ln xmlns:a="http://schemas.openxmlformats.org/drawingml/2006/main" w="0">
-            <a:solidFill>
-              <a:srgbClr val="000000">
-                <a:alpha val="0"/>
-              </a:srgbClr>
-            </a:solidFill>
-            <a:prstDash val="solid"/>
-          </a:ln>
-        </p:spPr>
-      </p:sp>
-      <p:sp>
-        <p:nvSpPr>
-          <p:cNvPr id="29" name="">
-            <a:extLst xmlns:a="http://schemas.openxmlformats.org/drawingml/2006/main">
-              <a:ext uri="{FF2B5EF4-FFF2-40B4-BE49-F238E27FC236}">
-                <a16:creationId xmlns:a16="http://schemas.microsoft.com/office/drawing/2014/main" id="{A66ABB51-EEBC-4FDD-8B77-C193656FF9AD}"/>
-              </a:ext>
-            </a:extLst>
-          </p:cNvPr>
-          <p:cNvSpPr>
-            <a:spLocks xmlns:a="http://schemas.openxmlformats.org/drawingml/2006/main" noGrp="1"/>
-          </p:cNvSpPr>
-          <p:nvPr/>
-        </p:nvSpPr>
-        <p:spPr>
-          <a:xfrm xmlns:a="http://schemas.openxmlformats.org/drawingml/2006/main">
-            <a:off x="7734300" y="2867025"/>
+                <a16:creationId xmlns:a16="http://schemas.microsoft.com/office/drawing/2014/main" id="{B588D710-3207-45EE-876B-182E6FAFEC85}"/>
+              </a:ext>
+            </a:extLst>
+          </p:cNvPr>
+          <p:cNvSpPr>
+            <a:spLocks xmlns:a="http://schemas.openxmlformats.org/drawingml/2006/main" noGrp="1"/>
+          </p:cNvSpPr>
+          <p:nvPr/>
+        </p:nvSpPr>
+        <p:spPr>
+          <a:xfrm xmlns:a="http://schemas.openxmlformats.org/drawingml/2006/main">
+            <a:off x="4705350" y="3371850"/>
             <a:ext cx="171450" cy="209550"/>
           </a:xfrm>
           <a:prstGeom xmlns:a="http://schemas.openxmlformats.org/drawingml/2006/main" prst="rect">
@@ -4280,7 +4181,7 @@
             <a:pPr algn="ctr">
               <a:defRPr sz="1500" b="1">
                 <a:solidFill>
-                  <a:srgbClr val="7E5AA6"/>
+                  <a:srgbClr val="007C74"/>
                 </a:solidFill>
                 <a:latin typeface="Aptos"/>
                 <a:ea typeface="Aptos"/>
@@ -4290,7 +4191,7 @@
             <a:r>
               <a:rPr sz="1500" b="1">
                 <a:solidFill>
-                  <a:srgbClr val="7E5AA6"/>
+                  <a:srgbClr val="007C74"/>
                 </a:solidFill>
                 <a:latin typeface="Aptos"/>
                 <a:ea typeface="Aptos"/>
@@ -4303,22 +4204,22 @@
       </p:sp>
       <p:sp>
         <p:nvSpPr>
-          <p:cNvPr id="30" name="">
-            <a:extLst xmlns:a="http://schemas.openxmlformats.org/drawingml/2006/main">
-              <a:ext uri="{FF2B5EF4-FFF2-40B4-BE49-F238E27FC236}">
-                <a16:creationId xmlns:a16="http://schemas.microsoft.com/office/drawing/2014/main" id="{C7AD5202-F49C-4134-B8C4-BBB8FCE97D63}"/>
-              </a:ext>
-            </a:extLst>
-          </p:cNvPr>
-          <p:cNvSpPr>
-            <a:spLocks xmlns:a="http://schemas.openxmlformats.org/drawingml/2006/main" noGrp="1"/>
-          </p:cNvSpPr>
-          <p:nvPr/>
-        </p:nvSpPr>
-        <p:spPr>
-          <a:xfrm xmlns:a="http://schemas.openxmlformats.org/drawingml/2006/main">
-            <a:off x="7143750" y="3476625"/>
-            <a:ext cx="1219200" cy="19050"/>
+          <p:cNvPr id="28" name="">
+            <a:extLst xmlns:a="http://schemas.openxmlformats.org/drawingml/2006/main">
+              <a:ext uri="{FF2B5EF4-FFF2-40B4-BE49-F238E27FC236}">
+                <a16:creationId xmlns:a16="http://schemas.microsoft.com/office/drawing/2014/main" id="{CDF2A0D3-F613-4D04-AD2F-009556D3CC85}"/>
+              </a:ext>
+            </a:extLst>
+          </p:cNvPr>
+          <p:cNvSpPr>
+            <a:spLocks xmlns:a="http://schemas.openxmlformats.org/drawingml/2006/main" noGrp="1"/>
+          </p:cNvSpPr>
+          <p:nvPr/>
+        </p:nvSpPr>
+        <p:spPr>
+          <a:xfrm xmlns:a="http://schemas.openxmlformats.org/drawingml/2006/main">
+            <a:off x="6591300" y="3486150"/>
+            <a:ext cx="342900" cy="19050"/>
           </a:xfrm>
           <a:prstGeom xmlns:a="http://schemas.openxmlformats.org/drawingml/2006/main" prst="rect">
             <a:avLst/>
@@ -4338,21 +4239,21 @@
       </p:sp>
       <p:sp>
         <p:nvSpPr>
-          <p:cNvPr id="31" name="">
-            <a:extLst xmlns:a="http://schemas.openxmlformats.org/drawingml/2006/main">
-              <a:ext uri="{FF2B5EF4-FFF2-40B4-BE49-F238E27FC236}">
-                <a16:creationId xmlns:a16="http://schemas.microsoft.com/office/drawing/2014/main" id="{12744A14-5F17-4650-BF2B-C737309A049A}"/>
-              </a:ext>
-            </a:extLst>
-          </p:cNvPr>
-          <p:cNvSpPr>
-            <a:spLocks xmlns:a="http://schemas.openxmlformats.org/drawingml/2006/main" noGrp="1"/>
-          </p:cNvSpPr>
-          <p:nvPr/>
-        </p:nvSpPr>
-        <p:spPr>
-          <a:xfrm xmlns:a="http://schemas.openxmlformats.org/drawingml/2006/main">
-            <a:off x="8362950" y="3362325"/>
+          <p:cNvPr id="29" name="">
+            <a:extLst xmlns:a="http://schemas.openxmlformats.org/drawingml/2006/main">
+              <a:ext uri="{FF2B5EF4-FFF2-40B4-BE49-F238E27FC236}">
+                <a16:creationId xmlns:a16="http://schemas.microsoft.com/office/drawing/2014/main" id="{F41EE9C8-751F-4E9B-B322-7439409339A7}"/>
+              </a:ext>
+            </a:extLst>
+          </p:cNvPr>
+          <p:cNvSpPr>
+            <a:spLocks xmlns:a="http://schemas.openxmlformats.org/drawingml/2006/main" noGrp="1"/>
+          </p:cNvSpPr>
+          <p:nvPr/>
+        </p:nvSpPr>
+        <p:spPr>
+          <a:xfrm xmlns:a="http://schemas.openxmlformats.org/drawingml/2006/main">
+            <a:off x="6934200" y="3371850"/>
             <a:ext cx="171450" cy="209550"/>
           </a:xfrm>
           <a:prstGeom xmlns:a="http://schemas.openxmlformats.org/drawingml/2006/main" prst="rect">
@@ -4402,28 +4303,127 @@
       </p:sp>
       <p:sp>
         <p:nvSpPr>
+          <p:cNvPr id="30" name="">
+            <a:extLst xmlns:a="http://schemas.openxmlformats.org/drawingml/2006/main">
+              <a:ext uri="{FF2B5EF4-FFF2-40B4-BE49-F238E27FC236}">
+                <a16:creationId xmlns:a16="http://schemas.microsoft.com/office/drawing/2014/main" id="{0262D5B5-6EAF-450B-B601-539AED065E20}"/>
+              </a:ext>
+            </a:extLst>
+          </p:cNvPr>
+          <p:cNvSpPr>
+            <a:spLocks xmlns:a="http://schemas.openxmlformats.org/drawingml/2006/main" noGrp="1"/>
+          </p:cNvSpPr>
+          <p:nvPr/>
+        </p:nvSpPr>
+        <p:spPr>
+          <a:xfrm xmlns:a="http://schemas.openxmlformats.org/drawingml/2006/main">
+            <a:off x="8534400" y="3486150"/>
+            <a:ext cx="323850" cy="19050"/>
+          </a:xfrm>
+          <a:prstGeom xmlns:a="http://schemas.openxmlformats.org/drawingml/2006/main" prst="rect">
+            <a:avLst/>
+          </a:prstGeom>
+          <a:solidFill xmlns:a="http://schemas.openxmlformats.org/drawingml/2006/main">
+            <a:srgbClr val="D45B47"/>
+          </a:solidFill>
+          <a:ln xmlns:a="http://schemas.openxmlformats.org/drawingml/2006/main" w="0">
+            <a:solidFill>
+              <a:srgbClr val="000000">
+                <a:alpha val="0"/>
+              </a:srgbClr>
+            </a:solidFill>
+            <a:prstDash val="solid"/>
+          </a:ln>
+        </p:spPr>
+      </p:sp>
+      <p:sp>
+        <p:nvSpPr>
+          <p:cNvPr id="31" name="">
+            <a:extLst xmlns:a="http://schemas.openxmlformats.org/drawingml/2006/main">
+              <a:ext uri="{FF2B5EF4-FFF2-40B4-BE49-F238E27FC236}">
+                <a16:creationId xmlns:a16="http://schemas.microsoft.com/office/drawing/2014/main" id="{96106333-35AB-4C16-94DD-D58A08580B2D}"/>
+              </a:ext>
+            </a:extLst>
+          </p:cNvPr>
+          <p:cNvSpPr>
+            <a:spLocks xmlns:a="http://schemas.openxmlformats.org/drawingml/2006/main" noGrp="1"/>
+          </p:cNvSpPr>
+          <p:nvPr/>
+        </p:nvSpPr>
+        <p:spPr>
+          <a:xfrm xmlns:a="http://schemas.openxmlformats.org/drawingml/2006/main">
+            <a:off x="8858250" y="3371850"/>
+            <a:ext cx="171450" cy="209550"/>
+          </a:xfrm>
+          <a:prstGeom xmlns:a="http://schemas.openxmlformats.org/drawingml/2006/main" prst="rect">
+            <a:avLst/>
+          </a:prstGeom>
+          <a:solidFill xmlns:a="http://schemas.openxmlformats.org/drawingml/2006/main">
+            <a:srgbClr val="000000">
+              <a:alpha val="0"/>
+            </a:srgbClr>
+          </a:solidFill>
+          <a:ln xmlns:a="http://schemas.openxmlformats.org/drawingml/2006/main" w="0">
+            <a:solidFill>
+              <a:srgbClr val="000000">
+                <a:alpha val="0"/>
+              </a:srgbClr>
+            </a:solidFill>
+            <a:prstDash val="solid"/>
+          </a:ln>
+        </p:spPr>
+        <p:txBody>
+          <a:bodyPr xmlns:a="http://schemas.openxmlformats.org/drawingml/2006/main" lIns="0" tIns="0" rIns="0" bIns="0" anchor="t"/>
+          <a:lstStyle xmlns:a="http://schemas.openxmlformats.org/drawingml/2006/main"/>
+          <a:p xmlns:a="http://schemas.openxmlformats.org/drawingml/2006/main">
+            <a:pPr algn="ctr">
+              <a:defRPr sz="1500" b="1">
+                <a:solidFill>
+                  <a:srgbClr val="D45B47"/>
+                </a:solidFill>
+                <a:latin typeface="Aptos"/>
+                <a:ea typeface="Aptos"/>
+                <a:cs typeface="Aptos"/>
+              </a:defRPr>
+            </a:pPr>
+            <a:r>
+              <a:rPr sz="1500" b="1">
+                <a:solidFill>
+                  <a:srgbClr val="D45B47"/>
+                </a:solidFill>
+                <a:latin typeface="Aptos"/>
+                <a:ea typeface="Aptos"/>
+                <a:cs typeface="Aptos"/>
+              </a:rPr>
+              <a:t>&gt;</a:t>
+            </a:r>
+          </a:p>
+        </p:txBody>
+      </p:sp>
+      <p:sp>
+        <p:nvSpPr>
           <p:cNvPr id="32" name="">
             <a:extLst xmlns:a="http://schemas.openxmlformats.org/drawingml/2006/main">
               <a:ext uri="{FF2B5EF4-FFF2-40B4-BE49-F238E27FC236}">
-                <a16:creationId xmlns:a16="http://schemas.microsoft.com/office/drawing/2014/main" id="{807F1032-9A8C-4F13-9D64-D754329DF594}"/>
-              </a:ext>
-            </a:extLst>
-          </p:cNvPr>
-          <p:cNvSpPr>
-            <a:spLocks xmlns:a="http://schemas.openxmlformats.org/drawingml/2006/main" noGrp="1"/>
-          </p:cNvSpPr>
-          <p:nvPr/>
-        </p:nvSpPr>
-        <p:spPr>
-          <a:xfrm xmlns:a="http://schemas.openxmlformats.org/drawingml/2006/main">
-            <a:off x="5572125" y="3905250"/>
-            <a:ext cx="19050" cy="800100"/>
-          </a:xfrm>
-          <a:prstGeom xmlns:a="http://schemas.openxmlformats.org/drawingml/2006/main" prst="rect">
-            <a:avLst/>
-          </a:prstGeom>
-          <a:solidFill xmlns:a="http://schemas.openxmlformats.org/drawingml/2006/main">
-            <a:srgbClr val="4F8A5B"/>
+                <a16:creationId xmlns:a16="http://schemas.microsoft.com/office/drawing/2014/main" id="{1135D29D-199B-4914-9663-EFBAA1ADDC00}"/>
+              </a:ext>
+            </a:extLst>
+          </p:cNvPr>
+          <p:cNvSpPr>
+            <a:spLocks xmlns:a="http://schemas.openxmlformats.org/drawingml/2006/main" noGrp="1"/>
+          </p:cNvSpPr>
+          <p:nvPr/>
+        </p:nvSpPr>
+        <p:spPr>
+          <a:xfrm xmlns:a="http://schemas.openxmlformats.org/drawingml/2006/main">
+            <a:off x="3600450" y="4162425"/>
+            <a:ext cx="5981700" cy="19050"/>
+          </a:xfrm>
+          <a:prstGeom xmlns:a="http://schemas.openxmlformats.org/drawingml/2006/main" prst="rect">
+            <a:avLst/>
+          </a:prstGeom>
+          <a:solidFill xmlns:a="http://schemas.openxmlformats.org/drawingml/2006/main">
+            <a:srgbClr val="7E5AA6"/>
           </a:solidFill>
           <a:ln xmlns:a="http://schemas.openxmlformats.org/drawingml/2006/main" w="0">
             <a:solidFill>
@@ -4440,19 +4440,19 @@
           <p:cNvPr id="33" name="">
             <a:extLst xmlns:a="http://schemas.openxmlformats.org/drawingml/2006/main">
               <a:ext uri="{FF2B5EF4-FFF2-40B4-BE49-F238E27FC236}">
-                <a16:creationId xmlns:a16="http://schemas.microsoft.com/office/drawing/2014/main" id="{96AD3E30-6106-4572-AE89-17620DF7EDEB}"/>
-              </a:ext>
-            </a:extLst>
-          </p:cNvPr>
-          <p:cNvSpPr>
-            <a:spLocks xmlns:a="http://schemas.openxmlformats.org/drawingml/2006/main" noGrp="1"/>
-          </p:cNvSpPr>
-          <p:nvPr/>
-        </p:nvSpPr>
-        <p:spPr>
-          <a:xfrm xmlns:a="http://schemas.openxmlformats.org/drawingml/2006/main">
-            <a:off x="5495925" y="3886200"/>
-            <a:ext cx="171450" cy="171450"/>
+                <a16:creationId xmlns:a16="http://schemas.microsoft.com/office/drawing/2014/main" id="{B2CF5A4A-9755-4494-BAA9-31C28E2AB7A3}"/>
+              </a:ext>
+            </a:extLst>
+          </p:cNvPr>
+          <p:cNvSpPr>
+            <a:spLocks xmlns:a="http://schemas.openxmlformats.org/drawingml/2006/main" noGrp="1"/>
+          </p:cNvSpPr>
+          <p:nvPr/>
+        </p:nvSpPr>
+        <p:spPr>
+          <a:xfrm xmlns:a="http://schemas.openxmlformats.org/drawingml/2006/main">
+            <a:off x="3600450" y="4048125"/>
+            <a:ext cx="171450" cy="209550"/>
           </a:xfrm>
           <a:prstGeom xmlns:a="http://schemas.openxmlformats.org/drawingml/2006/main" prst="rect">
             <a:avLst/>
@@ -4476,42 +4476,106 @@
           <a:lstStyle xmlns:a="http://schemas.openxmlformats.org/drawingml/2006/main"/>
           <a:p xmlns:a="http://schemas.openxmlformats.org/drawingml/2006/main">
             <a:pPr algn="ctr">
-              <a:defRPr sz="1125" b="1">
-                <a:solidFill>
-                  <a:srgbClr val="4F8A5B"/>
-                </a:solidFill>
-                <a:latin typeface="Aptos"/>
-                <a:ea typeface="Aptos"/>
-                <a:cs typeface="Aptos"/>
-              </a:defRPr>
-            </a:pPr>
-            <a:r>
-              <a:rPr sz="1125" b="1">
-                <a:solidFill>
-                  <a:srgbClr val="4F8A5B"/>
-                </a:solidFill>
-                <a:latin typeface="Aptos"/>
-                <a:ea typeface="Aptos"/>
-                <a:cs typeface="Aptos"/>
-              </a:rPr>
-              <a:t>^</a:t>
+              <a:defRPr sz="1500" b="1">
+                <a:solidFill>
+                  <a:srgbClr val="7E5AA6"/>
+                </a:solidFill>
+                <a:latin typeface="Aptos"/>
+                <a:ea typeface="Aptos"/>
+                <a:cs typeface="Aptos"/>
+              </a:defRPr>
+            </a:pPr>
+            <a:r>
+              <a:rPr sz="1500" b="1">
+                <a:solidFill>
+                  <a:srgbClr val="7E5AA6"/>
+                </a:solidFill>
+                <a:latin typeface="Aptos"/>
+                <a:ea typeface="Aptos"/>
+                <a:cs typeface="Aptos"/>
+              </a:rPr>
+              <a:t>&lt;</a:t>
+            </a:r>
+          </a:p>
+        </p:txBody>
+      </p:sp>
+      <p:sp>
+        <p:nvSpPr>
+          <p:cNvPr id="34" name="">
+            <a:extLst xmlns:a="http://schemas.openxmlformats.org/drawingml/2006/main">
+              <a:ext uri="{FF2B5EF4-FFF2-40B4-BE49-F238E27FC236}">
+                <a16:creationId xmlns:a16="http://schemas.microsoft.com/office/drawing/2014/main" id="{847DD75D-60CA-473C-AE1B-AD303D0C285E}"/>
+              </a:ext>
+            </a:extLst>
+          </p:cNvPr>
+          <p:cNvSpPr>
+            <a:spLocks xmlns:a="http://schemas.openxmlformats.org/drawingml/2006/main" noGrp="1"/>
+          </p:cNvSpPr>
+          <p:nvPr/>
+        </p:nvSpPr>
+        <p:spPr>
+          <a:xfrm xmlns:a="http://schemas.openxmlformats.org/drawingml/2006/main">
+            <a:off x="4972050" y="4267200"/>
+            <a:ext cx="3429000" cy="190500"/>
+          </a:xfrm>
+          <a:prstGeom xmlns:a="http://schemas.openxmlformats.org/drawingml/2006/main" prst="rect">
+            <a:avLst/>
+          </a:prstGeom>
+          <a:solidFill xmlns:a="http://schemas.openxmlformats.org/drawingml/2006/main">
+            <a:srgbClr val="000000">
+              <a:alpha val="0"/>
+            </a:srgbClr>
+          </a:solidFill>
+          <a:ln xmlns:a="http://schemas.openxmlformats.org/drawingml/2006/main" w="0">
+            <a:solidFill>
+              <a:srgbClr val="000000">
+                <a:alpha val="0"/>
+              </a:srgbClr>
+            </a:solidFill>
+            <a:prstDash val="solid"/>
+          </a:ln>
+        </p:spPr>
+        <p:txBody>
+          <a:bodyPr xmlns:a="http://schemas.openxmlformats.org/drawingml/2006/main" lIns="0" tIns="0" rIns="0" bIns="0" anchor="t"/>
+          <a:lstStyle xmlns:a="http://schemas.openxmlformats.org/drawingml/2006/main"/>
+          <a:p xmlns:a="http://schemas.openxmlformats.org/drawingml/2006/main">
+            <a:pPr algn="ctr">
+              <a:defRPr sz="900" b="1">
+                <a:solidFill>
+                  <a:srgbClr val="7E5AA6"/>
+                </a:solidFill>
+                <a:latin typeface="Aptos"/>
+                <a:ea typeface="Aptos"/>
+                <a:cs typeface="Aptos"/>
+              </a:defRPr>
+            </a:pPr>
+            <a:r>
+              <a:rPr sz="900" b="1">
+                <a:solidFill>
+                  <a:srgbClr val="7E5AA6"/>
+                </a:solidFill>
+                <a:latin typeface="Aptos"/>
+                <a:ea typeface="Aptos"/>
+                <a:cs typeface="Aptos"/>
+              </a:rPr>
+              <a:t>权重同步回 rollout，进入下一轮生成</a:t>
             </a:r>
           </a:p>
         </p:txBody>
       </p:sp>
       <p:pic>
         <p:nvPicPr>
-          <p:cNvPr id="34" name=""/>
+          <p:cNvPr id="35" name=""/>
           <p:cNvPicPr>
             <a:picLocks xmlns:a="http://schemas.openxmlformats.org/drawingml/2006/main" noChangeAspect="1"/>
           </p:cNvPicPr>
           <p:nvPr/>
         </p:nvPicPr>
         <p:blipFill>
-          <a:blip xmlns:r="http://schemas.openxmlformats.org/officeDocument/2006/relationships" xmlns:a="http://schemas.openxmlformats.org/drawingml/2006/main" r:embed="R0c4548e306fe4503">
+          <a:blip xmlns:r="http://schemas.openxmlformats.org/officeDocument/2006/relationships" xmlns:a="http://schemas.openxmlformats.org/drawingml/2006/main" r:embed="Ra01ffe561b1b42ad">
             <a:extLst>
               <a:ext uri="{96DAC541-7B7A-43D3-8B79-37D633B846F1}">
-                <asvg:svgBlip xmlns:asvg="http://schemas.microsoft.com/office/drawing/2016/SVG/main" r:embed="Rc4c4b22dd6b2414f"/>
+                <asvg:svgBlip xmlns:asvg="http://schemas.microsoft.com/office/drawing/2016/SVG/main" r:embed="Rd86bdb6572ce49f1"/>
               </a:ext>
             </a:extLst>
           </a:blip>
@@ -4529,10 +4593,10 @@
       </p:pic>
       <p:sp>
         <p:nvSpPr>
-          <p:cNvPr id="35" name="">
-            <a:extLst xmlns:a="http://schemas.openxmlformats.org/drawingml/2006/main">
-              <a:ext uri="{FF2B5EF4-FFF2-40B4-BE49-F238E27FC236}">
-                <a16:creationId xmlns:a16="http://schemas.microsoft.com/office/drawing/2014/main" id="{2721C2BD-66AD-4234-8571-C24B672E2948}"/>
+          <p:cNvPr id="36" name="">
+            <a:extLst xmlns:a="http://schemas.openxmlformats.org/drawingml/2006/main">
+              <a:ext uri="{FF2B5EF4-FFF2-40B4-BE49-F238E27FC236}">
+                <a16:creationId xmlns:a16="http://schemas.microsoft.com/office/drawing/2014/main" id="{A0647DC3-9A91-42F5-9ABC-7ECA3563D79B}"/>
               </a:ext>
             </a:extLst>
           </p:cNvPr>
@@ -4593,17 +4657,17 @@
       </p:sp>
       <p:pic>
         <p:nvPicPr>
-          <p:cNvPr id="36" name=""/>
+          <p:cNvPr id="37" name=""/>
           <p:cNvPicPr>
             <a:picLocks xmlns:a="http://schemas.openxmlformats.org/drawingml/2006/main" noChangeAspect="1"/>
           </p:cNvPicPr>
           <p:nvPr/>
         </p:nvPicPr>
         <p:blipFill>
-          <a:blip xmlns:r="http://schemas.openxmlformats.org/officeDocument/2006/relationships" xmlns:a="http://schemas.openxmlformats.org/drawingml/2006/main" r:embed="R786ef48cc76b48b5">
+          <a:blip xmlns:r="http://schemas.openxmlformats.org/officeDocument/2006/relationships" xmlns:a="http://schemas.openxmlformats.org/drawingml/2006/main" r:embed="Rfc1903c439de4166">
             <a:extLst>
               <a:ext uri="{96DAC541-7B7A-43D3-8B79-37D633B846F1}">
-                <asvg:svgBlip xmlns:asvg="http://schemas.microsoft.com/office/drawing/2016/SVG/main" r:embed="R346fe004477c45f1"/>
+                <asvg:svgBlip xmlns:asvg="http://schemas.microsoft.com/office/drawing/2016/SVG/main" r:embed="Rd8af8bbbc7ee4698"/>
               </a:ext>
             </a:extLst>
           </a:blip>
@@ -4621,10 +4685,10 @@
       </p:pic>
       <p:sp>
         <p:nvSpPr>
-          <p:cNvPr id="37" name="">
-            <a:extLst xmlns:a="http://schemas.openxmlformats.org/drawingml/2006/main">
-              <a:ext uri="{FF2B5EF4-FFF2-40B4-BE49-F238E27FC236}">
-                <a16:creationId xmlns:a16="http://schemas.microsoft.com/office/drawing/2014/main" id="{A65EE500-23DB-452A-9EA0-7301CF226E22}"/>
+          <p:cNvPr id="38" name="">
+            <a:extLst xmlns:a="http://schemas.openxmlformats.org/drawingml/2006/main">
+              <a:ext uri="{FF2B5EF4-FFF2-40B4-BE49-F238E27FC236}">
+                <a16:creationId xmlns:a16="http://schemas.microsoft.com/office/drawing/2014/main" id="{A9E81369-9982-4F37-A910-812B686F6157}"/>
               </a:ext>
             </a:extLst>
           </p:cNvPr>
@@ -4685,17 +4749,17 @@
       </p:sp>
       <p:pic>
         <p:nvPicPr>
-          <p:cNvPr id="38" name=""/>
+          <p:cNvPr id="39" name=""/>
           <p:cNvPicPr>
             <a:picLocks xmlns:a="http://schemas.openxmlformats.org/drawingml/2006/main" noChangeAspect="1"/>
           </p:cNvPicPr>
           <p:nvPr/>
         </p:nvPicPr>
         <p:blipFill>
-          <a:blip xmlns:r="http://schemas.openxmlformats.org/officeDocument/2006/relationships" xmlns:a="http://schemas.openxmlformats.org/drawingml/2006/main" r:embed="R23c63e475f9547e4">
+          <a:blip xmlns:r="http://schemas.openxmlformats.org/officeDocument/2006/relationships" xmlns:a="http://schemas.openxmlformats.org/drawingml/2006/main" r:embed="Rab10c02acb6b4226">
             <a:extLst>
               <a:ext uri="{96DAC541-7B7A-43D3-8B79-37D633B846F1}">
-                <asvg:svgBlip xmlns:asvg="http://schemas.microsoft.com/office/drawing/2016/SVG/main" r:embed="R27b9964bc99d4771"/>
+                <asvg:svgBlip xmlns:asvg="http://schemas.microsoft.com/office/drawing/2016/SVG/main" r:embed="R37d4c65b742c4701"/>
               </a:ext>
             </a:extLst>
           </a:blip>
@@ -4713,10 +4777,10 @@
       </p:pic>
       <p:sp>
         <p:nvSpPr>
-          <p:cNvPr id="39" name="">
-            <a:extLst xmlns:a="http://schemas.openxmlformats.org/drawingml/2006/main">
-              <a:ext uri="{FF2B5EF4-FFF2-40B4-BE49-F238E27FC236}">
-                <a16:creationId xmlns:a16="http://schemas.microsoft.com/office/drawing/2014/main" id="{255BC50A-4E3E-47B0-A60A-018B1101223F}"/>
+          <p:cNvPr id="40" name="">
+            <a:extLst xmlns:a="http://schemas.openxmlformats.org/drawingml/2006/main">
+              <a:ext uri="{FF2B5EF4-FFF2-40B4-BE49-F238E27FC236}">
+                <a16:creationId xmlns:a16="http://schemas.microsoft.com/office/drawing/2014/main" id="{08E9860B-DD76-4FC1-AA04-503CE4073FE8}"/>
               </a:ext>
             </a:extLst>
           </p:cNvPr>
@@ -4777,17 +4841,17 @@
       </p:sp>
       <p:pic>
         <p:nvPicPr>
-          <p:cNvPr id="40" name=""/>
+          <p:cNvPr id="41" name=""/>
           <p:cNvPicPr>
             <a:picLocks xmlns:a="http://schemas.openxmlformats.org/drawingml/2006/main" noChangeAspect="1"/>
           </p:cNvPicPr>
           <p:nvPr/>
         </p:nvPicPr>
         <p:blipFill>
-          <a:blip xmlns:r="http://schemas.openxmlformats.org/officeDocument/2006/relationships" xmlns:a="http://schemas.openxmlformats.org/drawingml/2006/main" r:embed="R0853c087293b452a">
+          <a:blip xmlns:r="http://schemas.openxmlformats.org/officeDocument/2006/relationships" xmlns:a="http://schemas.openxmlformats.org/drawingml/2006/main" r:embed="R6c27a112ec0740fa">
             <a:extLst>
               <a:ext uri="{96DAC541-7B7A-43D3-8B79-37D633B846F1}">
-                <asvg:svgBlip xmlns:asvg="http://schemas.microsoft.com/office/drawing/2016/SVG/main" r:embed="R06b10538fdeb4bd7"/>
+                <asvg:svgBlip xmlns:asvg="http://schemas.microsoft.com/office/drawing/2016/SVG/main" r:embed="Rd523787fc1f24fab"/>
               </a:ext>
             </a:extLst>
           </a:blip>
@@ -4805,10 +4869,10 @@
       </p:pic>
       <p:sp>
         <p:nvSpPr>
-          <p:cNvPr id="41" name="">
-            <a:extLst xmlns:a="http://schemas.openxmlformats.org/drawingml/2006/main">
-              <a:ext uri="{FF2B5EF4-FFF2-40B4-BE49-F238E27FC236}">
-                <a16:creationId xmlns:a16="http://schemas.microsoft.com/office/drawing/2014/main" id="{0C7E5361-E560-4A7D-BD22-F8D6014ECC09}"/>
+          <p:cNvPr id="42" name="">
+            <a:extLst xmlns:a="http://schemas.openxmlformats.org/drawingml/2006/main">
+              <a:ext uri="{FF2B5EF4-FFF2-40B4-BE49-F238E27FC236}">
+                <a16:creationId xmlns:a16="http://schemas.microsoft.com/office/drawing/2014/main" id="{D84FA8AF-D1F4-4693-8028-ADE383E1E6BB}"/>
               </a:ext>
             </a:extLst>
           </p:cNvPr>
@@ -4869,10 +4933,10 @@
       </p:sp>
       <p:sp>
         <p:nvSpPr>
-          <p:cNvPr id="42" name="">
-            <a:extLst xmlns:a="http://schemas.openxmlformats.org/drawingml/2006/main">
-              <a:ext uri="{FF2B5EF4-FFF2-40B4-BE49-F238E27FC236}">
-                <a16:creationId xmlns:a16="http://schemas.microsoft.com/office/drawing/2014/main" id="{EFAC5B36-1A73-47FB-99D3-4A18858BF6BA}"/>
+          <p:cNvPr id="43" name="">
+            <a:extLst xmlns:a="http://schemas.openxmlformats.org/drawingml/2006/main">
+              <a:ext uri="{FF2B5EF4-FFF2-40B4-BE49-F238E27FC236}">
+                <a16:creationId xmlns:a16="http://schemas.microsoft.com/office/drawing/2014/main" id="{67052B62-9503-40F9-9D93-B82E9AB78CC7}"/>
               </a:ext>
             </a:extLst>
           </p:cNvPr>
@@ -4904,10 +4968,10 @@
       </p:sp>
       <p:sp>
         <p:nvSpPr>
-          <p:cNvPr id="43" name="">
-            <a:extLst xmlns:a="http://schemas.openxmlformats.org/drawingml/2006/main">
-              <a:ext uri="{FF2B5EF4-FFF2-40B4-BE49-F238E27FC236}">
-                <a16:creationId xmlns:a16="http://schemas.microsoft.com/office/drawing/2014/main" id="{A3E44238-27EE-4E6D-81E6-63ED10105535}"/>
+          <p:cNvPr id="44" name="">
+            <a:extLst xmlns:a="http://schemas.openxmlformats.org/drawingml/2006/main">
+              <a:ext uri="{FF2B5EF4-FFF2-40B4-BE49-F238E27FC236}">
+                <a16:creationId xmlns:a16="http://schemas.microsoft.com/office/drawing/2014/main" id="{77ABEC41-6444-468D-9E35-877F34D36B42}"/>
               </a:ext>
             </a:extLst>
           </p:cNvPr>
@@ -4968,10 +5032,10 @@
       </p:sp>
       <p:sp>
         <p:nvSpPr>
-          <p:cNvPr id="44" name="">
-            <a:extLst xmlns:a="http://schemas.openxmlformats.org/drawingml/2006/main">
-              <a:ext uri="{FF2B5EF4-FFF2-40B4-BE49-F238E27FC236}">
-                <a16:creationId xmlns:a16="http://schemas.microsoft.com/office/drawing/2014/main" id="{6C4AA691-CA36-4191-9E02-653916768E1A}"/>
+          <p:cNvPr id="45" name="">
+            <a:extLst xmlns:a="http://schemas.openxmlformats.org/drawingml/2006/main">
+              <a:ext uri="{FF2B5EF4-FFF2-40B4-BE49-F238E27FC236}">
+                <a16:creationId xmlns:a16="http://schemas.microsoft.com/office/drawing/2014/main" id="{D159FA16-3986-4237-B9AB-1A78F138C000}"/>
               </a:ext>
             </a:extLst>
           </p:cNvPr>
@@ -5033,7 +5097,7 @@
     </p:spTree>
     <p:extLst>
       <p:ext uri="{BB962C8B-B14F-4D97-AF65-F5344CB8AC3E}">
-        <p14:creationId xmlns:p14="http://schemas.microsoft.com/office/powerpoint/2010/main" val="2028473536"/>
+        <p14:creationId xmlns:p14="http://schemas.microsoft.com/office/powerpoint/2010/main" val="1859229039"/>
       </p:ext>
     </p:extLst>
   </p:cSld>
@@ -5057,7 +5121,7 @@
           <p:cNvPr id="1" name="">
             <a:extLst xmlns:a="http://schemas.openxmlformats.org/drawingml/2006/main">
               <a:ext uri="{FF2B5EF4-FFF2-40B4-BE49-F238E27FC236}">
-                <a16:creationId xmlns:a16="http://schemas.microsoft.com/office/drawing/2014/main" id="{167B853B-B1F3-4B0F-B42C-352DF5EB7465}"/>
+                <a16:creationId xmlns:a16="http://schemas.microsoft.com/office/drawing/2014/main" id="{A7E4A10D-D865-4EBA-9868-2849B960C84A}"/>
               </a:ext>
             </a:extLst>
           </p:cNvPr>
@@ -5092,7 +5156,7 @@
           <p:cNvPr id="2" name="">
             <a:extLst xmlns:a="http://schemas.openxmlformats.org/drawingml/2006/main">
               <a:ext uri="{FF2B5EF4-FFF2-40B4-BE49-F238E27FC236}">
-                <a16:creationId xmlns:a16="http://schemas.microsoft.com/office/drawing/2014/main" id="{2242B8F2-93C0-4773-8C51-A0465839230F}"/>
+                <a16:creationId xmlns:a16="http://schemas.microsoft.com/office/drawing/2014/main" id="{72225BD4-869D-4CA2-B7D7-527BFBCCB168}"/>
               </a:ext>
             </a:extLst>
           </p:cNvPr>
@@ -5127,7 +5191,7 @@
           <p:cNvPr id="3" name="">
             <a:extLst xmlns:a="http://schemas.openxmlformats.org/drawingml/2006/main">
               <a:ext uri="{FF2B5EF4-FFF2-40B4-BE49-F238E27FC236}">
-                <a16:creationId xmlns:a16="http://schemas.microsoft.com/office/drawing/2014/main" id="{E33C59D1-15D2-4FEB-B603-580366252A08}"/>
+                <a16:creationId xmlns:a16="http://schemas.microsoft.com/office/drawing/2014/main" id="{7B0644F7-6A0B-4EAD-8816-49DE1DF64191}"/>
               </a:ext>
             </a:extLst>
           </p:cNvPr>
@@ -5191,7 +5255,7 @@
           <p:cNvPr id="4" name="">
             <a:extLst xmlns:a="http://schemas.openxmlformats.org/drawingml/2006/main">
               <a:ext uri="{FF2B5EF4-FFF2-40B4-BE49-F238E27FC236}">
-                <a16:creationId xmlns:a16="http://schemas.microsoft.com/office/drawing/2014/main" id="{4C8248FD-E2DB-4704-9504-8F49EA47C4FB}"/>
+                <a16:creationId xmlns:a16="http://schemas.microsoft.com/office/drawing/2014/main" id="{5B27BDAC-EC7D-47F4-BC48-E18B2B56FA05}"/>
               </a:ext>
             </a:extLst>
           </p:cNvPr>
@@ -5255,7 +5319,7 @@
           <p:cNvPr id="5" name="">
             <a:extLst xmlns:a="http://schemas.openxmlformats.org/drawingml/2006/main">
               <a:ext uri="{FF2B5EF4-FFF2-40B4-BE49-F238E27FC236}">
-                <a16:creationId xmlns:a16="http://schemas.microsoft.com/office/drawing/2014/main" id="{A4922AFA-5BAC-4E25-8785-254141DE72A8}"/>
+                <a16:creationId xmlns:a16="http://schemas.microsoft.com/office/drawing/2014/main" id="{222F0CD6-6F05-42B7-AB84-15A670E55594}"/>
               </a:ext>
             </a:extLst>
           </p:cNvPr>
@@ -5319,7 +5383,7 @@
           <p:cNvPr id="6" name="">
             <a:extLst xmlns:a="http://schemas.openxmlformats.org/drawingml/2006/main">
               <a:ext uri="{FF2B5EF4-FFF2-40B4-BE49-F238E27FC236}">
-                <a16:creationId xmlns:a16="http://schemas.microsoft.com/office/drawing/2014/main" id="{470FFB8C-68AF-4999-8B87-93D0AA030F1C}"/>
+                <a16:creationId xmlns:a16="http://schemas.microsoft.com/office/drawing/2014/main" id="{8C14BFA7-202F-4768-AA8A-174640624E14}"/>
               </a:ext>
             </a:extLst>
           </p:cNvPr>
@@ -5383,7 +5447,7 @@
           <p:cNvPr id="7" name="">
             <a:extLst xmlns:a="http://schemas.openxmlformats.org/drawingml/2006/main">
               <a:ext uri="{FF2B5EF4-FFF2-40B4-BE49-F238E27FC236}">
-                <a16:creationId xmlns:a16="http://schemas.microsoft.com/office/drawing/2014/main" id="{232E6309-649C-43E5-B531-3DDB8EA473B0}"/>
+                <a16:creationId xmlns:a16="http://schemas.microsoft.com/office/drawing/2014/main" id="{D6CDB51E-0AE8-4875-862C-C631CE1F99B6}"/>
               </a:ext>
             </a:extLst>
           </p:cNvPr>
@@ -5447,7 +5511,7 @@
           <p:cNvPr id="8" name="">
             <a:extLst xmlns:a="http://schemas.openxmlformats.org/drawingml/2006/main">
               <a:ext uri="{FF2B5EF4-FFF2-40B4-BE49-F238E27FC236}">
-                <a16:creationId xmlns:a16="http://schemas.microsoft.com/office/drawing/2014/main" id="{4A8DD9CD-E230-4539-8C3C-5FF544BCAA96}"/>
+                <a16:creationId xmlns:a16="http://schemas.microsoft.com/office/drawing/2014/main" id="{6406A3DD-25FB-451D-A0BC-D2EFE77765F1}"/>
               </a:ext>
             </a:extLst>
           </p:cNvPr>
@@ -5482,7 +5546,7 @@
           <p:cNvPr id="9" name="">
             <a:extLst xmlns:a="http://schemas.openxmlformats.org/drawingml/2006/main">
               <a:ext uri="{FF2B5EF4-FFF2-40B4-BE49-F238E27FC236}">
-                <a16:creationId xmlns:a16="http://schemas.microsoft.com/office/drawing/2014/main" id="{C223C835-B0A3-4EA2-AD09-143785EDB3E9}"/>
+                <a16:creationId xmlns:a16="http://schemas.microsoft.com/office/drawing/2014/main" id="{38E2EF14-C38F-4940-8856-F4D76495F722}"/>
               </a:ext>
             </a:extLst>
           </p:cNvPr>
@@ -5515,7 +5579,7 @@
           <p:cNvPr id="10" name="">
             <a:extLst xmlns:a="http://schemas.openxmlformats.org/drawingml/2006/main">
               <a:ext uri="{FF2B5EF4-FFF2-40B4-BE49-F238E27FC236}">
-                <a16:creationId xmlns:a16="http://schemas.microsoft.com/office/drawing/2014/main" id="{F6ABF422-E44C-4BF3-9BCA-2631678A7365}"/>
+                <a16:creationId xmlns:a16="http://schemas.microsoft.com/office/drawing/2014/main" id="{74F06C45-F4D0-47D4-9930-DD80CCE6D0B6}"/>
               </a:ext>
             </a:extLst>
           </p:cNvPr>
@@ -5579,7 +5643,7 @@
           <p:cNvPr id="11" name="">
             <a:extLst xmlns:a="http://schemas.openxmlformats.org/drawingml/2006/main">
               <a:ext uri="{FF2B5EF4-FFF2-40B4-BE49-F238E27FC236}">
-                <a16:creationId xmlns:a16="http://schemas.microsoft.com/office/drawing/2014/main" id="{791BE58E-1204-4BFD-8BD4-21AD4E3AFC71}"/>
+                <a16:creationId xmlns:a16="http://schemas.microsoft.com/office/drawing/2014/main" id="{9A0478B9-2AB8-4992-A568-1925CFDE6E01}"/>
               </a:ext>
             </a:extLst>
           </p:cNvPr>
@@ -5643,7 +5707,7 @@
           <p:cNvPr id="12" name="">
             <a:extLst xmlns:a="http://schemas.openxmlformats.org/drawingml/2006/main">
               <a:ext uri="{FF2B5EF4-FFF2-40B4-BE49-F238E27FC236}">
-                <a16:creationId xmlns:a16="http://schemas.microsoft.com/office/drawing/2014/main" id="{F839506E-31A0-40E7-A5E8-6F091324294A}"/>
+                <a16:creationId xmlns:a16="http://schemas.microsoft.com/office/drawing/2014/main" id="{5112B3EF-F7CC-4219-B8B1-3E38C942D8C5}"/>
               </a:ext>
             </a:extLst>
           </p:cNvPr>
@@ -5676,7 +5740,7 @@
           <p:cNvPr id="13" name="">
             <a:extLst xmlns:a="http://schemas.openxmlformats.org/drawingml/2006/main">
               <a:ext uri="{FF2B5EF4-FFF2-40B4-BE49-F238E27FC236}">
-                <a16:creationId xmlns:a16="http://schemas.microsoft.com/office/drawing/2014/main" id="{8619A7A3-B554-4F88-BBE1-75A2D72CEC6C}"/>
+                <a16:creationId xmlns:a16="http://schemas.microsoft.com/office/drawing/2014/main" id="{DC02E415-3570-42AC-AD08-18D1BDEBB6DF}"/>
               </a:ext>
             </a:extLst>
           </p:cNvPr>
@@ -5740,7 +5804,7 @@
           <p:cNvPr id="14" name="">
             <a:extLst xmlns:a="http://schemas.openxmlformats.org/drawingml/2006/main">
               <a:ext uri="{FF2B5EF4-FFF2-40B4-BE49-F238E27FC236}">
-                <a16:creationId xmlns:a16="http://schemas.microsoft.com/office/drawing/2014/main" id="{64463E23-421A-40AB-A972-C97426BEFCF2}"/>
+                <a16:creationId xmlns:a16="http://schemas.microsoft.com/office/drawing/2014/main" id="{0830E772-DC15-4E25-885F-DDD35C7C601E}"/>
               </a:ext>
             </a:extLst>
           </p:cNvPr>
@@ -5804,7 +5868,7 @@
           <p:cNvPr id="15" name="">
             <a:extLst xmlns:a="http://schemas.openxmlformats.org/drawingml/2006/main">
               <a:ext uri="{FF2B5EF4-FFF2-40B4-BE49-F238E27FC236}">
-                <a16:creationId xmlns:a16="http://schemas.microsoft.com/office/drawing/2014/main" id="{A511020F-4B64-4B11-B526-32138061AC00}"/>
+                <a16:creationId xmlns:a16="http://schemas.microsoft.com/office/drawing/2014/main" id="{CA28B36D-697E-4261-9378-75C8AD697950}"/>
               </a:ext>
             </a:extLst>
           </p:cNvPr>
@@ -5837,7 +5901,7 @@
           <p:cNvPr id="16" name="">
             <a:extLst xmlns:a="http://schemas.openxmlformats.org/drawingml/2006/main">
               <a:ext uri="{FF2B5EF4-FFF2-40B4-BE49-F238E27FC236}">
-                <a16:creationId xmlns:a16="http://schemas.microsoft.com/office/drawing/2014/main" id="{3E18C1A5-44F2-41CF-AF96-E19B5A57F424}"/>
+                <a16:creationId xmlns:a16="http://schemas.microsoft.com/office/drawing/2014/main" id="{5629D902-D36D-4E95-9213-E76A00A56A4D}"/>
               </a:ext>
             </a:extLst>
           </p:cNvPr>
@@ -5901,7 +5965,7 @@
           <p:cNvPr id="17" name="">
             <a:extLst xmlns:a="http://schemas.openxmlformats.org/drawingml/2006/main">
               <a:ext uri="{FF2B5EF4-FFF2-40B4-BE49-F238E27FC236}">
-                <a16:creationId xmlns:a16="http://schemas.microsoft.com/office/drawing/2014/main" id="{08CE7C26-3B21-4D9E-85BA-983D7C135141}"/>
+                <a16:creationId xmlns:a16="http://schemas.microsoft.com/office/drawing/2014/main" id="{1E9A8402-A3EF-4225-9817-8DA0155131EE}"/>
               </a:ext>
             </a:extLst>
           </p:cNvPr>
@@ -5965,7 +6029,7 @@
           <p:cNvPr id="18" name="">
             <a:extLst xmlns:a="http://schemas.openxmlformats.org/drawingml/2006/main">
               <a:ext uri="{FF2B5EF4-FFF2-40B4-BE49-F238E27FC236}">
-                <a16:creationId xmlns:a16="http://schemas.microsoft.com/office/drawing/2014/main" id="{E5D4F810-D3B8-47AF-9E2A-F984470A54EB}"/>
+                <a16:creationId xmlns:a16="http://schemas.microsoft.com/office/drawing/2014/main" id="{1A0C16A6-97A1-4B16-80D4-CDBFC0536FC8}"/>
               </a:ext>
             </a:extLst>
           </p:cNvPr>
@@ -5998,7 +6062,7 @@
           <p:cNvPr id="19" name="">
             <a:extLst xmlns:a="http://schemas.openxmlformats.org/drawingml/2006/main">
               <a:ext uri="{FF2B5EF4-FFF2-40B4-BE49-F238E27FC236}">
-                <a16:creationId xmlns:a16="http://schemas.microsoft.com/office/drawing/2014/main" id="{BED4B441-D097-4DD2-B46C-9C03C952C1E7}"/>
+                <a16:creationId xmlns:a16="http://schemas.microsoft.com/office/drawing/2014/main" id="{A12E0538-D731-477E-BD91-A66F7049E1EE}"/>
               </a:ext>
             </a:extLst>
           </p:cNvPr>
@@ -6062,7 +6126,7 @@
           <p:cNvPr id="20" name="">
             <a:extLst xmlns:a="http://schemas.openxmlformats.org/drawingml/2006/main">
               <a:ext uri="{FF2B5EF4-FFF2-40B4-BE49-F238E27FC236}">
-                <a16:creationId xmlns:a16="http://schemas.microsoft.com/office/drawing/2014/main" id="{B438A8FD-2550-44B6-A76B-ABF07E2F9CD5}"/>
+                <a16:creationId xmlns:a16="http://schemas.microsoft.com/office/drawing/2014/main" id="{7D3400D6-BB63-47EA-8CF7-DBAAD7FFE311}"/>
               </a:ext>
             </a:extLst>
           </p:cNvPr>
@@ -6126,7 +6190,7 @@
           <p:cNvPr id="21" name="">
             <a:extLst xmlns:a="http://schemas.openxmlformats.org/drawingml/2006/main">
               <a:ext uri="{FF2B5EF4-FFF2-40B4-BE49-F238E27FC236}">
-                <a16:creationId xmlns:a16="http://schemas.microsoft.com/office/drawing/2014/main" id="{058C0F16-A59B-4D2B-8C1C-6631EBC2530A}"/>
+                <a16:creationId xmlns:a16="http://schemas.microsoft.com/office/drawing/2014/main" id="{3B11A88E-66CA-4B03-8A22-0E3EF4B9B21D}"/>
               </a:ext>
             </a:extLst>
           </p:cNvPr>
@@ -6159,7 +6223,7 @@
           <p:cNvPr id="22" name="">
             <a:extLst xmlns:a="http://schemas.openxmlformats.org/drawingml/2006/main">
               <a:ext uri="{FF2B5EF4-FFF2-40B4-BE49-F238E27FC236}">
-                <a16:creationId xmlns:a16="http://schemas.microsoft.com/office/drawing/2014/main" id="{6C41F524-B11B-4326-9964-B1740E86E716}"/>
+                <a16:creationId xmlns:a16="http://schemas.microsoft.com/office/drawing/2014/main" id="{DB0C9BFE-2A19-47A5-9DE8-AB8DE074FE67}"/>
               </a:ext>
             </a:extLst>
           </p:cNvPr>
@@ -6223,7 +6287,7 @@
           <p:cNvPr id="23" name="">
             <a:extLst xmlns:a="http://schemas.openxmlformats.org/drawingml/2006/main">
               <a:ext uri="{FF2B5EF4-FFF2-40B4-BE49-F238E27FC236}">
-                <a16:creationId xmlns:a16="http://schemas.microsoft.com/office/drawing/2014/main" id="{DB5E8FD6-392F-4AF4-8033-D5371A6757D7}"/>
+                <a16:creationId xmlns:a16="http://schemas.microsoft.com/office/drawing/2014/main" id="{E8950035-322C-40F8-B858-5FE7C96FBD1B}"/>
               </a:ext>
             </a:extLst>
           </p:cNvPr>
@@ -6287,7 +6351,7 @@
           <p:cNvPr id="24" name="">
             <a:extLst xmlns:a="http://schemas.openxmlformats.org/drawingml/2006/main">
               <a:ext uri="{FF2B5EF4-FFF2-40B4-BE49-F238E27FC236}">
-                <a16:creationId xmlns:a16="http://schemas.microsoft.com/office/drawing/2014/main" id="{C02CE087-AF66-4FAD-A46E-555E7BECC724}"/>
+                <a16:creationId xmlns:a16="http://schemas.microsoft.com/office/drawing/2014/main" id="{234EC76B-904A-466F-B416-8307F26A2075}"/>
               </a:ext>
             </a:extLst>
           </p:cNvPr>
@@ -6320,7 +6384,7 @@
           <p:cNvPr id="25" name="">
             <a:extLst xmlns:a="http://schemas.openxmlformats.org/drawingml/2006/main">
               <a:ext uri="{FF2B5EF4-FFF2-40B4-BE49-F238E27FC236}">
-                <a16:creationId xmlns:a16="http://schemas.microsoft.com/office/drawing/2014/main" id="{E8293116-7D3E-4D5A-97B9-C70331D902E0}"/>
+                <a16:creationId xmlns:a16="http://schemas.microsoft.com/office/drawing/2014/main" id="{7746EAD5-0310-4C7F-BE3F-02B76930E0C9}"/>
               </a:ext>
             </a:extLst>
           </p:cNvPr>
@@ -6384,7 +6448,7 @@
           <p:cNvPr id="26" name="">
             <a:extLst xmlns:a="http://schemas.openxmlformats.org/drawingml/2006/main">
               <a:ext uri="{FF2B5EF4-FFF2-40B4-BE49-F238E27FC236}">
-                <a16:creationId xmlns:a16="http://schemas.microsoft.com/office/drawing/2014/main" id="{6619E178-3D47-4AB4-9E82-34408A2159C0}"/>
+                <a16:creationId xmlns:a16="http://schemas.microsoft.com/office/drawing/2014/main" id="{5E19E800-D2F1-4AFC-8C0E-A96091213D8C}"/>
               </a:ext>
             </a:extLst>
           </p:cNvPr>
@@ -6448,7 +6512,7 @@
           <p:cNvPr id="27" name="">
             <a:extLst xmlns:a="http://schemas.openxmlformats.org/drawingml/2006/main">
               <a:ext uri="{FF2B5EF4-FFF2-40B4-BE49-F238E27FC236}">
-                <a16:creationId xmlns:a16="http://schemas.microsoft.com/office/drawing/2014/main" id="{A019989F-7C14-4042-AE4B-425D11338936}"/>
+                <a16:creationId xmlns:a16="http://schemas.microsoft.com/office/drawing/2014/main" id="{9F8CF351-E58A-4AF7-8378-BAB8A672372C}"/>
               </a:ext>
             </a:extLst>
           </p:cNvPr>
@@ -6481,7 +6545,7 @@
           <p:cNvPr id="28" name="">
             <a:extLst xmlns:a="http://schemas.openxmlformats.org/drawingml/2006/main">
               <a:ext uri="{FF2B5EF4-FFF2-40B4-BE49-F238E27FC236}">
-                <a16:creationId xmlns:a16="http://schemas.microsoft.com/office/drawing/2014/main" id="{93DA48D5-CFB0-478B-BDF0-4CDF88FD5400}"/>
+                <a16:creationId xmlns:a16="http://schemas.microsoft.com/office/drawing/2014/main" id="{889D0020-8842-4FF2-A468-607924930F5D}"/>
               </a:ext>
             </a:extLst>
           </p:cNvPr>
@@ -6545,7 +6609,7 @@
           <p:cNvPr id="29" name="">
             <a:extLst xmlns:a="http://schemas.openxmlformats.org/drawingml/2006/main">
               <a:ext uri="{FF2B5EF4-FFF2-40B4-BE49-F238E27FC236}">
-                <a16:creationId xmlns:a16="http://schemas.microsoft.com/office/drawing/2014/main" id="{4F696AA1-FFE1-438F-A9D7-6225F6DCDD87}"/>
+                <a16:creationId xmlns:a16="http://schemas.microsoft.com/office/drawing/2014/main" id="{0979ACD4-4F48-490B-9F6E-ED76C8ADE0A2}"/>
               </a:ext>
             </a:extLst>
           </p:cNvPr>
@@ -6609,7 +6673,7 @@
           <p:cNvPr id="30" name="">
             <a:extLst xmlns:a="http://schemas.openxmlformats.org/drawingml/2006/main">
               <a:ext uri="{FF2B5EF4-FFF2-40B4-BE49-F238E27FC236}">
-                <a16:creationId xmlns:a16="http://schemas.microsoft.com/office/drawing/2014/main" id="{DE1EA4C9-0939-46A4-A69B-AD16B097C594}"/>
+                <a16:creationId xmlns:a16="http://schemas.microsoft.com/office/drawing/2014/main" id="{B1F290D4-D68D-4D60-B071-8DA69E25728C}"/>
               </a:ext>
             </a:extLst>
           </p:cNvPr>
@@ -6642,7 +6706,7 @@
           <p:cNvPr id="31" name="">
             <a:extLst xmlns:a="http://schemas.openxmlformats.org/drawingml/2006/main">
               <a:ext uri="{FF2B5EF4-FFF2-40B4-BE49-F238E27FC236}">
-                <a16:creationId xmlns:a16="http://schemas.microsoft.com/office/drawing/2014/main" id="{7CFF7EB9-71C7-4DA5-B089-29182E870AAA}"/>
+                <a16:creationId xmlns:a16="http://schemas.microsoft.com/office/drawing/2014/main" id="{B4594930-BFF9-4408-A386-1D2DD259F573}"/>
               </a:ext>
             </a:extLst>
           </p:cNvPr>
@@ -6706,7 +6770,7 @@
           <p:cNvPr id="32" name="">
             <a:extLst xmlns:a="http://schemas.openxmlformats.org/drawingml/2006/main">
               <a:ext uri="{FF2B5EF4-FFF2-40B4-BE49-F238E27FC236}">
-                <a16:creationId xmlns:a16="http://schemas.microsoft.com/office/drawing/2014/main" id="{39A43E06-C9A9-4C79-9D22-8085EC62788E}"/>
+                <a16:creationId xmlns:a16="http://schemas.microsoft.com/office/drawing/2014/main" id="{2104A02B-1BA3-4A94-8A58-099CC6F30552}"/>
               </a:ext>
             </a:extLst>
           </p:cNvPr>
@@ -6770,7 +6834,7 @@
           <p:cNvPr id="33" name="">
             <a:extLst xmlns:a="http://schemas.openxmlformats.org/drawingml/2006/main">
               <a:ext uri="{FF2B5EF4-FFF2-40B4-BE49-F238E27FC236}">
-                <a16:creationId xmlns:a16="http://schemas.microsoft.com/office/drawing/2014/main" id="{E560D21B-A828-48CB-9AA8-4ECBAE1DDFA6}"/>
+                <a16:creationId xmlns:a16="http://schemas.microsoft.com/office/drawing/2014/main" id="{7D14A39E-DFB4-4B32-B2B8-582348ECD535}"/>
               </a:ext>
             </a:extLst>
           </p:cNvPr>
@@ -6834,7 +6898,7 @@
           <p:cNvPr id="34" name="">
             <a:extLst xmlns:a="http://schemas.openxmlformats.org/drawingml/2006/main">
               <a:ext uri="{FF2B5EF4-FFF2-40B4-BE49-F238E27FC236}">
-                <a16:creationId xmlns:a16="http://schemas.microsoft.com/office/drawing/2014/main" id="{D68D5B72-C634-47FE-80EA-8E529241C5AA}"/>
+                <a16:creationId xmlns:a16="http://schemas.microsoft.com/office/drawing/2014/main" id="{09C66708-1C7D-4890-8925-09F047C28218}"/>
               </a:ext>
             </a:extLst>
           </p:cNvPr>
@@ -6898,7 +6962,7 @@
           <p:cNvPr id="35" name="">
             <a:extLst xmlns:a="http://schemas.openxmlformats.org/drawingml/2006/main">
               <a:ext uri="{FF2B5EF4-FFF2-40B4-BE49-F238E27FC236}">
-                <a16:creationId xmlns:a16="http://schemas.microsoft.com/office/drawing/2014/main" id="{E36A07ED-E1E0-4BDC-AD54-3A85DD15B288}"/>
+                <a16:creationId xmlns:a16="http://schemas.microsoft.com/office/drawing/2014/main" id="{69AEC58D-1EBF-4499-A670-FBF0D271AFD7}"/>
               </a:ext>
             </a:extLst>
           </p:cNvPr>
@@ -6933,7 +6997,7 @@
           <p:cNvPr id="36" name="">
             <a:extLst xmlns:a="http://schemas.openxmlformats.org/drawingml/2006/main">
               <a:ext uri="{FF2B5EF4-FFF2-40B4-BE49-F238E27FC236}">
-                <a16:creationId xmlns:a16="http://schemas.microsoft.com/office/drawing/2014/main" id="{11AF9751-0FE0-4935-8467-C1F9088F6FEA}"/>
+                <a16:creationId xmlns:a16="http://schemas.microsoft.com/office/drawing/2014/main" id="{6DEAF225-9ABA-4F56-8855-0165BF689BA4}"/>
               </a:ext>
             </a:extLst>
           </p:cNvPr>
@@ -6997,7 +7061,7 @@
           <p:cNvPr id="37" name="">
             <a:extLst xmlns:a="http://schemas.openxmlformats.org/drawingml/2006/main">
               <a:ext uri="{FF2B5EF4-FFF2-40B4-BE49-F238E27FC236}">
-                <a16:creationId xmlns:a16="http://schemas.microsoft.com/office/drawing/2014/main" id="{6AE2CC5D-EBF3-4816-8A1F-A476C547A51C}"/>
+                <a16:creationId xmlns:a16="http://schemas.microsoft.com/office/drawing/2014/main" id="{9E7135B9-BECB-4770-B57C-00B7B278D008}"/>
               </a:ext>
             </a:extLst>
           </p:cNvPr>
@@ -7059,7 +7123,7 @@
     </p:spTree>
     <p:extLst>
       <p:ext uri="{BB962C8B-B14F-4D97-AF65-F5344CB8AC3E}">
-        <p14:creationId xmlns:p14="http://schemas.microsoft.com/office/powerpoint/2010/main" val="805273781"/>
+        <p14:creationId xmlns:p14="http://schemas.microsoft.com/office/powerpoint/2010/main" val="1638950029"/>
       </p:ext>
     </p:extLst>
   </p:cSld>
@@ -7083,7 +7147,7 @@
           <p:cNvPr id="1" name="">
             <a:extLst xmlns:a="http://schemas.openxmlformats.org/drawingml/2006/main">
               <a:ext uri="{FF2B5EF4-FFF2-40B4-BE49-F238E27FC236}">
-                <a16:creationId xmlns:a16="http://schemas.microsoft.com/office/drawing/2014/main" id="{364D2F35-6F4B-43EE-AE81-2EB2FCCD6617}"/>
+                <a16:creationId xmlns:a16="http://schemas.microsoft.com/office/drawing/2014/main" id="{1CF12F38-D141-41CF-897C-34233F5BDF1B}"/>
               </a:ext>
             </a:extLst>
           </p:cNvPr>
@@ -7118,7 +7182,7 @@
           <p:cNvPr id="2" name="">
             <a:extLst xmlns:a="http://schemas.openxmlformats.org/drawingml/2006/main">
               <a:ext uri="{FF2B5EF4-FFF2-40B4-BE49-F238E27FC236}">
-                <a16:creationId xmlns:a16="http://schemas.microsoft.com/office/drawing/2014/main" id="{28BC9919-2384-4F4B-B3D2-5CDE4DD978A7}"/>
+                <a16:creationId xmlns:a16="http://schemas.microsoft.com/office/drawing/2014/main" id="{D7F51ED1-BCE3-48F0-8CB7-B1E3486CE229}"/>
               </a:ext>
             </a:extLst>
           </p:cNvPr>
@@ -7153,7 +7217,7 @@
           <p:cNvPr id="3" name="">
             <a:extLst xmlns:a="http://schemas.openxmlformats.org/drawingml/2006/main">
               <a:ext uri="{FF2B5EF4-FFF2-40B4-BE49-F238E27FC236}">
-                <a16:creationId xmlns:a16="http://schemas.microsoft.com/office/drawing/2014/main" id="{85A74CC4-63B3-4FD7-B06B-D15234843670}"/>
+                <a16:creationId xmlns:a16="http://schemas.microsoft.com/office/drawing/2014/main" id="{7AF9585B-93F7-4565-9084-24C14BA3C8B8}"/>
               </a:ext>
             </a:extLst>
           </p:cNvPr>
@@ -7217,7 +7281,7 @@
           <p:cNvPr id="4" name="">
             <a:extLst xmlns:a="http://schemas.openxmlformats.org/drawingml/2006/main">
               <a:ext uri="{FF2B5EF4-FFF2-40B4-BE49-F238E27FC236}">
-                <a16:creationId xmlns:a16="http://schemas.microsoft.com/office/drawing/2014/main" id="{3F334630-DCE2-483B-9494-2EF078113002}"/>
+                <a16:creationId xmlns:a16="http://schemas.microsoft.com/office/drawing/2014/main" id="{D2CC7EFB-FEC8-4B13-AA82-0290C6B7D529}"/>
               </a:ext>
             </a:extLst>
           </p:cNvPr>
@@ -7281,7 +7345,7 @@
           <p:cNvPr id="5" name="">
             <a:extLst xmlns:a="http://schemas.openxmlformats.org/drawingml/2006/main">
               <a:ext uri="{FF2B5EF4-FFF2-40B4-BE49-F238E27FC236}">
-                <a16:creationId xmlns:a16="http://schemas.microsoft.com/office/drawing/2014/main" id="{7E602DE0-1367-4D70-8A2D-D0E18DC1A8BF}"/>
+                <a16:creationId xmlns:a16="http://schemas.microsoft.com/office/drawing/2014/main" id="{E71386F5-E74E-4772-B7C9-4DF233B62956}"/>
               </a:ext>
             </a:extLst>
           </p:cNvPr>
@@ -7345,7 +7409,7 @@
           <p:cNvPr id="6" name="">
             <a:extLst xmlns:a="http://schemas.openxmlformats.org/drawingml/2006/main">
               <a:ext uri="{FF2B5EF4-FFF2-40B4-BE49-F238E27FC236}">
-                <a16:creationId xmlns:a16="http://schemas.microsoft.com/office/drawing/2014/main" id="{B229BFFC-1142-4BF2-AD6E-4B7C09B8CAC8}"/>
+                <a16:creationId xmlns:a16="http://schemas.microsoft.com/office/drawing/2014/main" id="{F2A9B166-1C28-48E2-ADD9-BC1F28E2A2D3}"/>
               </a:ext>
             </a:extLst>
           </p:cNvPr>
@@ -7378,7 +7442,7 @@
           <p:cNvPr id="7" name="">
             <a:extLst xmlns:a="http://schemas.openxmlformats.org/drawingml/2006/main">
               <a:ext uri="{FF2B5EF4-FFF2-40B4-BE49-F238E27FC236}">
-                <a16:creationId xmlns:a16="http://schemas.microsoft.com/office/drawing/2014/main" id="{61375084-4B33-4FAD-B910-E6E7093FF6A1}"/>
+                <a16:creationId xmlns:a16="http://schemas.microsoft.com/office/drawing/2014/main" id="{4896990B-0FFE-42F7-8442-3C194FCF62F8}"/>
               </a:ext>
             </a:extLst>
           </p:cNvPr>
@@ -7413,7 +7477,7 @@
           <p:cNvPr id="8" name="">
             <a:extLst xmlns:a="http://schemas.openxmlformats.org/drawingml/2006/main">
               <a:ext uri="{FF2B5EF4-FFF2-40B4-BE49-F238E27FC236}">
-                <a16:creationId xmlns:a16="http://schemas.microsoft.com/office/drawing/2014/main" id="{8F2535AA-BA45-4AB2-B66D-A91A7FEEDBAB}"/>
+                <a16:creationId xmlns:a16="http://schemas.microsoft.com/office/drawing/2014/main" id="{777F4762-342C-4EBE-B0D0-DDED7A191381}"/>
               </a:ext>
             </a:extLst>
           </p:cNvPr>
@@ -7477,7 +7541,7 @@
           <p:cNvPr id="9" name="">
             <a:extLst xmlns:a="http://schemas.openxmlformats.org/drawingml/2006/main">
               <a:ext uri="{FF2B5EF4-FFF2-40B4-BE49-F238E27FC236}">
-                <a16:creationId xmlns:a16="http://schemas.microsoft.com/office/drawing/2014/main" id="{E2C0E1CC-C4B1-4429-BFC4-29C606CC3BD1}"/>
+                <a16:creationId xmlns:a16="http://schemas.microsoft.com/office/drawing/2014/main" id="{375542B3-9325-4677-A69B-4C3C5794E16B}"/>
               </a:ext>
             </a:extLst>
           </p:cNvPr>
@@ -7541,7 +7605,7 @@
           <p:cNvPr id="10" name="">
             <a:extLst xmlns:a="http://schemas.openxmlformats.org/drawingml/2006/main">
               <a:ext uri="{FF2B5EF4-FFF2-40B4-BE49-F238E27FC236}">
-                <a16:creationId xmlns:a16="http://schemas.microsoft.com/office/drawing/2014/main" id="{BC76B320-0F75-48BD-9F8F-89A354402033}"/>
+                <a16:creationId xmlns:a16="http://schemas.microsoft.com/office/drawing/2014/main" id="{9B14F1E2-B183-4EB4-BAEB-916184DA88BE}"/>
               </a:ext>
             </a:extLst>
           </p:cNvPr>
@@ -7605,7 +7669,7 @@
           <p:cNvPr id="11" name="">
             <a:extLst xmlns:a="http://schemas.openxmlformats.org/drawingml/2006/main">
               <a:ext uri="{FF2B5EF4-FFF2-40B4-BE49-F238E27FC236}">
-                <a16:creationId xmlns:a16="http://schemas.microsoft.com/office/drawing/2014/main" id="{A2979AB1-1300-4DED-AD1B-50FC2DE6E2BE}"/>
+                <a16:creationId xmlns:a16="http://schemas.microsoft.com/office/drawing/2014/main" id="{279862AC-D83D-47CD-AC15-7AB365322F2F}"/>
               </a:ext>
             </a:extLst>
           </p:cNvPr>
@@ -7640,7 +7704,7 @@
           <p:cNvPr id="12" name="">
             <a:extLst xmlns:a="http://schemas.openxmlformats.org/drawingml/2006/main">
               <a:ext uri="{FF2B5EF4-FFF2-40B4-BE49-F238E27FC236}">
-                <a16:creationId xmlns:a16="http://schemas.microsoft.com/office/drawing/2014/main" id="{60614732-6181-4B01-A405-97E1E099360E}"/>
+                <a16:creationId xmlns:a16="http://schemas.microsoft.com/office/drawing/2014/main" id="{7E847215-1B2D-42D8-BCB4-6D7E8FB8A83E}"/>
               </a:ext>
             </a:extLst>
           </p:cNvPr>
@@ -7704,7 +7768,7 @@
           <p:cNvPr id="13" name="">
             <a:extLst xmlns:a="http://schemas.openxmlformats.org/drawingml/2006/main">
               <a:ext uri="{FF2B5EF4-FFF2-40B4-BE49-F238E27FC236}">
-                <a16:creationId xmlns:a16="http://schemas.microsoft.com/office/drawing/2014/main" id="{3F70C706-7B26-482E-82FE-9F69B198163A}"/>
+                <a16:creationId xmlns:a16="http://schemas.microsoft.com/office/drawing/2014/main" id="{A338C83E-829D-499C-9A2E-A70DFC762FF9}"/>
               </a:ext>
             </a:extLst>
           </p:cNvPr>
@@ -7737,7 +7801,7 @@
           <p:cNvPr id="14" name="">
             <a:extLst xmlns:a="http://schemas.openxmlformats.org/drawingml/2006/main">
               <a:ext uri="{FF2B5EF4-FFF2-40B4-BE49-F238E27FC236}">
-                <a16:creationId xmlns:a16="http://schemas.microsoft.com/office/drawing/2014/main" id="{A24343E9-68CE-48A3-AFAD-C260BB7E8319}"/>
+                <a16:creationId xmlns:a16="http://schemas.microsoft.com/office/drawing/2014/main" id="{65B622B0-FA8C-4BCC-8BF9-E96C5A2E8E51}"/>
               </a:ext>
             </a:extLst>
           </p:cNvPr>
@@ -7772,7 +7836,7 @@
           <p:cNvPr id="15" name="">
             <a:extLst xmlns:a="http://schemas.openxmlformats.org/drawingml/2006/main">
               <a:ext uri="{FF2B5EF4-FFF2-40B4-BE49-F238E27FC236}">
-                <a16:creationId xmlns:a16="http://schemas.microsoft.com/office/drawing/2014/main" id="{6D02DD11-8DCF-499C-87A2-7EE7767BE525}"/>
+                <a16:creationId xmlns:a16="http://schemas.microsoft.com/office/drawing/2014/main" id="{F0EECD2F-5DBD-4828-8127-5DE0B08E70E4}"/>
               </a:ext>
             </a:extLst>
           </p:cNvPr>
@@ -7836,7 +7900,7 @@
           <p:cNvPr id="16" name="">
             <a:extLst xmlns:a="http://schemas.openxmlformats.org/drawingml/2006/main">
               <a:ext uri="{FF2B5EF4-FFF2-40B4-BE49-F238E27FC236}">
-                <a16:creationId xmlns:a16="http://schemas.microsoft.com/office/drawing/2014/main" id="{F3840DEB-5BD7-4FA8-843A-C077EBB9B6AB}"/>
+                <a16:creationId xmlns:a16="http://schemas.microsoft.com/office/drawing/2014/main" id="{49D21A84-0A1C-43B8-BA33-0A246E81DE57}"/>
               </a:ext>
             </a:extLst>
           </p:cNvPr>
@@ -7900,7 +7964,7 @@
           <p:cNvPr id="17" name="">
             <a:extLst xmlns:a="http://schemas.openxmlformats.org/drawingml/2006/main">
               <a:ext uri="{FF2B5EF4-FFF2-40B4-BE49-F238E27FC236}">
-                <a16:creationId xmlns:a16="http://schemas.microsoft.com/office/drawing/2014/main" id="{A4A33DD4-BC55-4F62-9B33-375485C20B19}"/>
+                <a16:creationId xmlns:a16="http://schemas.microsoft.com/office/drawing/2014/main" id="{D52CB564-54EE-4BAE-8224-78A53A35CA0A}"/>
               </a:ext>
             </a:extLst>
           </p:cNvPr>
@@ -7964,7 +8028,7 @@
           <p:cNvPr id="18" name="">
             <a:extLst xmlns:a="http://schemas.openxmlformats.org/drawingml/2006/main">
               <a:ext uri="{FF2B5EF4-FFF2-40B4-BE49-F238E27FC236}">
-                <a16:creationId xmlns:a16="http://schemas.microsoft.com/office/drawing/2014/main" id="{6746BBFE-495F-4757-8A8D-9822D7381C51}"/>
+                <a16:creationId xmlns:a16="http://schemas.microsoft.com/office/drawing/2014/main" id="{1FA3D88A-6FB0-4A57-ACC8-E69E4B40F723}"/>
               </a:ext>
             </a:extLst>
           </p:cNvPr>
@@ -7999,7 +8063,7 @@
           <p:cNvPr id="19" name="">
             <a:extLst xmlns:a="http://schemas.openxmlformats.org/drawingml/2006/main">
               <a:ext uri="{FF2B5EF4-FFF2-40B4-BE49-F238E27FC236}">
-                <a16:creationId xmlns:a16="http://schemas.microsoft.com/office/drawing/2014/main" id="{FFC53FB5-9188-4150-A6DB-2BAFCA3280AC}"/>
+                <a16:creationId xmlns:a16="http://schemas.microsoft.com/office/drawing/2014/main" id="{52C4E89D-311C-499C-B70D-615BDC6A7CBA}"/>
               </a:ext>
             </a:extLst>
           </p:cNvPr>
@@ -8063,7 +8127,7 @@
           <p:cNvPr id="20" name="">
             <a:extLst xmlns:a="http://schemas.openxmlformats.org/drawingml/2006/main">
               <a:ext uri="{FF2B5EF4-FFF2-40B4-BE49-F238E27FC236}">
-                <a16:creationId xmlns:a16="http://schemas.microsoft.com/office/drawing/2014/main" id="{B4564997-BCDE-4930-A659-D8274A2FBC5D}"/>
+                <a16:creationId xmlns:a16="http://schemas.microsoft.com/office/drawing/2014/main" id="{7DA974C0-7FC1-4669-B2AC-31B8ECCDF664}"/>
               </a:ext>
             </a:extLst>
           </p:cNvPr>
@@ -8096,7 +8160,7 @@
           <p:cNvPr id="21" name="">
             <a:extLst xmlns:a="http://schemas.openxmlformats.org/drawingml/2006/main">
               <a:ext uri="{FF2B5EF4-FFF2-40B4-BE49-F238E27FC236}">
-                <a16:creationId xmlns:a16="http://schemas.microsoft.com/office/drawing/2014/main" id="{BFAB8E8C-E2C9-4051-A8A6-6257FFB2343D}"/>
+                <a16:creationId xmlns:a16="http://schemas.microsoft.com/office/drawing/2014/main" id="{D3E44DE8-EA53-4568-95F8-2B978111ADE8}"/>
               </a:ext>
             </a:extLst>
           </p:cNvPr>
@@ -8131,7 +8195,7 @@
           <p:cNvPr id="22" name="">
             <a:extLst xmlns:a="http://schemas.openxmlformats.org/drawingml/2006/main">
               <a:ext uri="{FF2B5EF4-FFF2-40B4-BE49-F238E27FC236}">
-                <a16:creationId xmlns:a16="http://schemas.microsoft.com/office/drawing/2014/main" id="{3AC4ECB7-A833-4177-B593-8CC9157B99B9}"/>
+                <a16:creationId xmlns:a16="http://schemas.microsoft.com/office/drawing/2014/main" id="{CB975E5D-587F-4467-A39B-F28C62C0BA7F}"/>
               </a:ext>
             </a:extLst>
           </p:cNvPr>
@@ -8195,7 +8259,7 @@
           <p:cNvPr id="23" name="">
             <a:extLst xmlns:a="http://schemas.openxmlformats.org/drawingml/2006/main">
               <a:ext uri="{FF2B5EF4-FFF2-40B4-BE49-F238E27FC236}">
-                <a16:creationId xmlns:a16="http://schemas.microsoft.com/office/drawing/2014/main" id="{130A0D84-E3F0-4993-A34C-9254404BB48E}"/>
+                <a16:creationId xmlns:a16="http://schemas.microsoft.com/office/drawing/2014/main" id="{2F026806-9105-438A-89DC-DD60120A72C0}"/>
               </a:ext>
             </a:extLst>
           </p:cNvPr>
@@ -8259,7 +8323,7 @@
           <p:cNvPr id="24" name="">
             <a:extLst xmlns:a="http://schemas.openxmlformats.org/drawingml/2006/main">
               <a:ext uri="{FF2B5EF4-FFF2-40B4-BE49-F238E27FC236}">
-                <a16:creationId xmlns:a16="http://schemas.microsoft.com/office/drawing/2014/main" id="{BE0EF8F4-1117-4FB2-A728-7872F20F4ACA}"/>
+                <a16:creationId xmlns:a16="http://schemas.microsoft.com/office/drawing/2014/main" id="{EB8E8DD0-1B50-464B-8262-F9525AC63F31}"/>
               </a:ext>
             </a:extLst>
           </p:cNvPr>
@@ -8323,7 +8387,7 @@
           <p:cNvPr id="25" name="">
             <a:extLst xmlns:a="http://schemas.openxmlformats.org/drawingml/2006/main">
               <a:ext uri="{FF2B5EF4-FFF2-40B4-BE49-F238E27FC236}">
-                <a16:creationId xmlns:a16="http://schemas.microsoft.com/office/drawing/2014/main" id="{75B977E3-F8A2-418A-97E4-F4CC5D6D69B7}"/>
+                <a16:creationId xmlns:a16="http://schemas.microsoft.com/office/drawing/2014/main" id="{CDE5D5DE-03DB-45A8-9789-A28E285EFF70}"/>
               </a:ext>
             </a:extLst>
           </p:cNvPr>
@@ -8358,7 +8422,7 @@
           <p:cNvPr id="26" name="">
             <a:extLst xmlns:a="http://schemas.openxmlformats.org/drawingml/2006/main">
               <a:ext uri="{FF2B5EF4-FFF2-40B4-BE49-F238E27FC236}">
-                <a16:creationId xmlns:a16="http://schemas.microsoft.com/office/drawing/2014/main" id="{7FE8315E-8AB9-45DB-927A-0A065BE547B7}"/>
+                <a16:creationId xmlns:a16="http://schemas.microsoft.com/office/drawing/2014/main" id="{63373652-D4EC-421E-867A-B8AA82B4BE69}"/>
               </a:ext>
             </a:extLst>
           </p:cNvPr>
@@ -8422,7 +8486,7 @@
           <p:cNvPr id="27" name="">
             <a:extLst xmlns:a="http://schemas.openxmlformats.org/drawingml/2006/main">
               <a:ext uri="{FF2B5EF4-FFF2-40B4-BE49-F238E27FC236}">
-                <a16:creationId xmlns:a16="http://schemas.microsoft.com/office/drawing/2014/main" id="{A9F5B650-252E-4F01-9E23-8836BBCD78F3}"/>
+                <a16:creationId xmlns:a16="http://schemas.microsoft.com/office/drawing/2014/main" id="{EFEA9CA1-0F7F-4D55-9336-C266800E4CC8}"/>
               </a:ext>
             </a:extLst>
           </p:cNvPr>
@@ -8455,7 +8519,7 @@
           <p:cNvPr id="28" name="">
             <a:extLst xmlns:a="http://schemas.openxmlformats.org/drawingml/2006/main">
               <a:ext uri="{FF2B5EF4-FFF2-40B4-BE49-F238E27FC236}">
-                <a16:creationId xmlns:a16="http://schemas.microsoft.com/office/drawing/2014/main" id="{7165D56F-D177-4282-AA3D-09ADE7B28E0D}"/>
+                <a16:creationId xmlns:a16="http://schemas.microsoft.com/office/drawing/2014/main" id="{AA33F3E0-F6C1-434A-AD54-64D04FB32FF5}"/>
               </a:ext>
             </a:extLst>
           </p:cNvPr>
@@ -8490,7 +8554,7 @@
           <p:cNvPr id="29" name="">
             <a:extLst xmlns:a="http://schemas.openxmlformats.org/drawingml/2006/main">
               <a:ext uri="{FF2B5EF4-FFF2-40B4-BE49-F238E27FC236}">
-                <a16:creationId xmlns:a16="http://schemas.microsoft.com/office/drawing/2014/main" id="{329CDA4C-4EE9-4518-9348-FC58CE06667A}"/>
+                <a16:creationId xmlns:a16="http://schemas.microsoft.com/office/drawing/2014/main" id="{DCC3A210-2AFC-436E-A077-F9A1A5AAE470}"/>
               </a:ext>
             </a:extLst>
           </p:cNvPr>
@@ -8554,7 +8618,7 @@
           <p:cNvPr id="30" name="">
             <a:extLst xmlns:a="http://schemas.openxmlformats.org/drawingml/2006/main">
               <a:ext uri="{FF2B5EF4-FFF2-40B4-BE49-F238E27FC236}">
-                <a16:creationId xmlns:a16="http://schemas.microsoft.com/office/drawing/2014/main" id="{22CF564A-1073-4C45-B633-45AA9EB124B0}"/>
+                <a16:creationId xmlns:a16="http://schemas.microsoft.com/office/drawing/2014/main" id="{2CB4B20C-539D-4655-8463-78486ABE0A25}"/>
               </a:ext>
             </a:extLst>
           </p:cNvPr>
@@ -8618,7 +8682,7 @@
           <p:cNvPr id="31" name="">
             <a:extLst xmlns:a="http://schemas.openxmlformats.org/drawingml/2006/main">
               <a:ext uri="{FF2B5EF4-FFF2-40B4-BE49-F238E27FC236}">
-                <a16:creationId xmlns:a16="http://schemas.microsoft.com/office/drawing/2014/main" id="{20E1296E-66DA-4A28-8545-1F0F0EBFAEE3}"/>
+                <a16:creationId xmlns:a16="http://schemas.microsoft.com/office/drawing/2014/main" id="{E3514FAE-59D5-4C5D-AB56-C3E6BC77574D}"/>
               </a:ext>
             </a:extLst>
           </p:cNvPr>
@@ -8682,7 +8746,7 @@
           <p:cNvPr id="32" name="">
             <a:extLst xmlns:a="http://schemas.openxmlformats.org/drawingml/2006/main">
               <a:ext uri="{FF2B5EF4-FFF2-40B4-BE49-F238E27FC236}">
-                <a16:creationId xmlns:a16="http://schemas.microsoft.com/office/drawing/2014/main" id="{A6D5AF3E-1B4F-4C11-BFE1-1E07EE559909}"/>
+                <a16:creationId xmlns:a16="http://schemas.microsoft.com/office/drawing/2014/main" id="{2115F37E-806E-4168-BF6A-FCC66E6D887A}"/>
               </a:ext>
             </a:extLst>
           </p:cNvPr>
@@ -8717,7 +8781,7 @@
           <p:cNvPr id="33" name="">
             <a:extLst xmlns:a="http://schemas.openxmlformats.org/drawingml/2006/main">
               <a:ext uri="{FF2B5EF4-FFF2-40B4-BE49-F238E27FC236}">
-                <a16:creationId xmlns:a16="http://schemas.microsoft.com/office/drawing/2014/main" id="{3DC683A4-DFA5-4F93-8E6E-986037CF701C}"/>
+                <a16:creationId xmlns:a16="http://schemas.microsoft.com/office/drawing/2014/main" id="{E983EFE6-3E23-4459-B8ED-D9B7F3D53AAE}"/>
               </a:ext>
             </a:extLst>
           </p:cNvPr>
@@ -8781,7 +8845,7 @@
           <p:cNvPr id="34" name="">
             <a:extLst xmlns:a="http://schemas.openxmlformats.org/drawingml/2006/main">
               <a:ext uri="{FF2B5EF4-FFF2-40B4-BE49-F238E27FC236}">
-                <a16:creationId xmlns:a16="http://schemas.microsoft.com/office/drawing/2014/main" id="{2D05F415-8670-4133-84A2-483D2233AFBF}"/>
+                <a16:creationId xmlns:a16="http://schemas.microsoft.com/office/drawing/2014/main" id="{020B6A92-6DFD-4A66-A377-3AC71DFC076E}"/>
               </a:ext>
             </a:extLst>
           </p:cNvPr>
@@ -8814,7 +8878,7 @@
           <p:cNvPr id="35" name="">
             <a:extLst xmlns:a="http://schemas.openxmlformats.org/drawingml/2006/main">
               <a:ext uri="{FF2B5EF4-FFF2-40B4-BE49-F238E27FC236}">
-                <a16:creationId xmlns:a16="http://schemas.microsoft.com/office/drawing/2014/main" id="{514A6B40-FB0D-485F-B67C-3854AD2642D7}"/>
+                <a16:creationId xmlns:a16="http://schemas.microsoft.com/office/drawing/2014/main" id="{94094008-FCF4-4485-96D3-EB16CD3DA520}"/>
               </a:ext>
             </a:extLst>
           </p:cNvPr>
@@ -8849,7 +8913,7 @@
           <p:cNvPr id="36" name="">
             <a:extLst xmlns:a="http://schemas.openxmlformats.org/drawingml/2006/main">
               <a:ext uri="{FF2B5EF4-FFF2-40B4-BE49-F238E27FC236}">
-                <a16:creationId xmlns:a16="http://schemas.microsoft.com/office/drawing/2014/main" id="{5B38852D-551C-4EE2-8928-59C6768B96D6}"/>
+                <a16:creationId xmlns:a16="http://schemas.microsoft.com/office/drawing/2014/main" id="{93125AF3-776D-49E4-98F4-8157785791A4}"/>
               </a:ext>
             </a:extLst>
           </p:cNvPr>
@@ -8913,7 +8977,7 @@
           <p:cNvPr id="37" name="">
             <a:extLst xmlns:a="http://schemas.openxmlformats.org/drawingml/2006/main">
               <a:ext uri="{FF2B5EF4-FFF2-40B4-BE49-F238E27FC236}">
-                <a16:creationId xmlns:a16="http://schemas.microsoft.com/office/drawing/2014/main" id="{99333B41-9AB3-479A-AE3B-EC5B40969034}"/>
+                <a16:creationId xmlns:a16="http://schemas.microsoft.com/office/drawing/2014/main" id="{A2742265-327E-4DE6-ACAC-CC8D57217C1A}"/>
               </a:ext>
             </a:extLst>
           </p:cNvPr>
@@ -8977,7 +9041,7 @@
           <p:cNvPr id="38" name="">
             <a:extLst xmlns:a="http://schemas.openxmlformats.org/drawingml/2006/main">
               <a:ext uri="{FF2B5EF4-FFF2-40B4-BE49-F238E27FC236}">
-                <a16:creationId xmlns:a16="http://schemas.microsoft.com/office/drawing/2014/main" id="{FCB45EF2-CEC2-4CAA-8368-D48937967069}"/>
+                <a16:creationId xmlns:a16="http://schemas.microsoft.com/office/drawing/2014/main" id="{FCA72978-39BB-45EB-8D40-68DDB8895786}"/>
               </a:ext>
             </a:extLst>
           </p:cNvPr>
@@ -9041,7 +9105,7 @@
           <p:cNvPr id="39" name="">
             <a:extLst xmlns:a="http://schemas.openxmlformats.org/drawingml/2006/main">
               <a:ext uri="{FF2B5EF4-FFF2-40B4-BE49-F238E27FC236}">
-                <a16:creationId xmlns:a16="http://schemas.microsoft.com/office/drawing/2014/main" id="{28DAC867-09C7-41F1-8CB4-56E875ACDC4E}"/>
+                <a16:creationId xmlns:a16="http://schemas.microsoft.com/office/drawing/2014/main" id="{607A55A7-99D5-46BF-BC9C-DD1C283890F4}"/>
               </a:ext>
             </a:extLst>
           </p:cNvPr>
@@ -9074,7 +9138,7 @@
           <p:cNvPr id="40" name="">
             <a:extLst xmlns:a="http://schemas.openxmlformats.org/drawingml/2006/main">
               <a:ext uri="{FF2B5EF4-FFF2-40B4-BE49-F238E27FC236}">
-                <a16:creationId xmlns:a16="http://schemas.microsoft.com/office/drawing/2014/main" id="{3FBE8D09-0BFD-4D44-A307-47B8D3AF1B31}"/>
+                <a16:creationId xmlns:a16="http://schemas.microsoft.com/office/drawing/2014/main" id="{3E1BF746-E4E2-499D-824F-A9396C048547}"/>
               </a:ext>
             </a:extLst>
           </p:cNvPr>
@@ -9138,7 +9202,7 @@
           <p:cNvPr id="41" name="">
             <a:extLst xmlns:a="http://schemas.openxmlformats.org/drawingml/2006/main">
               <a:ext uri="{FF2B5EF4-FFF2-40B4-BE49-F238E27FC236}">
-                <a16:creationId xmlns:a16="http://schemas.microsoft.com/office/drawing/2014/main" id="{6BEFEEA0-F6A6-4FC8-A7EA-B043D10787F8}"/>
+                <a16:creationId xmlns:a16="http://schemas.microsoft.com/office/drawing/2014/main" id="{86654394-463B-41D8-A0CA-88A2A5213B1C}"/>
               </a:ext>
             </a:extLst>
           </p:cNvPr>
@@ -9202,7 +9266,7 @@
           <p:cNvPr id="42" name="">
             <a:extLst xmlns:a="http://schemas.openxmlformats.org/drawingml/2006/main">
               <a:ext uri="{FF2B5EF4-FFF2-40B4-BE49-F238E27FC236}">
-                <a16:creationId xmlns:a16="http://schemas.microsoft.com/office/drawing/2014/main" id="{10F75BC9-64DD-43AE-ABED-435151A5519C}"/>
+                <a16:creationId xmlns:a16="http://schemas.microsoft.com/office/drawing/2014/main" id="{817C5FDB-B96C-40D8-A7E4-BCC867F1D34F}"/>
               </a:ext>
             </a:extLst>
           </p:cNvPr>
@@ -9237,7 +9301,7 @@
           <p:cNvPr id="43" name="">
             <a:extLst xmlns:a="http://schemas.openxmlformats.org/drawingml/2006/main">
               <a:ext uri="{FF2B5EF4-FFF2-40B4-BE49-F238E27FC236}">
-                <a16:creationId xmlns:a16="http://schemas.microsoft.com/office/drawing/2014/main" id="{FAEF4136-CB8F-49AB-8ABD-76C6B0D33714}"/>
+                <a16:creationId xmlns:a16="http://schemas.microsoft.com/office/drawing/2014/main" id="{E2344098-D461-446E-A662-75F764B0EB9E}"/>
               </a:ext>
             </a:extLst>
           </p:cNvPr>
@@ -9301,7 +9365,7 @@
           <p:cNvPr id="44" name="">
             <a:extLst xmlns:a="http://schemas.openxmlformats.org/drawingml/2006/main">
               <a:ext uri="{FF2B5EF4-FFF2-40B4-BE49-F238E27FC236}">
-                <a16:creationId xmlns:a16="http://schemas.microsoft.com/office/drawing/2014/main" id="{FBD79D86-2F90-407B-ADD5-5786A414A96A}"/>
+                <a16:creationId xmlns:a16="http://schemas.microsoft.com/office/drawing/2014/main" id="{6374118D-5F02-4BA5-9CFB-F7D2AA266203}"/>
               </a:ext>
             </a:extLst>
           </p:cNvPr>
@@ -9336,7 +9400,7 @@
           <p:cNvPr id="45" name="">
             <a:extLst xmlns:a="http://schemas.openxmlformats.org/drawingml/2006/main">
               <a:ext uri="{FF2B5EF4-FFF2-40B4-BE49-F238E27FC236}">
-                <a16:creationId xmlns:a16="http://schemas.microsoft.com/office/drawing/2014/main" id="{FCC8A655-D051-434D-8669-5AE5B5286D2A}"/>
+                <a16:creationId xmlns:a16="http://schemas.microsoft.com/office/drawing/2014/main" id="{FF86CD79-3839-4CCF-AFB6-0896878E86AC}"/>
               </a:ext>
             </a:extLst>
           </p:cNvPr>
@@ -9400,7 +9464,7 @@
           <p:cNvPr id="46" name="">
             <a:extLst xmlns:a="http://schemas.openxmlformats.org/drawingml/2006/main">
               <a:ext uri="{FF2B5EF4-FFF2-40B4-BE49-F238E27FC236}">
-                <a16:creationId xmlns:a16="http://schemas.microsoft.com/office/drawing/2014/main" id="{E21419C9-572C-48CA-8328-87BCF3B2AF72}"/>
+                <a16:creationId xmlns:a16="http://schemas.microsoft.com/office/drawing/2014/main" id="{F58E52F7-0858-4305-83A4-3D748C50DD5D}"/>
               </a:ext>
             </a:extLst>
           </p:cNvPr>
@@ -9435,7 +9499,7 @@
           <p:cNvPr id="47" name="">
             <a:extLst xmlns:a="http://schemas.openxmlformats.org/drawingml/2006/main">
               <a:ext uri="{FF2B5EF4-FFF2-40B4-BE49-F238E27FC236}">
-                <a16:creationId xmlns:a16="http://schemas.microsoft.com/office/drawing/2014/main" id="{3109D803-0975-4F79-B87F-63EF008F3882}"/>
+                <a16:creationId xmlns:a16="http://schemas.microsoft.com/office/drawing/2014/main" id="{8A16B413-2B97-474A-9E59-9777FD7D9147}"/>
               </a:ext>
             </a:extLst>
           </p:cNvPr>
@@ -9499,7 +9563,7 @@
           <p:cNvPr id="48" name="">
             <a:extLst xmlns:a="http://schemas.openxmlformats.org/drawingml/2006/main">
               <a:ext uri="{FF2B5EF4-FFF2-40B4-BE49-F238E27FC236}">
-                <a16:creationId xmlns:a16="http://schemas.microsoft.com/office/drawing/2014/main" id="{E160ED50-14D6-4B3F-9C3D-E92D8C3BCA86}"/>
+                <a16:creationId xmlns:a16="http://schemas.microsoft.com/office/drawing/2014/main" id="{43301CCE-1AC6-482C-B918-5A43156A326A}"/>
               </a:ext>
             </a:extLst>
           </p:cNvPr>
@@ -9553,7 +9617,7 @@
                 <a:ea typeface="Aptos"/>
                 <a:cs typeface="Aptos"/>
               </a:rPr>
-              <a:t>性能关注点</a:t>
+              <a:t>系统节奏</a:t>
             </a:r>
           </a:p>
         </p:txBody>
@@ -9563,7 +9627,7 @@
           <p:cNvPr id="49" name="">
             <a:extLst xmlns:a="http://schemas.openxmlformats.org/drawingml/2006/main">
               <a:ext uri="{FF2B5EF4-FFF2-40B4-BE49-F238E27FC236}">
-                <a16:creationId xmlns:a16="http://schemas.microsoft.com/office/drawing/2014/main" id="{D6B9AEFD-9ECB-4168-963A-2179092D8964}"/>
+                <a16:creationId xmlns:a16="http://schemas.microsoft.com/office/drawing/2014/main" id="{3488A948-963E-4137-89CF-AC79F6274993}"/>
               </a:ext>
             </a:extLst>
           </p:cNvPr>
@@ -9617,7 +9681,7 @@
                 <a:ea typeface="Aptos"/>
                 <a:cs typeface="Aptos"/>
               </a:rPr>
-              <a:t>生成吞吐、权重同步停顿、样本回传延迟、Ray 调度压力，会一起决定训练 step time。</a:t>
+              <a:t>生成、打分、参数更新、权重同步和样本回传，会一起决定一轮训练 step 的节奏。</a:t>
             </a:r>
           </a:p>
         </p:txBody>
@@ -9627,7 +9691,7 @@
           <p:cNvPr id="50" name="">
             <a:extLst xmlns:a="http://schemas.openxmlformats.org/drawingml/2006/main">
               <a:ext uri="{FF2B5EF4-FFF2-40B4-BE49-F238E27FC236}">
-                <a16:creationId xmlns:a16="http://schemas.microsoft.com/office/drawing/2014/main" id="{7E657CDD-058D-43B3-86F4-26C54CFBE9AA}"/>
+                <a16:creationId xmlns:a16="http://schemas.microsoft.com/office/drawing/2014/main" id="{0461B497-5591-4A13-81F9-2D2829BA1F02}"/>
               </a:ext>
             </a:extLst>
           </p:cNvPr>
@@ -9662,7 +9726,7 @@
           <p:cNvPr id="51" name="">
             <a:extLst xmlns:a="http://schemas.openxmlformats.org/drawingml/2006/main">
               <a:ext uri="{FF2B5EF4-FFF2-40B4-BE49-F238E27FC236}">
-                <a16:creationId xmlns:a16="http://schemas.microsoft.com/office/drawing/2014/main" id="{612EE153-DE46-40F7-A911-870AA8BC4B56}"/>
+                <a16:creationId xmlns:a16="http://schemas.microsoft.com/office/drawing/2014/main" id="{96A1D72B-E95C-461F-B8DB-4E72FA8B60CB}"/>
               </a:ext>
             </a:extLst>
           </p:cNvPr>
@@ -9726,7 +9790,7 @@
           <p:cNvPr id="52" name="">
             <a:extLst xmlns:a="http://schemas.openxmlformats.org/drawingml/2006/main">
               <a:ext uri="{FF2B5EF4-FFF2-40B4-BE49-F238E27FC236}">
-                <a16:creationId xmlns:a16="http://schemas.microsoft.com/office/drawing/2014/main" id="{D41E634C-F0CC-42D1-A303-C5C507DBCC4A}"/>
+                <a16:creationId xmlns:a16="http://schemas.microsoft.com/office/drawing/2014/main" id="{61F3ED15-C942-4783-9688-CAAC2B984883}"/>
               </a:ext>
             </a:extLst>
           </p:cNvPr>
@@ -9788,7 +9852,7 @@
     </p:spTree>
     <p:extLst>
       <p:ext uri="{BB962C8B-B14F-4D97-AF65-F5344CB8AC3E}">
-        <p14:creationId xmlns:p14="http://schemas.microsoft.com/office/powerpoint/2010/main" val="1067388624"/>
+        <p14:creationId xmlns:p14="http://schemas.microsoft.com/office/powerpoint/2010/main" val="2063493610"/>
       </p:ext>
     </p:extLst>
   </p:cSld>
@@ -9812,7 +9876,7 @@
           <p:cNvPr id="1" name="">
             <a:extLst xmlns:a="http://schemas.openxmlformats.org/drawingml/2006/main">
               <a:ext uri="{FF2B5EF4-FFF2-40B4-BE49-F238E27FC236}">
-                <a16:creationId xmlns:a16="http://schemas.microsoft.com/office/drawing/2014/main" id="{CE21D171-8FAF-4E52-8D75-6E0CE737D478}"/>
+                <a16:creationId xmlns:a16="http://schemas.microsoft.com/office/drawing/2014/main" id="{CE711A92-B1BE-4898-932C-C89C961887E7}"/>
               </a:ext>
             </a:extLst>
           </p:cNvPr>
@@ -9847,7 +9911,7 @@
           <p:cNvPr id="2" name="">
             <a:extLst xmlns:a="http://schemas.openxmlformats.org/drawingml/2006/main">
               <a:ext uri="{FF2B5EF4-FFF2-40B4-BE49-F238E27FC236}">
-                <a16:creationId xmlns:a16="http://schemas.microsoft.com/office/drawing/2014/main" id="{CE9271F5-8277-4561-B108-AAF44649EF29}"/>
+                <a16:creationId xmlns:a16="http://schemas.microsoft.com/office/drawing/2014/main" id="{0A8F10AF-4E46-4C92-81FD-7F6661B5E48A}"/>
               </a:ext>
             </a:extLst>
           </p:cNvPr>
@@ -9882,7 +9946,7 @@
           <p:cNvPr id="3" name="">
             <a:extLst xmlns:a="http://schemas.openxmlformats.org/drawingml/2006/main">
               <a:ext uri="{FF2B5EF4-FFF2-40B4-BE49-F238E27FC236}">
-                <a16:creationId xmlns:a16="http://schemas.microsoft.com/office/drawing/2014/main" id="{3BEBE904-AF45-4595-B17E-BA863A996222}"/>
+                <a16:creationId xmlns:a16="http://schemas.microsoft.com/office/drawing/2014/main" id="{9BBD2C57-55BE-47AE-916A-87B05DFE8DB9}"/>
               </a:ext>
             </a:extLst>
           </p:cNvPr>
@@ -9946,7 +10010,7 @@
           <p:cNvPr id="4" name="">
             <a:extLst xmlns:a="http://schemas.openxmlformats.org/drawingml/2006/main">
               <a:ext uri="{FF2B5EF4-FFF2-40B4-BE49-F238E27FC236}">
-                <a16:creationId xmlns:a16="http://schemas.microsoft.com/office/drawing/2014/main" id="{9FDD71CD-33B3-4C8C-8EE4-5229BA6CF2D0}"/>
+                <a16:creationId xmlns:a16="http://schemas.microsoft.com/office/drawing/2014/main" id="{6FADCABD-BF5D-4A33-A977-F8971EB368A6}"/>
               </a:ext>
             </a:extLst>
           </p:cNvPr>
@@ -10010,7 +10074,7 @@
           <p:cNvPr id="5" name="">
             <a:extLst xmlns:a="http://schemas.openxmlformats.org/drawingml/2006/main">
               <a:ext uri="{FF2B5EF4-FFF2-40B4-BE49-F238E27FC236}">
-                <a16:creationId xmlns:a16="http://schemas.microsoft.com/office/drawing/2014/main" id="{A51CA6D9-D20C-40F1-B251-8A5A601C169A}"/>
+                <a16:creationId xmlns:a16="http://schemas.microsoft.com/office/drawing/2014/main" id="{8E92B897-1023-4C74-901B-35BDFAFFF202}"/>
               </a:ext>
             </a:extLst>
           </p:cNvPr>
@@ -10064,7 +10128,7 @@
                 <a:ea typeface="Aptos"/>
                 <a:cs typeface="Aptos"/>
               </a:rPr>
-              <a:t>优化时要先分清：Ray 负责调度，推理引擎负责生成，数据系统负责搬运大对象。</a:t>
+              <a:t>Ray 负责调度，训练与推理引擎负责算子执行，数据系统负责搬运大对象。</a:t>
             </a:r>
           </a:p>
         </p:txBody>
@@ -10074,7 +10138,7 @@
           <p:cNvPr id="6" name="">
             <a:extLst xmlns:a="http://schemas.openxmlformats.org/drawingml/2006/main">
               <a:ext uri="{FF2B5EF4-FFF2-40B4-BE49-F238E27FC236}">
-                <a16:creationId xmlns:a16="http://schemas.microsoft.com/office/drawing/2014/main" id="{D7BAADA3-0C23-43B2-B25F-D838C4323E17}"/>
+                <a16:creationId xmlns:a16="http://schemas.microsoft.com/office/drawing/2014/main" id="{75DF5392-BFBA-4E70-8FD8-116D600650EF}"/>
               </a:ext>
             </a:extLst>
           </p:cNvPr>
@@ -10107,7 +10171,7 @@
           <p:cNvPr id="7" name="">
             <a:extLst xmlns:a="http://schemas.openxmlformats.org/drawingml/2006/main">
               <a:ext uri="{FF2B5EF4-FFF2-40B4-BE49-F238E27FC236}">
-                <a16:creationId xmlns:a16="http://schemas.microsoft.com/office/drawing/2014/main" id="{9E711A5A-2022-4DA5-BF3F-3D4F1A40BF6A}"/>
+                <a16:creationId xmlns:a16="http://schemas.microsoft.com/office/drawing/2014/main" id="{414E0095-966F-4506-949B-E2FBE5ED6887}"/>
               </a:ext>
             </a:extLst>
           </p:cNvPr>
@@ -10140,7 +10204,7 @@
           <p:cNvPr id="8" name="">
             <a:extLst xmlns:a="http://schemas.openxmlformats.org/drawingml/2006/main">
               <a:ext uri="{FF2B5EF4-FFF2-40B4-BE49-F238E27FC236}">
-                <a16:creationId xmlns:a16="http://schemas.microsoft.com/office/drawing/2014/main" id="{59C30E54-3E03-4D21-BAA6-CEDB0461F1C0}"/>
+                <a16:creationId xmlns:a16="http://schemas.microsoft.com/office/drawing/2014/main" id="{9B25993A-4483-46F0-9413-243B648052B5}"/>
               </a:ext>
             </a:extLst>
           </p:cNvPr>
@@ -10173,7 +10237,7 @@
           <p:cNvPr id="9" name="">
             <a:extLst xmlns:a="http://schemas.openxmlformats.org/drawingml/2006/main">
               <a:ext uri="{FF2B5EF4-FFF2-40B4-BE49-F238E27FC236}">
-                <a16:creationId xmlns:a16="http://schemas.microsoft.com/office/drawing/2014/main" id="{69CEC346-5F96-4F77-86CD-88DF117CB821}"/>
+                <a16:creationId xmlns:a16="http://schemas.microsoft.com/office/drawing/2014/main" id="{5BBCE18F-323A-4B5B-A110-4C059C1C231F}"/>
               </a:ext>
             </a:extLst>
           </p:cNvPr>
@@ -10237,7 +10301,7 @@
           <p:cNvPr id="10" name="">
             <a:extLst xmlns:a="http://schemas.openxmlformats.org/drawingml/2006/main">
               <a:ext uri="{FF2B5EF4-FFF2-40B4-BE49-F238E27FC236}">
-                <a16:creationId xmlns:a16="http://schemas.microsoft.com/office/drawing/2014/main" id="{C5D28EE2-9DA1-4F75-8B2D-5267D91A77F9}"/>
+                <a16:creationId xmlns:a16="http://schemas.microsoft.com/office/drawing/2014/main" id="{76342FC3-D5F7-422B-96C0-5EC543741D84}"/>
               </a:ext>
             </a:extLst>
           </p:cNvPr>
@@ -10270,7 +10334,7 @@
           <p:cNvPr id="11" name="">
             <a:extLst xmlns:a="http://schemas.openxmlformats.org/drawingml/2006/main">
               <a:ext uri="{FF2B5EF4-FFF2-40B4-BE49-F238E27FC236}">
-                <a16:creationId xmlns:a16="http://schemas.microsoft.com/office/drawing/2014/main" id="{7F8972EC-4802-4BFA-AE2F-AE53DF166E4C}"/>
+                <a16:creationId xmlns:a16="http://schemas.microsoft.com/office/drawing/2014/main" id="{108485AB-BE18-4DBC-83EB-8FB872A3F0F8}"/>
               </a:ext>
             </a:extLst>
           </p:cNvPr>
@@ -10334,7 +10398,7 @@
           <p:cNvPr id="12" name="">
             <a:extLst xmlns:a="http://schemas.openxmlformats.org/drawingml/2006/main">
               <a:ext uri="{FF2B5EF4-FFF2-40B4-BE49-F238E27FC236}">
-                <a16:creationId xmlns:a16="http://schemas.microsoft.com/office/drawing/2014/main" id="{70FEBD26-9B6F-4C7C-B26A-91599E5A68F2}"/>
+                <a16:creationId xmlns:a16="http://schemas.microsoft.com/office/drawing/2014/main" id="{4596EF6A-A736-44B5-979D-61C0E418AB76}"/>
               </a:ext>
             </a:extLst>
           </p:cNvPr>
@@ -10398,7 +10462,7 @@
           <p:cNvPr id="13" name="">
             <a:extLst xmlns:a="http://schemas.openxmlformats.org/drawingml/2006/main">
               <a:ext uri="{FF2B5EF4-FFF2-40B4-BE49-F238E27FC236}">
-                <a16:creationId xmlns:a16="http://schemas.microsoft.com/office/drawing/2014/main" id="{55C602E7-1738-4E60-890D-10EE5C194217}"/>
+                <a16:creationId xmlns:a16="http://schemas.microsoft.com/office/drawing/2014/main" id="{91E93784-7A4E-4350-A62E-7FFECB72A604}"/>
               </a:ext>
             </a:extLst>
           </p:cNvPr>
@@ -10431,7 +10495,7 @@
           <p:cNvPr id="14" name="">
             <a:extLst xmlns:a="http://schemas.openxmlformats.org/drawingml/2006/main">
               <a:ext uri="{FF2B5EF4-FFF2-40B4-BE49-F238E27FC236}">
-                <a16:creationId xmlns:a16="http://schemas.microsoft.com/office/drawing/2014/main" id="{26E38B96-134C-4859-86FB-4BE5E64AC728}"/>
+                <a16:creationId xmlns:a16="http://schemas.microsoft.com/office/drawing/2014/main" id="{3EF0349A-65EA-450D-9423-96460CEEF9EC}"/>
               </a:ext>
             </a:extLst>
           </p:cNvPr>
@@ -10495,7 +10559,7 @@
           <p:cNvPr id="15" name="">
             <a:extLst xmlns:a="http://schemas.openxmlformats.org/drawingml/2006/main">
               <a:ext uri="{FF2B5EF4-FFF2-40B4-BE49-F238E27FC236}">
-                <a16:creationId xmlns:a16="http://schemas.microsoft.com/office/drawing/2014/main" id="{B251D5C0-56AB-4EF1-97AC-5E65AC609458}"/>
+                <a16:creationId xmlns:a16="http://schemas.microsoft.com/office/drawing/2014/main" id="{A42A235D-F57F-4016-AABB-3C3DDB697537}"/>
               </a:ext>
             </a:extLst>
           </p:cNvPr>
@@ -10559,7 +10623,7 @@
           <p:cNvPr id="16" name="">
             <a:extLst xmlns:a="http://schemas.openxmlformats.org/drawingml/2006/main">
               <a:ext uri="{FF2B5EF4-FFF2-40B4-BE49-F238E27FC236}">
-                <a16:creationId xmlns:a16="http://schemas.microsoft.com/office/drawing/2014/main" id="{FBE1E0A5-6B72-4A3F-80FA-24067E831610}"/>
+                <a16:creationId xmlns:a16="http://schemas.microsoft.com/office/drawing/2014/main" id="{5A37A61C-47DD-4480-AB18-DD2701AD3596}"/>
               </a:ext>
             </a:extLst>
           </p:cNvPr>
@@ -10592,7 +10656,7 @@
           <p:cNvPr id="17" name="">
             <a:extLst xmlns:a="http://schemas.openxmlformats.org/drawingml/2006/main">
               <a:ext uri="{FF2B5EF4-FFF2-40B4-BE49-F238E27FC236}">
-                <a16:creationId xmlns:a16="http://schemas.microsoft.com/office/drawing/2014/main" id="{34EE5DD0-2959-4F1F-B818-4AAF849B78B9}"/>
+                <a16:creationId xmlns:a16="http://schemas.microsoft.com/office/drawing/2014/main" id="{ED37CD94-81D4-4572-88D7-0773CDD0DDB7}"/>
               </a:ext>
             </a:extLst>
           </p:cNvPr>
@@ -10656,7 +10720,7 @@
           <p:cNvPr id="18" name="">
             <a:extLst xmlns:a="http://schemas.openxmlformats.org/drawingml/2006/main">
               <a:ext uri="{FF2B5EF4-FFF2-40B4-BE49-F238E27FC236}">
-                <a16:creationId xmlns:a16="http://schemas.microsoft.com/office/drawing/2014/main" id="{29D5A71E-5C58-4323-A702-6B50C126B1BC}"/>
+                <a16:creationId xmlns:a16="http://schemas.microsoft.com/office/drawing/2014/main" id="{9C47D6B9-FB67-4A01-BFB1-6EA2A8E5AE99}"/>
               </a:ext>
             </a:extLst>
           </p:cNvPr>
@@ -10720,7 +10784,7 @@
           <p:cNvPr id="19" name="">
             <a:extLst xmlns:a="http://schemas.openxmlformats.org/drawingml/2006/main">
               <a:ext uri="{FF2B5EF4-FFF2-40B4-BE49-F238E27FC236}">
-                <a16:creationId xmlns:a16="http://schemas.microsoft.com/office/drawing/2014/main" id="{CAD4FE56-C7CD-4EF7-9280-24AF40435611}"/>
+                <a16:creationId xmlns:a16="http://schemas.microsoft.com/office/drawing/2014/main" id="{E6375F2F-B963-421B-B7B8-56511790A10D}"/>
               </a:ext>
             </a:extLst>
           </p:cNvPr>
@@ -10784,7 +10848,7 @@
           <p:cNvPr id="20" name="">
             <a:extLst xmlns:a="http://schemas.openxmlformats.org/drawingml/2006/main">
               <a:ext uri="{FF2B5EF4-FFF2-40B4-BE49-F238E27FC236}">
-                <a16:creationId xmlns:a16="http://schemas.microsoft.com/office/drawing/2014/main" id="{69F0531B-F590-4843-95CC-D7088A8E8C45}"/>
+                <a16:creationId xmlns:a16="http://schemas.microsoft.com/office/drawing/2014/main" id="{A6BFEBE8-DE2F-44D5-B5A5-460B0CE25195}"/>
               </a:ext>
             </a:extLst>
           </p:cNvPr>
@@ -10817,7 +10881,7 @@
           <p:cNvPr id="21" name="">
             <a:extLst xmlns:a="http://schemas.openxmlformats.org/drawingml/2006/main">
               <a:ext uri="{FF2B5EF4-FFF2-40B4-BE49-F238E27FC236}">
-                <a16:creationId xmlns:a16="http://schemas.microsoft.com/office/drawing/2014/main" id="{0D87B774-2888-41E1-A6E6-714D6F0B4E5F}"/>
+                <a16:creationId xmlns:a16="http://schemas.microsoft.com/office/drawing/2014/main" id="{91C9649D-E05E-44D8-A0B6-DC67BA531637}"/>
               </a:ext>
             </a:extLst>
           </p:cNvPr>
@@ -10881,7 +10945,7 @@
           <p:cNvPr id="22" name="">
             <a:extLst xmlns:a="http://schemas.openxmlformats.org/drawingml/2006/main">
               <a:ext uri="{FF2B5EF4-FFF2-40B4-BE49-F238E27FC236}">
-                <a16:creationId xmlns:a16="http://schemas.microsoft.com/office/drawing/2014/main" id="{E7583C80-9497-46FC-BF13-E038EEB29285}"/>
+                <a16:creationId xmlns:a16="http://schemas.microsoft.com/office/drawing/2014/main" id="{6DD5CF1C-9403-4F0D-93FD-3F9D12F149C6}"/>
               </a:ext>
             </a:extLst>
           </p:cNvPr>
@@ -10945,7 +11009,7 @@
           <p:cNvPr id="23" name="">
             <a:extLst xmlns:a="http://schemas.openxmlformats.org/drawingml/2006/main">
               <a:ext uri="{FF2B5EF4-FFF2-40B4-BE49-F238E27FC236}">
-                <a16:creationId xmlns:a16="http://schemas.microsoft.com/office/drawing/2014/main" id="{ADE7D23E-F7C1-4438-923D-93D519731EAA}"/>
+                <a16:creationId xmlns:a16="http://schemas.microsoft.com/office/drawing/2014/main" id="{F39F0058-2BAE-4F29-A6BB-C3DDC9D40343}"/>
               </a:ext>
             </a:extLst>
           </p:cNvPr>
@@ -10978,7 +11042,7 @@
           <p:cNvPr id="24" name="">
             <a:extLst xmlns:a="http://schemas.openxmlformats.org/drawingml/2006/main">
               <a:ext uri="{FF2B5EF4-FFF2-40B4-BE49-F238E27FC236}">
-                <a16:creationId xmlns:a16="http://schemas.microsoft.com/office/drawing/2014/main" id="{E0476942-95C5-41D8-A6F5-1C5CAFF3933E}"/>
+                <a16:creationId xmlns:a16="http://schemas.microsoft.com/office/drawing/2014/main" id="{186E979F-2194-483E-9E88-8DAA04C821BB}"/>
               </a:ext>
             </a:extLst>
           </p:cNvPr>
@@ -11042,7 +11106,7 @@
           <p:cNvPr id="25" name="">
             <a:extLst xmlns:a="http://schemas.openxmlformats.org/drawingml/2006/main">
               <a:ext uri="{FF2B5EF4-FFF2-40B4-BE49-F238E27FC236}">
-                <a16:creationId xmlns:a16="http://schemas.microsoft.com/office/drawing/2014/main" id="{222A768A-15EE-4E7F-9366-D87D5021B9C3}"/>
+                <a16:creationId xmlns:a16="http://schemas.microsoft.com/office/drawing/2014/main" id="{B5DE36C6-EE12-4CF7-BDA3-03F20661B789}"/>
               </a:ext>
             </a:extLst>
           </p:cNvPr>
@@ -11106,7 +11170,7 @@
           <p:cNvPr id="26" name="">
             <a:extLst xmlns:a="http://schemas.openxmlformats.org/drawingml/2006/main">
               <a:ext uri="{FF2B5EF4-FFF2-40B4-BE49-F238E27FC236}">
-                <a16:creationId xmlns:a16="http://schemas.microsoft.com/office/drawing/2014/main" id="{99A0BD86-A553-4632-A1DB-E6096F5F9BD2}"/>
+                <a16:creationId xmlns:a16="http://schemas.microsoft.com/office/drawing/2014/main" id="{6A2345BF-6D06-4C84-B093-F22A092F4E2C}"/>
               </a:ext>
             </a:extLst>
           </p:cNvPr>
@@ -11139,7 +11203,7 @@
           <p:cNvPr id="27" name="">
             <a:extLst xmlns:a="http://schemas.openxmlformats.org/drawingml/2006/main">
               <a:ext uri="{FF2B5EF4-FFF2-40B4-BE49-F238E27FC236}">
-                <a16:creationId xmlns:a16="http://schemas.microsoft.com/office/drawing/2014/main" id="{45503EDF-78BE-402B-A7C5-E054962F743C}"/>
+                <a16:creationId xmlns:a16="http://schemas.microsoft.com/office/drawing/2014/main" id="{A69C78C0-CCA6-4DF5-8477-F5F48304D12A}"/>
               </a:ext>
             </a:extLst>
           </p:cNvPr>
@@ -11203,7 +11267,7 @@
           <p:cNvPr id="28" name="">
             <a:extLst xmlns:a="http://schemas.openxmlformats.org/drawingml/2006/main">
               <a:ext uri="{FF2B5EF4-FFF2-40B4-BE49-F238E27FC236}">
-                <a16:creationId xmlns:a16="http://schemas.microsoft.com/office/drawing/2014/main" id="{73D7471A-DBCF-4E0F-822B-67F4B0659AEC}"/>
+                <a16:creationId xmlns:a16="http://schemas.microsoft.com/office/drawing/2014/main" id="{81E5C214-D554-4369-B78D-50A0EB1FA552}"/>
               </a:ext>
             </a:extLst>
           </p:cNvPr>
@@ -11267,7 +11331,7 @@
           <p:cNvPr id="29" name="">
             <a:extLst xmlns:a="http://schemas.openxmlformats.org/drawingml/2006/main">
               <a:ext uri="{FF2B5EF4-FFF2-40B4-BE49-F238E27FC236}">
-                <a16:creationId xmlns:a16="http://schemas.microsoft.com/office/drawing/2014/main" id="{0EEF1DE0-E008-4FE1-88BE-0FC041130B46}"/>
+                <a16:creationId xmlns:a16="http://schemas.microsoft.com/office/drawing/2014/main" id="{A15ABEC6-1A99-4260-857B-466A6FC3259F}"/>
               </a:ext>
             </a:extLst>
           </p:cNvPr>
@@ -11331,7 +11395,7 @@
           <p:cNvPr id="30" name="">
             <a:extLst xmlns:a="http://schemas.openxmlformats.org/drawingml/2006/main">
               <a:ext uri="{FF2B5EF4-FFF2-40B4-BE49-F238E27FC236}">
-                <a16:creationId xmlns:a16="http://schemas.microsoft.com/office/drawing/2014/main" id="{6F3B79FF-E2FD-4BA8-B8F4-79273E3E60FE}"/>
+                <a16:creationId xmlns:a16="http://schemas.microsoft.com/office/drawing/2014/main" id="{6F3B9153-C6AB-4EAA-B96A-1FBDC527FABC}"/>
               </a:ext>
             </a:extLst>
           </p:cNvPr>
@@ -11364,7 +11428,7 @@
           <p:cNvPr id="31" name="">
             <a:extLst xmlns:a="http://schemas.openxmlformats.org/drawingml/2006/main">
               <a:ext uri="{FF2B5EF4-FFF2-40B4-BE49-F238E27FC236}">
-                <a16:creationId xmlns:a16="http://schemas.microsoft.com/office/drawing/2014/main" id="{CE074DE4-280B-4367-BDE4-77631ED1FE9E}"/>
+                <a16:creationId xmlns:a16="http://schemas.microsoft.com/office/drawing/2014/main" id="{891A1121-C009-4AF4-9AC8-4ABEDC47187D}"/>
               </a:ext>
             </a:extLst>
           </p:cNvPr>
@@ -11428,7 +11492,7 @@
           <p:cNvPr id="32" name="">
             <a:extLst xmlns:a="http://schemas.openxmlformats.org/drawingml/2006/main">
               <a:ext uri="{FF2B5EF4-FFF2-40B4-BE49-F238E27FC236}">
-                <a16:creationId xmlns:a16="http://schemas.microsoft.com/office/drawing/2014/main" id="{107C21AC-24A0-4918-B447-F084E1DD144E}"/>
+                <a16:creationId xmlns:a16="http://schemas.microsoft.com/office/drawing/2014/main" id="{C86889DD-1C19-4455-A899-F89F3F7A1E3E}"/>
               </a:ext>
             </a:extLst>
           </p:cNvPr>
@@ -11492,7 +11556,7 @@
           <p:cNvPr id="33" name="">
             <a:extLst xmlns:a="http://schemas.openxmlformats.org/drawingml/2006/main">
               <a:ext uri="{FF2B5EF4-FFF2-40B4-BE49-F238E27FC236}">
-                <a16:creationId xmlns:a16="http://schemas.microsoft.com/office/drawing/2014/main" id="{44A361AB-2252-4645-BCFC-99CA0717636A}"/>
+                <a16:creationId xmlns:a16="http://schemas.microsoft.com/office/drawing/2014/main" id="{F0854816-0729-451A-909F-6E655B452CF9}"/>
               </a:ext>
             </a:extLst>
           </p:cNvPr>
@@ -11525,7 +11589,7 @@
           <p:cNvPr id="34" name="">
             <a:extLst xmlns:a="http://schemas.openxmlformats.org/drawingml/2006/main">
               <a:ext uri="{FF2B5EF4-FFF2-40B4-BE49-F238E27FC236}">
-                <a16:creationId xmlns:a16="http://schemas.microsoft.com/office/drawing/2014/main" id="{D35FA006-E007-4273-9FD7-627C525C1B44}"/>
+                <a16:creationId xmlns:a16="http://schemas.microsoft.com/office/drawing/2014/main" id="{CE3C7F8A-DB33-4D39-999D-2B00B5C95EB2}"/>
               </a:ext>
             </a:extLst>
           </p:cNvPr>
@@ -11589,7 +11653,7 @@
           <p:cNvPr id="35" name="">
             <a:extLst xmlns:a="http://schemas.openxmlformats.org/drawingml/2006/main">
               <a:ext uri="{FF2B5EF4-FFF2-40B4-BE49-F238E27FC236}">
-                <a16:creationId xmlns:a16="http://schemas.microsoft.com/office/drawing/2014/main" id="{E1137490-5272-42F8-B151-07CF841727B3}"/>
+                <a16:creationId xmlns:a16="http://schemas.microsoft.com/office/drawing/2014/main" id="{9C27A581-3AE9-481E-89C9-D4871D70B7AD}"/>
               </a:ext>
             </a:extLst>
           </p:cNvPr>
@@ -11653,7 +11717,7 @@
           <p:cNvPr id="36" name="">
             <a:extLst xmlns:a="http://schemas.openxmlformats.org/drawingml/2006/main">
               <a:ext uri="{FF2B5EF4-FFF2-40B4-BE49-F238E27FC236}">
-                <a16:creationId xmlns:a16="http://schemas.microsoft.com/office/drawing/2014/main" id="{F5C85137-FDD8-460C-9814-B178C8BDBA6B}"/>
+                <a16:creationId xmlns:a16="http://schemas.microsoft.com/office/drawing/2014/main" id="{6804424F-5CA5-4D3B-B792-DD9B50343FFD}"/>
               </a:ext>
             </a:extLst>
           </p:cNvPr>
@@ -11686,7 +11750,7 @@
           <p:cNvPr id="37" name="">
             <a:extLst xmlns:a="http://schemas.openxmlformats.org/drawingml/2006/main">
               <a:ext uri="{FF2B5EF4-FFF2-40B4-BE49-F238E27FC236}">
-                <a16:creationId xmlns:a16="http://schemas.microsoft.com/office/drawing/2014/main" id="{C8C195C2-557A-457B-A007-AACA044E2D29}"/>
+                <a16:creationId xmlns:a16="http://schemas.microsoft.com/office/drawing/2014/main" id="{F68073FF-83F1-4673-B517-BD6DC94A3BD2}"/>
               </a:ext>
             </a:extLst>
           </p:cNvPr>
@@ -11750,7 +11814,7 @@
           <p:cNvPr id="38" name="">
             <a:extLst xmlns:a="http://schemas.openxmlformats.org/drawingml/2006/main">
               <a:ext uri="{FF2B5EF4-FFF2-40B4-BE49-F238E27FC236}">
-                <a16:creationId xmlns:a16="http://schemas.microsoft.com/office/drawing/2014/main" id="{5ED97D8A-FD09-4A3C-942B-BB6991AAAFAC}"/>
+                <a16:creationId xmlns:a16="http://schemas.microsoft.com/office/drawing/2014/main" id="{3B2C434D-6C82-431D-AF0E-5E4FAA792014}"/>
               </a:ext>
             </a:extLst>
           </p:cNvPr>
@@ -11814,7 +11878,7 @@
           <p:cNvPr id="39" name="">
             <a:extLst xmlns:a="http://schemas.openxmlformats.org/drawingml/2006/main">
               <a:ext uri="{FF2B5EF4-FFF2-40B4-BE49-F238E27FC236}">
-                <a16:creationId xmlns:a16="http://schemas.microsoft.com/office/drawing/2014/main" id="{50106BCC-8E5E-45E0-959E-17C71BA60A7C}"/>
+                <a16:creationId xmlns:a16="http://schemas.microsoft.com/office/drawing/2014/main" id="{51A4CD32-A5A3-4750-808A-003DFA3C44ED}"/>
               </a:ext>
             </a:extLst>
           </p:cNvPr>
@@ -11849,7 +11913,7 @@
           <p:cNvPr id="40" name="">
             <a:extLst xmlns:a="http://schemas.openxmlformats.org/drawingml/2006/main">
               <a:ext uri="{FF2B5EF4-FFF2-40B4-BE49-F238E27FC236}">
-                <a16:creationId xmlns:a16="http://schemas.microsoft.com/office/drawing/2014/main" id="{6CF43771-C11C-4D3B-B083-634D586B6BD9}"/>
+                <a16:creationId xmlns:a16="http://schemas.microsoft.com/office/drawing/2014/main" id="{0E874541-CF15-41F9-89CA-D39714D05F7F}"/>
               </a:ext>
             </a:extLst>
           </p:cNvPr>
@@ -11913,7 +11977,7 @@
           <p:cNvPr id="41" name="">
             <a:extLst xmlns:a="http://schemas.openxmlformats.org/drawingml/2006/main">
               <a:ext uri="{FF2B5EF4-FFF2-40B4-BE49-F238E27FC236}">
-                <a16:creationId xmlns:a16="http://schemas.microsoft.com/office/drawing/2014/main" id="{0808D08F-8BE8-4C22-B982-902103E18823}"/>
+                <a16:creationId xmlns:a16="http://schemas.microsoft.com/office/drawing/2014/main" id="{28BF31E7-B6E0-4004-AD29-4D927E69FC24}"/>
               </a:ext>
             </a:extLst>
           </p:cNvPr>
@@ -11948,7 +12012,7 @@
           <p:cNvPr id="42" name="">
             <a:extLst xmlns:a="http://schemas.openxmlformats.org/drawingml/2006/main">
               <a:ext uri="{FF2B5EF4-FFF2-40B4-BE49-F238E27FC236}">
-                <a16:creationId xmlns:a16="http://schemas.microsoft.com/office/drawing/2014/main" id="{55FEA330-9AD9-4FF2-8136-418D34917572}"/>
+                <a16:creationId xmlns:a16="http://schemas.microsoft.com/office/drawing/2014/main" id="{72BAC7EB-3585-4705-B7B0-9A470B154D7C}"/>
               </a:ext>
             </a:extLst>
           </p:cNvPr>
@@ -12012,7 +12076,7 @@
           <p:cNvPr id="43" name="">
             <a:extLst xmlns:a="http://schemas.openxmlformats.org/drawingml/2006/main">
               <a:ext uri="{FF2B5EF4-FFF2-40B4-BE49-F238E27FC236}">
-                <a16:creationId xmlns:a16="http://schemas.microsoft.com/office/drawing/2014/main" id="{0D198508-226A-4A4A-9CEE-C614A5575FE8}"/>
+                <a16:creationId xmlns:a16="http://schemas.microsoft.com/office/drawing/2014/main" id="{2C888119-2C1D-48F6-963E-44B39CA076CA}"/>
               </a:ext>
             </a:extLst>
           </p:cNvPr>
@@ -12047,7 +12111,7 @@
           <p:cNvPr id="44" name="">
             <a:extLst xmlns:a="http://schemas.openxmlformats.org/drawingml/2006/main">
               <a:ext uri="{FF2B5EF4-FFF2-40B4-BE49-F238E27FC236}">
-                <a16:creationId xmlns:a16="http://schemas.microsoft.com/office/drawing/2014/main" id="{8ECA19F4-A416-4E80-8FA9-889DFDE47BF1}"/>
+                <a16:creationId xmlns:a16="http://schemas.microsoft.com/office/drawing/2014/main" id="{373F5402-ED3E-4457-9774-BB699AD532D6}"/>
               </a:ext>
             </a:extLst>
           </p:cNvPr>
@@ -12111,7 +12175,7 @@
           <p:cNvPr id="45" name="">
             <a:extLst xmlns:a="http://schemas.openxmlformats.org/drawingml/2006/main">
               <a:ext uri="{FF2B5EF4-FFF2-40B4-BE49-F238E27FC236}">
-                <a16:creationId xmlns:a16="http://schemas.microsoft.com/office/drawing/2014/main" id="{F149D675-8CF3-4B0A-A695-8BE9423A6166}"/>
+                <a16:creationId xmlns:a16="http://schemas.microsoft.com/office/drawing/2014/main" id="{EC788BEC-5E62-4706-8E45-2C5FF49584CE}"/>
               </a:ext>
             </a:extLst>
           </p:cNvPr>
@@ -12173,7 +12237,7 @@
     </p:spTree>
     <p:extLst>
       <p:ext uri="{BB962C8B-B14F-4D97-AF65-F5344CB8AC3E}">
-        <p14:creationId xmlns:p14="http://schemas.microsoft.com/office/powerpoint/2010/main" val="722769270"/>
+        <p14:creationId xmlns:p14="http://schemas.microsoft.com/office/powerpoint/2010/main" val="1001119041"/>
       </p:ext>
     </p:extLst>
   </p:cSld>
@@ -12197,7 +12261,7 @@
           <p:cNvPr id="1" name="">
             <a:extLst xmlns:a="http://schemas.openxmlformats.org/drawingml/2006/main">
               <a:ext uri="{FF2B5EF4-FFF2-40B4-BE49-F238E27FC236}">
-                <a16:creationId xmlns:a16="http://schemas.microsoft.com/office/drawing/2014/main" id="{4097CE65-A9B4-48CB-BB07-F90E43714AFC}"/>
+                <a16:creationId xmlns:a16="http://schemas.microsoft.com/office/drawing/2014/main" id="{76F62BA2-389B-49B4-9058-40CC0E3C8184}"/>
               </a:ext>
             </a:extLst>
           </p:cNvPr>
@@ -12232,7 +12296,7 @@
           <p:cNvPr id="2" name="">
             <a:extLst xmlns:a="http://schemas.openxmlformats.org/drawingml/2006/main">
               <a:ext uri="{FF2B5EF4-FFF2-40B4-BE49-F238E27FC236}">
-                <a16:creationId xmlns:a16="http://schemas.microsoft.com/office/drawing/2014/main" id="{29B2C75C-0F24-4C1E-AD41-C5E4385E0550}"/>
+                <a16:creationId xmlns:a16="http://schemas.microsoft.com/office/drawing/2014/main" id="{F4FA9FF2-A2B3-4A50-A050-F72F747C8646}"/>
               </a:ext>
             </a:extLst>
           </p:cNvPr>
@@ -12267,7 +12331,7 @@
           <p:cNvPr id="3" name="">
             <a:extLst xmlns:a="http://schemas.openxmlformats.org/drawingml/2006/main">
               <a:ext uri="{FF2B5EF4-FFF2-40B4-BE49-F238E27FC236}">
-                <a16:creationId xmlns:a16="http://schemas.microsoft.com/office/drawing/2014/main" id="{AB611463-C199-4D62-AAC5-6B9D0C757FD4}"/>
+                <a16:creationId xmlns:a16="http://schemas.microsoft.com/office/drawing/2014/main" id="{3B49B4C4-D5BB-4211-A6B8-B3F8ABB8646F}"/>
               </a:ext>
             </a:extLst>
           </p:cNvPr>
@@ -12331,7 +12395,7 @@
           <p:cNvPr id="4" name="">
             <a:extLst xmlns:a="http://schemas.openxmlformats.org/drawingml/2006/main">
               <a:ext uri="{FF2B5EF4-FFF2-40B4-BE49-F238E27FC236}">
-                <a16:creationId xmlns:a16="http://schemas.microsoft.com/office/drawing/2014/main" id="{2FEBC005-23E4-4689-B749-3B664776B2CD}"/>
+                <a16:creationId xmlns:a16="http://schemas.microsoft.com/office/drawing/2014/main" id="{969D8340-8D5E-4A97-8355-FB75C51809E1}"/>
               </a:ext>
             </a:extLst>
           </p:cNvPr>
@@ -12395,7 +12459,7 @@
           <p:cNvPr id="5" name="">
             <a:extLst xmlns:a="http://schemas.openxmlformats.org/drawingml/2006/main">
               <a:ext uri="{FF2B5EF4-FFF2-40B4-BE49-F238E27FC236}">
-                <a16:creationId xmlns:a16="http://schemas.microsoft.com/office/drawing/2014/main" id="{85E56F5C-8D1D-4953-A247-F4B281246BC7}"/>
+                <a16:creationId xmlns:a16="http://schemas.microsoft.com/office/drawing/2014/main" id="{42E7EE5B-C9F4-42FB-A915-A4D85AB3287A}"/>
               </a:ext>
             </a:extLst>
           </p:cNvPr>
@@ -12449,7 +12513,7 @@
                 <a:ea typeface="Aptos"/>
                 <a:cs typeface="Aptos"/>
               </a:rPr>
-              <a:t>这是后续优化最核心的链路。</a:t>
+              <a:t>这条链路决定了训练产生的新参数如何进入 rollout 生成。</a:t>
             </a:r>
           </a:p>
         </p:txBody>
@@ -12459,7 +12523,7 @@
           <p:cNvPr id="6" name="">
             <a:extLst xmlns:a="http://schemas.openxmlformats.org/drawingml/2006/main">
               <a:ext uri="{FF2B5EF4-FFF2-40B4-BE49-F238E27FC236}">
-                <a16:creationId xmlns:a16="http://schemas.microsoft.com/office/drawing/2014/main" id="{0E8D521A-FDAE-4D2C-A095-87412BFF97F7}"/>
+                <a16:creationId xmlns:a16="http://schemas.microsoft.com/office/drawing/2014/main" id="{432AC89A-E463-4D6B-B2ED-0AA91A7CE011}"/>
               </a:ext>
             </a:extLst>
           </p:cNvPr>
@@ -12492,7 +12556,7 @@
           <p:cNvPr id="7" name="">
             <a:extLst xmlns:a="http://schemas.openxmlformats.org/drawingml/2006/main">
               <a:ext uri="{FF2B5EF4-FFF2-40B4-BE49-F238E27FC236}">
-                <a16:creationId xmlns:a16="http://schemas.microsoft.com/office/drawing/2014/main" id="{01127D81-EA93-44E6-AC47-5AF794CB393C}"/>
+                <a16:creationId xmlns:a16="http://schemas.microsoft.com/office/drawing/2014/main" id="{A405DB42-9E0F-4DB0-A737-92EA9AB1E364}"/>
               </a:ext>
             </a:extLst>
           </p:cNvPr>
@@ -12556,7 +12620,7 @@
           <p:cNvPr id="8" name="">
             <a:extLst xmlns:a="http://schemas.openxmlformats.org/drawingml/2006/main">
               <a:ext uri="{FF2B5EF4-FFF2-40B4-BE49-F238E27FC236}">
-                <a16:creationId xmlns:a16="http://schemas.microsoft.com/office/drawing/2014/main" id="{2519E205-3C6C-4657-A55B-5413B1BF8B74}"/>
+                <a16:creationId xmlns:a16="http://schemas.microsoft.com/office/drawing/2014/main" id="{B57F5973-652A-4032-9809-0521626DD139}"/>
               </a:ext>
             </a:extLst>
           </p:cNvPr>
@@ -12620,7 +12684,7 @@
           <p:cNvPr id="9" name="">
             <a:extLst xmlns:a="http://schemas.openxmlformats.org/drawingml/2006/main">
               <a:ext uri="{FF2B5EF4-FFF2-40B4-BE49-F238E27FC236}">
-                <a16:creationId xmlns:a16="http://schemas.microsoft.com/office/drawing/2014/main" id="{DCB9371E-ADA9-4811-9872-D901459928AE}"/>
+                <a16:creationId xmlns:a16="http://schemas.microsoft.com/office/drawing/2014/main" id="{F8F78935-8810-485A-838E-2802D6A56550}"/>
               </a:ext>
             </a:extLst>
           </p:cNvPr>
@@ -12653,7 +12717,7 @@
           <p:cNvPr id="10" name="">
             <a:extLst xmlns:a="http://schemas.openxmlformats.org/drawingml/2006/main">
               <a:ext uri="{FF2B5EF4-FFF2-40B4-BE49-F238E27FC236}">
-                <a16:creationId xmlns:a16="http://schemas.microsoft.com/office/drawing/2014/main" id="{8D1F8526-8D9F-4E13-AF22-377DAF08C7F0}"/>
+                <a16:creationId xmlns:a16="http://schemas.microsoft.com/office/drawing/2014/main" id="{45256BF4-A865-40E7-801B-74FAB87A8F8B}"/>
               </a:ext>
             </a:extLst>
           </p:cNvPr>
@@ -12717,7 +12781,7 @@
           <p:cNvPr id="11" name="">
             <a:extLst xmlns:a="http://schemas.openxmlformats.org/drawingml/2006/main">
               <a:ext uri="{FF2B5EF4-FFF2-40B4-BE49-F238E27FC236}">
-                <a16:creationId xmlns:a16="http://schemas.microsoft.com/office/drawing/2014/main" id="{3426D468-A515-4DD8-BEAC-70996E13E187}"/>
+                <a16:creationId xmlns:a16="http://schemas.microsoft.com/office/drawing/2014/main" id="{9D5025ED-B40E-4A59-8443-B50AEF9A846C}"/>
               </a:ext>
             </a:extLst>
           </p:cNvPr>
@@ -12781,7 +12845,7 @@
           <p:cNvPr id="12" name="">
             <a:extLst xmlns:a="http://schemas.openxmlformats.org/drawingml/2006/main">
               <a:ext uri="{FF2B5EF4-FFF2-40B4-BE49-F238E27FC236}">
-                <a16:creationId xmlns:a16="http://schemas.microsoft.com/office/drawing/2014/main" id="{20EECA2B-B453-4230-B50E-B5D78B24E761}"/>
+                <a16:creationId xmlns:a16="http://schemas.microsoft.com/office/drawing/2014/main" id="{44A401DB-2751-4D26-8896-97F76728D24A}"/>
               </a:ext>
             </a:extLst>
           </p:cNvPr>
@@ -12814,7 +12878,7 @@
           <p:cNvPr id="13" name="">
             <a:extLst xmlns:a="http://schemas.openxmlformats.org/drawingml/2006/main">
               <a:ext uri="{FF2B5EF4-FFF2-40B4-BE49-F238E27FC236}">
-                <a16:creationId xmlns:a16="http://schemas.microsoft.com/office/drawing/2014/main" id="{DDF12573-51E4-4D47-8F66-1D8C41F280F2}"/>
+                <a16:creationId xmlns:a16="http://schemas.microsoft.com/office/drawing/2014/main" id="{DB9CCFE1-EAD7-4F82-AF5A-581F55041850}"/>
               </a:ext>
             </a:extLst>
           </p:cNvPr>
@@ -12878,7 +12942,7 @@
           <p:cNvPr id="14" name="">
             <a:extLst xmlns:a="http://schemas.openxmlformats.org/drawingml/2006/main">
               <a:ext uri="{FF2B5EF4-FFF2-40B4-BE49-F238E27FC236}">
-                <a16:creationId xmlns:a16="http://schemas.microsoft.com/office/drawing/2014/main" id="{2C7E8625-A100-4CFB-8EC6-DFAA8D4DB222}"/>
+                <a16:creationId xmlns:a16="http://schemas.microsoft.com/office/drawing/2014/main" id="{756055E2-75BD-4902-B424-C55FDB991010}"/>
               </a:ext>
             </a:extLst>
           </p:cNvPr>
@@ -12942,7 +13006,7 @@
           <p:cNvPr id="15" name="">
             <a:extLst xmlns:a="http://schemas.openxmlformats.org/drawingml/2006/main">
               <a:ext uri="{FF2B5EF4-FFF2-40B4-BE49-F238E27FC236}">
-                <a16:creationId xmlns:a16="http://schemas.microsoft.com/office/drawing/2014/main" id="{F4805162-8DDF-4AB4-92F3-45646A7AE30B}"/>
+                <a16:creationId xmlns:a16="http://schemas.microsoft.com/office/drawing/2014/main" id="{40839039-01B4-44F6-A264-9395D669B0D0}"/>
               </a:ext>
             </a:extLst>
           </p:cNvPr>
@@ -12975,7 +13039,7 @@
           <p:cNvPr id="16" name="">
             <a:extLst xmlns:a="http://schemas.openxmlformats.org/drawingml/2006/main">
               <a:ext uri="{FF2B5EF4-FFF2-40B4-BE49-F238E27FC236}">
-                <a16:creationId xmlns:a16="http://schemas.microsoft.com/office/drawing/2014/main" id="{A3CEAAAF-2F56-4556-8F8D-737914B986B1}"/>
+                <a16:creationId xmlns:a16="http://schemas.microsoft.com/office/drawing/2014/main" id="{0AA872FE-CF4C-4B26-8A5D-763C71DC0AB2}"/>
               </a:ext>
             </a:extLst>
           </p:cNvPr>
@@ -13039,7 +13103,7 @@
           <p:cNvPr id="17" name="">
             <a:extLst xmlns:a="http://schemas.openxmlformats.org/drawingml/2006/main">
               <a:ext uri="{FF2B5EF4-FFF2-40B4-BE49-F238E27FC236}">
-                <a16:creationId xmlns:a16="http://schemas.microsoft.com/office/drawing/2014/main" id="{CE59916C-D9B8-43A9-B109-F80ACF56B64B}"/>
+                <a16:creationId xmlns:a16="http://schemas.microsoft.com/office/drawing/2014/main" id="{FF8F8121-BF0F-444F-BA66-5876688FC65F}"/>
               </a:ext>
             </a:extLst>
           </p:cNvPr>
@@ -13103,7 +13167,7 @@
           <p:cNvPr id="18" name="">
             <a:extLst xmlns:a="http://schemas.openxmlformats.org/drawingml/2006/main">
               <a:ext uri="{FF2B5EF4-FFF2-40B4-BE49-F238E27FC236}">
-                <a16:creationId xmlns:a16="http://schemas.microsoft.com/office/drawing/2014/main" id="{E5B17765-8596-422B-A779-09E4E041C9C6}"/>
+                <a16:creationId xmlns:a16="http://schemas.microsoft.com/office/drawing/2014/main" id="{D5DCE935-50A3-45C9-8096-DEF28D9AC2C7}"/>
               </a:ext>
             </a:extLst>
           </p:cNvPr>
@@ -13138,7 +13202,7 @@
           <p:cNvPr id="19" name="">
             <a:extLst xmlns:a="http://schemas.openxmlformats.org/drawingml/2006/main">
               <a:ext uri="{FF2B5EF4-FFF2-40B4-BE49-F238E27FC236}">
-                <a16:creationId xmlns:a16="http://schemas.microsoft.com/office/drawing/2014/main" id="{BA4D5718-E802-40D5-8E9B-0E1961F0C203}"/>
+                <a16:creationId xmlns:a16="http://schemas.microsoft.com/office/drawing/2014/main" id="{F6CE4C0F-B2A1-457B-9C0C-6A0989FE0895}"/>
               </a:ext>
             </a:extLst>
           </p:cNvPr>
@@ -13202,7 +13266,7 @@
           <p:cNvPr id="20" name="">
             <a:extLst xmlns:a="http://schemas.openxmlformats.org/drawingml/2006/main">
               <a:ext uri="{FF2B5EF4-FFF2-40B4-BE49-F238E27FC236}">
-                <a16:creationId xmlns:a16="http://schemas.microsoft.com/office/drawing/2014/main" id="{4734C362-E571-4D05-964C-18AB490572F0}"/>
+                <a16:creationId xmlns:a16="http://schemas.microsoft.com/office/drawing/2014/main" id="{966D627B-8385-4AA9-9F38-95C0E36052D2}"/>
               </a:ext>
             </a:extLst>
           </p:cNvPr>
@@ -13237,7 +13301,7 @@
           <p:cNvPr id="21" name="">
             <a:extLst xmlns:a="http://schemas.openxmlformats.org/drawingml/2006/main">
               <a:ext uri="{FF2B5EF4-FFF2-40B4-BE49-F238E27FC236}">
-                <a16:creationId xmlns:a16="http://schemas.microsoft.com/office/drawing/2014/main" id="{5887F9D5-F0F9-4643-8E86-6A557D4FE964}"/>
+                <a16:creationId xmlns:a16="http://schemas.microsoft.com/office/drawing/2014/main" id="{7D552680-BF54-48F9-A8F0-DB2C4C2491C7}"/>
               </a:ext>
             </a:extLst>
           </p:cNvPr>
@@ -13301,7 +13365,7 @@
           <p:cNvPr id="22" name="">
             <a:extLst xmlns:a="http://schemas.openxmlformats.org/drawingml/2006/main">
               <a:ext uri="{FF2B5EF4-FFF2-40B4-BE49-F238E27FC236}">
-                <a16:creationId xmlns:a16="http://schemas.microsoft.com/office/drawing/2014/main" id="{995028EC-3A19-4CF9-A7ED-D00AA40F5B9E}"/>
+                <a16:creationId xmlns:a16="http://schemas.microsoft.com/office/drawing/2014/main" id="{D0EF4C2D-F7AB-480E-8A6B-132226BE3BE3}"/>
               </a:ext>
             </a:extLst>
           </p:cNvPr>
@@ -13336,7 +13400,7 @@
           <p:cNvPr id="23" name="">
             <a:extLst xmlns:a="http://schemas.openxmlformats.org/drawingml/2006/main">
               <a:ext uri="{FF2B5EF4-FFF2-40B4-BE49-F238E27FC236}">
-                <a16:creationId xmlns:a16="http://schemas.microsoft.com/office/drawing/2014/main" id="{B5FFEB6D-2DAD-4973-AE16-0D9CFAAF1C86}"/>
+                <a16:creationId xmlns:a16="http://schemas.microsoft.com/office/drawing/2014/main" id="{D88D96FB-585B-419B-BF07-F85AABD017BB}"/>
               </a:ext>
             </a:extLst>
           </p:cNvPr>
@@ -13400,7 +13464,7 @@
           <p:cNvPr id="24" name="">
             <a:extLst xmlns:a="http://schemas.openxmlformats.org/drawingml/2006/main">
               <a:ext uri="{FF2B5EF4-FFF2-40B4-BE49-F238E27FC236}">
-                <a16:creationId xmlns:a16="http://schemas.microsoft.com/office/drawing/2014/main" id="{141A2B92-6A0E-41B9-8C0E-AF04E046137B}"/>
+                <a16:creationId xmlns:a16="http://schemas.microsoft.com/office/drawing/2014/main" id="{80DD67B1-74DC-4C5E-9ED4-CCC7E196FD28}"/>
               </a:ext>
             </a:extLst>
           </p:cNvPr>
@@ -13433,7 +13497,7 @@
           <p:cNvPr id="25" name="">
             <a:extLst xmlns:a="http://schemas.openxmlformats.org/drawingml/2006/main">
               <a:ext uri="{FF2B5EF4-FFF2-40B4-BE49-F238E27FC236}">
-                <a16:creationId xmlns:a16="http://schemas.microsoft.com/office/drawing/2014/main" id="{FB56FEF0-929A-4A32-AC46-A2EEFF1EF2B6}"/>
+                <a16:creationId xmlns:a16="http://schemas.microsoft.com/office/drawing/2014/main" id="{651F0B5B-184D-4158-8A4B-1B5903F29528}"/>
               </a:ext>
             </a:extLst>
           </p:cNvPr>
@@ -13497,7 +13561,7 @@
           <p:cNvPr id="26" name="">
             <a:extLst xmlns:a="http://schemas.openxmlformats.org/drawingml/2006/main">
               <a:ext uri="{FF2B5EF4-FFF2-40B4-BE49-F238E27FC236}">
-                <a16:creationId xmlns:a16="http://schemas.microsoft.com/office/drawing/2014/main" id="{E1CA5DA5-445D-4CDA-8B7B-D2652D63891D}"/>
+                <a16:creationId xmlns:a16="http://schemas.microsoft.com/office/drawing/2014/main" id="{BB209285-14D3-494C-8F69-7AC829EC4491}"/>
               </a:ext>
             </a:extLst>
           </p:cNvPr>
@@ -13561,7 +13625,7 @@
           <p:cNvPr id="27" name="">
             <a:extLst xmlns:a="http://schemas.openxmlformats.org/drawingml/2006/main">
               <a:ext uri="{FF2B5EF4-FFF2-40B4-BE49-F238E27FC236}">
-                <a16:creationId xmlns:a16="http://schemas.microsoft.com/office/drawing/2014/main" id="{CF1A4A65-7EFB-4571-B0C7-59850EE79AA9}"/>
+                <a16:creationId xmlns:a16="http://schemas.microsoft.com/office/drawing/2014/main" id="{49E3D708-4FD6-4124-B765-5462965FF09E}"/>
               </a:ext>
             </a:extLst>
           </p:cNvPr>
@@ -13615,7 +13679,7 @@
                 <a:ea typeface="Aptos"/>
                 <a:cs typeface="Aptos"/>
               </a:rPr>
-              <a:t>安全，但同步期间 rollout 会出现明显停顿；后续优化会围绕这条链路展开。</a:t>
+              <a:t>这条链路保证权重一致性；同步期间 rollout 通常会暂停，完成更新后再恢复生成。</a:t>
             </a:r>
           </a:p>
         </p:txBody>
@@ -13625,7 +13689,7 @@
           <p:cNvPr id="28" name="">
             <a:extLst xmlns:a="http://schemas.openxmlformats.org/drawingml/2006/main">
               <a:ext uri="{FF2B5EF4-FFF2-40B4-BE49-F238E27FC236}">
-                <a16:creationId xmlns:a16="http://schemas.microsoft.com/office/drawing/2014/main" id="{50AFE935-8DE2-4C97-8FD7-7ACC6E72DE84}"/>
+                <a16:creationId xmlns:a16="http://schemas.microsoft.com/office/drawing/2014/main" id="{67DAC02B-449C-4B0C-9C5C-6537255E51E3}"/>
               </a:ext>
             </a:extLst>
           </p:cNvPr>
@@ -13660,7 +13724,7 @@
           <p:cNvPr id="29" name="">
             <a:extLst xmlns:a="http://schemas.openxmlformats.org/drawingml/2006/main">
               <a:ext uri="{FF2B5EF4-FFF2-40B4-BE49-F238E27FC236}">
-                <a16:creationId xmlns:a16="http://schemas.microsoft.com/office/drawing/2014/main" id="{5314AA66-13B3-4873-8F43-5182CD3D002A}"/>
+                <a16:creationId xmlns:a16="http://schemas.microsoft.com/office/drawing/2014/main" id="{8F972507-7BE2-4E80-B335-A71D9BF651CC}"/>
               </a:ext>
             </a:extLst>
           </p:cNvPr>
@@ -13724,7 +13788,7 @@
           <p:cNvPr id="30" name="">
             <a:extLst xmlns:a="http://schemas.openxmlformats.org/drawingml/2006/main">
               <a:ext uri="{FF2B5EF4-FFF2-40B4-BE49-F238E27FC236}">
-                <a16:creationId xmlns:a16="http://schemas.microsoft.com/office/drawing/2014/main" id="{225EB07D-09D6-40FA-9FAA-A5AAD21DE92A}"/>
+                <a16:creationId xmlns:a16="http://schemas.microsoft.com/office/drawing/2014/main" id="{F8BA00D5-93FD-4728-8B75-A34D0EBBD1AB}"/>
               </a:ext>
             </a:extLst>
           </p:cNvPr>
@@ -13786,7 +13850,7 @@
     </p:spTree>
     <p:extLst>
       <p:ext uri="{BB962C8B-B14F-4D97-AF65-F5344CB8AC3E}">
-        <p14:creationId xmlns:p14="http://schemas.microsoft.com/office/powerpoint/2010/main" val="762471283"/>
+        <p14:creationId xmlns:p14="http://schemas.microsoft.com/office/powerpoint/2010/main" val="1491840562"/>
       </p:ext>
     </p:extLst>
   </p:cSld>
@@ -13810,7 +13874,7 @@
           <p:cNvPr id="1" name="">
             <a:extLst xmlns:a="http://schemas.openxmlformats.org/drawingml/2006/main">
               <a:ext uri="{FF2B5EF4-FFF2-40B4-BE49-F238E27FC236}">
-                <a16:creationId xmlns:a16="http://schemas.microsoft.com/office/drawing/2014/main" id="{75B2FB7F-B939-4B10-B3DE-45CC526D4DC2}"/>
+                <a16:creationId xmlns:a16="http://schemas.microsoft.com/office/drawing/2014/main" id="{15792BFF-9905-450B-A6AD-5331ECC34E1B}"/>
               </a:ext>
             </a:extLst>
           </p:cNvPr>
@@ -13845,7 +13909,7 @@
           <p:cNvPr id="2" name="">
             <a:extLst xmlns:a="http://schemas.openxmlformats.org/drawingml/2006/main">
               <a:ext uri="{FF2B5EF4-FFF2-40B4-BE49-F238E27FC236}">
-                <a16:creationId xmlns:a16="http://schemas.microsoft.com/office/drawing/2014/main" id="{F6549059-4A19-47E5-BF6A-A433BF6569F3}"/>
+                <a16:creationId xmlns:a16="http://schemas.microsoft.com/office/drawing/2014/main" id="{69FB93B9-C3E8-4939-9102-9DFED7527B33}"/>
               </a:ext>
             </a:extLst>
           </p:cNvPr>
@@ -13880,7 +13944,7 @@
           <p:cNvPr id="3" name="">
             <a:extLst xmlns:a="http://schemas.openxmlformats.org/drawingml/2006/main">
               <a:ext uri="{FF2B5EF4-FFF2-40B4-BE49-F238E27FC236}">
-                <a16:creationId xmlns:a16="http://schemas.microsoft.com/office/drawing/2014/main" id="{95E5C800-E17A-4ABA-9C91-2AEDABEEC865}"/>
+                <a16:creationId xmlns:a16="http://schemas.microsoft.com/office/drawing/2014/main" id="{DDA88706-DE94-478B-8CAD-5950ABB2CD25}"/>
               </a:ext>
             </a:extLst>
           </p:cNvPr>
@@ -13934,7 +13998,7 @@
                 <a:ea typeface="Aptos"/>
                 <a:cs typeface="Aptos"/>
               </a:rPr>
-              <a:t>WHY INFERENCE OPTIMIZATION</a:t>
+              <a:t>SYSTEM PRESSURE POINTS</a:t>
             </a:r>
           </a:p>
         </p:txBody>
@@ -13944,19 +14008,19 @@
           <p:cNvPr id="4" name="">
             <a:extLst xmlns:a="http://schemas.openxmlformats.org/drawingml/2006/main">
               <a:ext uri="{FF2B5EF4-FFF2-40B4-BE49-F238E27FC236}">
-                <a16:creationId xmlns:a16="http://schemas.microsoft.com/office/drawing/2014/main" id="{DF2306C7-C622-44CF-ACAC-468DC4438DC8}"/>
-              </a:ext>
-            </a:extLst>
-          </p:cNvPr>
-          <p:cNvSpPr>
-            <a:spLocks xmlns:a="http://schemas.openxmlformats.org/drawingml/2006/main" noGrp="1"/>
-          </p:cNvSpPr>
-          <p:nvPr/>
-        </p:nvSpPr>
-        <p:spPr>
-          <a:xfrm xmlns:a="http://schemas.openxmlformats.org/drawingml/2006/main">
-            <a:off x="552450" y="781050"/>
-            <a:ext cx="8953500" cy="857250"/>
+                <a16:creationId xmlns:a16="http://schemas.microsoft.com/office/drawing/2014/main" id="{8ECCB9E4-36D0-433E-8CD2-1F9F079C9037}"/>
+              </a:ext>
+            </a:extLst>
+          </p:cNvPr>
+          <p:cNvSpPr>
+            <a:spLocks xmlns:a="http://schemas.openxmlformats.org/drawingml/2006/main" noGrp="1"/>
+          </p:cNvSpPr>
+          <p:nvPr/>
+        </p:nvSpPr>
+        <p:spPr>
+          <a:xfrm xmlns:a="http://schemas.openxmlformats.org/drawingml/2006/main">
+            <a:off x="552450" y="895350"/>
+            <a:ext cx="8763000" cy="514350"/>
           </a:xfrm>
           <a:prstGeom xmlns:a="http://schemas.openxmlformats.org/drawingml/2006/main" prst="rect">
             <a:avLst/>
@@ -13998,7 +14062,7 @@
                 <a:ea typeface="Aptos Display"/>
                 <a:cs typeface="Aptos Display"/>
               </a:rPr>
-              <a:t>RL 训练的端到端效率经常卡在推理侧系统链路，而不是单个算子。</a:t>
+              <a:t>Ascend verl 的系统压力来自四条链路。</a:t>
             </a:r>
           </a:p>
         </p:txBody>
@@ -14008,19 +14072,19 @@
           <p:cNvPr id="5" name="">
             <a:extLst xmlns:a="http://schemas.openxmlformats.org/drawingml/2006/main">
               <a:ext uri="{FF2B5EF4-FFF2-40B4-BE49-F238E27FC236}">
-                <a16:creationId xmlns:a16="http://schemas.microsoft.com/office/drawing/2014/main" id="{65BA9B4F-C806-498B-B650-864F246E4894}"/>
-              </a:ext>
-            </a:extLst>
-          </p:cNvPr>
-          <p:cNvSpPr>
-            <a:spLocks xmlns:a="http://schemas.openxmlformats.org/drawingml/2006/main" noGrp="1"/>
-          </p:cNvSpPr>
-          <p:nvPr/>
-        </p:nvSpPr>
-        <p:spPr>
-          <a:xfrm xmlns:a="http://schemas.openxmlformats.org/drawingml/2006/main">
-            <a:off x="552450" y="1619250"/>
-            <a:ext cx="8001000" cy="419100"/>
+                <a16:creationId xmlns:a16="http://schemas.microsoft.com/office/drawing/2014/main" id="{46DE33DC-0349-4554-A8F3-7E58470A0704}"/>
+              </a:ext>
+            </a:extLst>
+          </p:cNvPr>
+          <p:cNvSpPr>
+            <a:spLocks xmlns:a="http://schemas.openxmlformats.org/drawingml/2006/main" noGrp="1"/>
+          </p:cNvSpPr>
+          <p:nvPr/>
+        </p:nvSpPr>
+        <p:spPr>
+          <a:xfrm xmlns:a="http://schemas.openxmlformats.org/drawingml/2006/main">
+            <a:off x="552450" y="1581150"/>
+            <a:ext cx="7810500" cy="304800"/>
           </a:xfrm>
           <a:prstGeom xmlns:a="http://schemas.openxmlformats.org/drawingml/2006/main" prst="rect">
             <a:avLst/>
@@ -14062,7 +14126,7 @@
                 <a:ea typeface="Aptos"/>
                 <a:cs typeface="Aptos"/>
               </a:rPr>
-              <a:t>我们需要看整个 rollout、同步、数据回传的闭环。</a:t>
+              <a:t>理解 Ascend verl，要看 rollout、同步、数据回传和调度控制的闭环。</a:t>
             </a:r>
           </a:p>
         </p:txBody>
@@ -14072,7 +14136,7 @@
           <p:cNvPr id="6" name="">
             <a:extLst xmlns:a="http://schemas.openxmlformats.org/drawingml/2006/main">
               <a:ext uri="{FF2B5EF4-FFF2-40B4-BE49-F238E27FC236}">
-                <a16:creationId xmlns:a16="http://schemas.microsoft.com/office/drawing/2014/main" id="{7158DE50-B86E-487C-AC0D-2C708242AB47}"/>
+                <a16:creationId xmlns:a16="http://schemas.microsoft.com/office/drawing/2014/main" id="{8B1A1FDA-9BA5-4606-B8C8-1D8D4A853B6D}"/>
               </a:ext>
             </a:extLst>
           </p:cNvPr>
@@ -14105,7 +14169,7 @@
           <p:cNvPr id="7" name="">
             <a:extLst xmlns:a="http://schemas.openxmlformats.org/drawingml/2006/main">
               <a:ext uri="{FF2B5EF4-FFF2-40B4-BE49-F238E27FC236}">
-                <a16:creationId xmlns:a16="http://schemas.microsoft.com/office/drawing/2014/main" id="{C6F23138-54A9-46A3-82A6-BC9DCCC9312E}"/>
+                <a16:creationId xmlns:a16="http://schemas.microsoft.com/office/drawing/2014/main" id="{B9FCFEAD-4D75-417E-B093-54E6FA23BD7F}"/>
               </a:ext>
             </a:extLst>
           </p:cNvPr>
@@ -14169,7 +14233,7 @@
           <p:cNvPr id="8" name="">
             <a:extLst xmlns:a="http://schemas.openxmlformats.org/drawingml/2006/main">
               <a:ext uri="{FF2B5EF4-FFF2-40B4-BE49-F238E27FC236}">
-                <a16:creationId xmlns:a16="http://schemas.microsoft.com/office/drawing/2014/main" id="{2F3E7F75-DCE8-4551-83ED-693A0EAE8CD4}"/>
+                <a16:creationId xmlns:a16="http://schemas.microsoft.com/office/drawing/2014/main" id="{414068AB-2126-4015-9593-2825A3A10D75}"/>
               </a:ext>
             </a:extLst>
           </p:cNvPr>
@@ -14233,7 +14297,7 @@
           <p:cNvPr id="9" name="">
             <a:extLst xmlns:a="http://schemas.openxmlformats.org/drawingml/2006/main">
               <a:ext uri="{FF2B5EF4-FFF2-40B4-BE49-F238E27FC236}">
-                <a16:creationId xmlns:a16="http://schemas.microsoft.com/office/drawing/2014/main" id="{48536A58-3BFC-4014-A154-01BFF12318CA}"/>
+                <a16:creationId xmlns:a16="http://schemas.microsoft.com/office/drawing/2014/main" id="{EF9F7832-26DC-4888-8CAB-89586F8EC9EF}"/>
               </a:ext>
             </a:extLst>
           </p:cNvPr>
@@ -14266,7 +14330,7 @@
           <p:cNvPr id="10" name="">
             <a:extLst xmlns:a="http://schemas.openxmlformats.org/drawingml/2006/main">
               <a:ext uri="{FF2B5EF4-FFF2-40B4-BE49-F238E27FC236}">
-                <a16:creationId xmlns:a16="http://schemas.microsoft.com/office/drawing/2014/main" id="{AD185639-8378-4BEE-A7BA-08439D5D4F56}"/>
+                <a16:creationId xmlns:a16="http://schemas.microsoft.com/office/drawing/2014/main" id="{847650D6-8ED7-4234-9543-ACFCA95130EC}"/>
               </a:ext>
             </a:extLst>
           </p:cNvPr>
@@ -14330,7 +14394,7 @@
           <p:cNvPr id="11" name="">
             <a:extLst xmlns:a="http://schemas.openxmlformats.org/drawingml/2006/main">
               <a:ext uri="{FF2B5EF4-FFF2-40B4-BE49-F238E27FC236}">
-                <a16:creationId xmlns:a16="http://schemas.microsoft.com/office/drawing/2014/main" id="{E14607DB-C7C2-4950-B5C7-F7D1A95C1F57}"/>
+                <a16:creationId xmlns:a16="http://schemas.microsoft.com/office/drawing/2014/main" id="{071F1958-7C4D-4F16-8FA2-DE4274A5F263}"/>
               </a:ext>
             </a:extLst>
           </p:cNvPr>
@@ -14394,7 +14458,7 @@
           <p:cNvPr id="12" name="">
             <a:extLst xmlns:a="http://schemas.openxmlformats.org/drawingml/2006/main">
               <a:ext uri="{FF2B5EF4-FFF2-40B4-BE49-F238E27FC236}">
-                <a16:creationId xmlns:a16="http://schemas.microsoft.com/office/drawing/2014/main" id="{B78115E2-7938-4A7B-9081-5BFCC08D872F}"/>
+                <a16:creationId xmlns:a16="http://schemas.microsoft.com/office/drawing/2014/main" id="{6F6AE52E-7587-413C-BB94-30100402C9D7}"/>
               </a:ext>
             </a:extLst>
           </p:cNvPr>
@@ -14427,7 +14491,7 @@
           <p:cNvPr id="13" name="">
             <a:extLst xmlns:a="http://schemas.openxmlformats.org/drawingml/2006/main">
               <a:ext uri="{FF2B5EF4-FFF2-40B4-BE49-F238E27FC236}">
-                <a16:creationId xmlns:a16="http://schemas.microsoft.com/office/drawing/2014/main" id="{24F956B6-BE80-48B9-83ED-74CA4F7FF742}"/>
+                <a16:creationId xmlns:a16="http://schemas.microsoft.com/office/drawing/2014/main" id="{2BFABC72-9CF9-43C5-BFFA-C28CCB209BB7}"/>
               </a:ext>
             </a:extLst>
           </p:cNvPr>
@@ -14491,7 +14555,7 @@
           <p:cNvPr id="14" name="">
             <a:extLst xmlns:a="http://schemas.openxmlformats.org/drawingml/2006/main">
               <a:ext uri="{FF2B5EF4-FFF2-40B4-BE49-F238E27FC236}">
-                <a16:creationId xmlns:a16="http://schemas.microsoft.com/office/drawing/2014/main" id="{B6D42E09-7F5E-4CB3-B1CF-AC307B0713B9}"/>
+                <a16:creationId xmlns:a16="http://schemas.microsoft.com/office/drawing/2014/main" id="{FEE38B46-4DA4-47A8-8E61-4AFEC497E02B}"/>
               </a:ext>
             </a:extLst>
           </p:cNvPr>
@@ -14555,7 +14619,7 @@
           <p:cNvPr id="15" name="">
             <a:extLst xmlns:a="http://schemas.openxmlformats.org/drawingml/2006/main">
               <a:ext uri="{FF2B5EF4-FFF2-40B4-BE49-F238E27FC236}">
-                <a16:creationId xmlns:a16="http://schemas.microsoft.com/office/drawing/2014/main" id="{0081DBB8-F3A4-4E13-8464-B0FEC99C35EE}"/>
+                <a16:creationId xmlns:a16="http://schemas.microsoft.com/office/drawing/2014/main" id="{73047BDF-4756-40AD-9ED8-0776EAED3619}"/>
               </a:ext>
             </a:extLst>
           </p:cNvPr>
@@ -14588,7 +14652,7 @@
           <p:cNvPr id="16" name="">
             <a:extLst xmlns:a="http://schemas.openxmlformats.org/drawingml/2006/main">
               <a:ext uri="{FF2B5EF4-FFF2-40B4-BE49-F238E27FC236}">
-                <a16:creationId xmlns:a16="http://schemas.microsoft.com/office/drawing/2014/main" id="{8282DEB9-3AD6-460C-910A-C1BC10CD4462}"/>
+                <a16:creationId xmlns:a16="http://schemas.microsoft.com/office/drawing/2014/main" id="{D3B0D401-A41C-4B4F-B053-235E2E6813B2}"/>
               </a:ext>
             </a:extLst>
           </p:cNvPr>
@@ -14652,7 +14716,7 @@
           <p:cNvPr id="17" name="">
             <a:extLst xmlns:a="http://schemas.openxmlformats.org/drawingml/2006/main">
               <a:ext uri="{FF2B5EF4-FFF2-40B4-BE49-F238E27FC236}">
-                <a16:creationId xmlns:a16="http://schemas.microsoft.com/office/drawing/2014/main" id="{7EA2AB13-98D5-4557-B3F7-6589068A1669}"/>
+                <a16:creationId xmlns:a16="http://schemas.microsoft.com/office/drawing/2014/main" id="{84114F36-086D-4994-AC28-FC960953C741}"/>
               </a:ext>
             </a:extLst>
           </p:cNvPr>
@@ -14716,7 +14780,7 @@
           <p:cNvPr id="18" name="">
             <a:extLst xmlns:a="http://schemas.openxmlformats.org/drawingml/2006/main">
               <a:ext uri="{FF2B5EF4-FFF2-40B4-BE49-F238E27FC236}">
-                <a16:creationId xmlns:a16="http://schemas.microsoft.com/office/drawing/2014/main" id="{8934A2CB-5694-43C8-B9AD-D22EB2541B8D}"/>
+                <a16:creationId xmlns:a16="http://schemas.microsoft.com/office/drawing/2014/main" id="{2C978D84-9625-4482-A06C-C2DC263C520D}"/>
               </a:ext>
             </a:extLst>
           </p:cNvPr>
@@ -14749,7 +14813,7 @@
           <p:cNvPr id="19" name="">
             <a:extLst xmlns:a="http://schemas.openxmlformats.org/drawingml/2006/main">
               <a:ext uri="{FF2B5EF4-FFF2-40B4-BE49-F238E27FC236}">
-                <a16:creationId xmlns:a16="http://schemas.microsoft.com/office/drawing/2014/main" id="{ADBA7C15-AA24-49DF-A367-A872D6095A60}"/>
+                <a16:creationId xmlns:a16="http://schemas.microsoft.com/office/drawing/2014/main" id="{49B709F6-BF2A-4F6A-9689-6A1A3A19F865}"/>
               </a:ext>
             </a:extLst>
           </p:cNvPr>
@@ -14803,7 +14867,7 @@
                 <a:ea typeface="Aptos"/>
                 <a:cs typeface="Aptos"/>
               </a:rPr>
-              <a:t>推理性能团队的切入点：减少阻塞、减少复制、减少序列化、减少单点调度压力。</a:t>
+              <a:t>这四类压力共同决定 Ascend verl 的 step time、资源利用率和大规模稳定性。</a:t>
             </a:r>
           </a:p>
         </p:txBody>
@@ -14813,7 +14877,7 @@
           <p:cNvPr id="20" name="">
             <a:extLst xmlns:a="http://schemas.openxmlformats.org/drawingml/2006/main">
               <a:ext uri="{FF2B5EF4-FFF2-40B4-BE49-F238E27FC236}">
-                <a16:creationId xmlns:a16="http://schemas.microsoft.com/office/drawing/2014/main" id="{2D4A54CC-AEBD-4564-A19E-D2B0A93F4710}"/>
+                <a16:creationId xmlns:a16="http://schemas.microsoft.com/office/drawing/2014/main" id="{E338B35B-77E8-47AB-9A74-94CB10889ACF}"/>
               </a:ext>
             </a:extLst>
           </p:cNvPr>
@@ -14848,7 +14912,7 @@
           <p:cNvPr id="21" name="">
             <a:extLst xmlns:a="http://schemas.openxmlformats.org/drawingml/2006/main">
               <a:ext uri="{FF2B5EF4-FFF2-40B4-BE49-F238E27FC236}">
-                <a16:creationId xmlns:a16="http://schemas.microsoft.com/office/drawing/2014/main" id="{C1E4A6A6-252D-490F-B872-662B5D4C1D13}"/>
+                <a16:creationId xmlns:a16="http://schemas.microsoft.com/office/drawing/2014/main" id="{8F9A942D-6085-4CAC-90B6-09D9B5B13209}"/>
               </a:ext>
             </a:extLst>
           </p:cNvPr>
@@ -14912,7 +14976,7 @@
           <p:cNvPr id="22" name="">
             <a:extLst xmlns:a="http://schemas.openxmlformats.org/drawingml/2006/main">
               <a:ext uri="{FF2B5EF4-FFF2-40B4-BE49-F238E27FC236}">
-                <a16:creationId xmlns:a16="http://schemas.microsoft.com/office/drawing/2014/main" id="{70F0475F-9DA4-437C-A928-797E2FF7C556}"/>
+                <a16:creationId xmlns:a16="http://schemas.microsoft.com/office/drawing/2014/main" id="{30BE584A-D917-4743-A6ED-E5CB96CCFE2D}"/>
               </a:ext>
             </a:extLst>
           </p:cNvPr>
@@ -14974,7 +15038,7 @@
     </p:spTree>
     <p:extLst>
       <p:ext uri="{BB962C8B-B14F-4D97-AF65-F5344CB8AC3E}">
-        <p14:creationId xmlns:p14="http://schemas.microsoft.com/office/powerpoint/2010/main" val="1392187304"/>
+        <p14:creationId xmlns:p14="http://schemas.microsoft.com/office/powerpoint/2010/main" val="669917577"/>
       </p:ext>
     </p:extLst>
   </p:cSld>
@@ -14998,7 +15062,7 @@
           <p:cNvPr id="1" name="">
             <a:extLst xmlns:a="http://schemas.openxmlformats.org/drawingml/2006/main">
               <a:ext uri="{FF2B5EF4-FFF2-40B4-BE49-F238E27FC236}">
-                <a16:creationId xmlns:a16="http://schemas.microsoft.com/office/drawing/2014/main" id="{134E5422-2AE0-4343-8EB6-14E234E044E1}"/>
+                <a16:creationId xmlns:a16="http://schemas.microsoft.com/office/drawing/2014/main" id="{1C0676F9-9AA6-4164-A10B-828DFD24CEBC}"/>
               </a:ext>
             </a:extLst>
           </p:cNvPr>
@@ -15033,7 +15097,7 @@
           <p:cNvPr id="2" name="">
             <a:extLst xmlns:a="http://schemas.openxmlformats.org/drawingml/2006/main">
               <a:ext uri="{FF2B5EF4-FFF2-40B4-BE49-F238E27FC236}">
-                <a16:creationId xmlns:a16="http://schemas.microsoft.com/office/drawing/2014/main" id="{1F0ADDDB-A16C-4665-9F97-4BED2B91CD8D}"/>
+                <a16:creationId xmlns:a16="http://schemas.microsoft.com/office/drawing/2014/main" id="{DC812FDC-184D-4032-84D7-ADD981CD6129}"/>
               </a:ext>
             </a:extLst>
           </p:cNvPr>
@@ -15068,7 +15132,7 @@
           <p:cNvPr id="3" name="">
             <a:extLst xmlns:a="http://schemas.openxmlformats.org/drawingml/2006/main">
               <a:ext uri="{FF2B5EF4-FFF2-40B4-BE49-F238E27FC236}">
-                <a16:creationId xmlns:a16="http://schemas.microsoft.com/office/drawing/2014/main" id="{2E8A6E88-01AC-4CB1-84A4-CD4412D54B76}"/>
+                <a16:creationId xmlns:a16="http://schemas.microsoft.com/office/drawing/2014/main" id="{8B831E74-2CBB-43B9-B313-9D9154979B25}"/>
               </a:ext>
             </a:extLst>
           </p:cNvPr>
@@ -15122,7 +15186,7 @@
                 <a:ea typeface="Aptos"/>
                 <a:cs typeface="Aptos"/>
               </a:rPr>
-              <a:t>BRIDGE TO THE DESIGN</a:t>
+              <a:t>SYSTEM RECAP</a:t>
             </a:r>
           </a:p>
         </p:txBody>
@@ -15132,7 +15196,7 @@
           <p:cNvPr id="4" name="">
             <a:extLst xmlns:a="http://schemas.openxmlformats.org/drawingml/2006/main">
               <a:ext uri="{FF2B5EF4-FFF2-40B4-BE49-F238E27FC236}">
-                <a16:creationId xmlns:a16="http://schemas.microsoft.com/office/drawing/2014/main" id="{E335D8A8-B6F2-4BDC-A7C6-7CBB8DF30977}"/>
+                <a16:creationId xmlns:a16="http://schemas.microsoft.com/office/drawing/2014/main" id="{29D3AB03-FEEC-437E-AC99-A5AB4CE7B7BE}"/>
               </a:ext>
             </a:extLst>
           </p:cNvPr>
@@ -15186,7 +15250,7 @@
                 <a:ea typeface="Aptos Display"/>
                 <a:cs typeface="Aptos Display"/>
               </a:rPr>
-              <a:t>后面的优化设计围绕这条闭环展开。</a:t>
+              <a:t>Ascend verl 的主线是一条训练-推理-反馈闭环。</a:t>
             </a:r>
           </a:p>
         </p:txBody>
@@ -15196,7 +15260,7 @@
           <p:cNvPr id="5" name="">
             <a:extLst xmlns:a="http://schemas.openxmlformats.org/drawingml/2006/main">
               <a:ext uri="{FF2B5EF4-FFF2-40B4-BE49-F238E27FC236}">
-                <a16:creationId xmlns:a16="http://schemas.microsoft.com/office/drawing/2014/main" id="{6B407037-FE1F-4402-8527-06EEEE00587F}"/>
+                <a16:creationId xmlns:a16="http://schemas.microsoft.com/office/drawing/2014/main" id="{99860EEB-6DC7-4833-8231-367250379424}"/>
               </a:ext>
             </a:extLst>
           </p:cNvPr>
@@ -15260,7 +15324,7 @@
           <p:cNvPr id="6" name="">
             <a:extLst xmlns:a="http://schemas.openxmlformats.org/drawingml/2006/main">
               <a:ext uri="{FF2B5EF4-FFF2-40B4-BE49-F238E27FC236}">
-                <a16:creationId xmlns:a16="http://schemas.microsoft.com/office/drawing/2014/main" id="{556280B0-C5FE-4F29-97A4-FC036D7752A4}"/>
+                <a16:creationId xmlns:a16="http://schemas.microsoft.com/office/drawing/2014/main" id="{CE0FEB29-5330-44B7-9D95-41763CDC56FD}"/>
               </a:ext>
             </a:extLst>
           </p:cNvPr>
@@ -15293,7 +15357,7 @@
           <p:cNvPr id="7" name="">
             <a:extLst xmlns:a="http://schemas.openxmlformats.org/drawingml/2006/main">
               <a:ext uri="{FF2B5EF4-FFF2-40B4-BE49-F238E27FC236}">
-                <a16:creationId xmlns:a16="http://schemas.microsoft.com/office/drawing/2014/main" id="{B3761672-3DD3-4E52-B91A-7BAE1ECE4028}"/>
+                <a16:creationId xmlns:a16="http://schemas.microsoft.com/office/drawing/2014/main" id="{2B0A9D91-AEF3-4049-AF08-673ECDB5846A}"/>
               </a:ext>
             </a:extLst>
           </p:cNvPr>
@@ -15329,7 +15393,7 @@
           <a:lstStyle xmlns:a="http://schemas.openxmlformats.org/drawingml/2006/main"/>
           <a:p xmlns:a="http://schemas.openxmlformats.org/drawingml/2006/main">
             <a:pPr algn="ctr">
-              <a:defRPr sz="1650" b="1">
+              <a:defRPr sz="1800" b="1">
                 <a:solidFill>
                   <a:srgbClr val="0B4D4A"/>
                 </a:solidFill>
@@ -15339,7 +15403,7 @@
               </a:defRPr>
             </a:pPr>
             <a:r>
-              <a:rPr sz="1650" b="1">
+              <a:rPr sz="1800" b="1">
                 <a:solidFill>
                   <a:srgbClr val="0B4D4A"/>
                 </a:solidFill>
@@ -15347,7 +15411,7 @@
                 <a:ea typeface="Aptos"/>
                 <a:cs typeface="Aptos"/>
               </a:rPr>
-              <a:t>Optimization focus</a:t>
+              <a:t>Ascend verl</a:t>
             </a:r>
           </a:p>
         </p:txBody>
@@ -15357,7 +15421,7 @@
           <p:cNvPr id="8" name="">
             <a:extLst xmlns:a="http://schemas.openxmlformats.org/drawingml/2006/main">
               <a:ext uri="{FF2B5EF4-FFF2-40B4-BE49-F238E27FC236}">
-                <a16:creationId xmlns:a16="http://schemas.microsoft.com/office/drawing/2014/main" id="{583A7F89-629D-4BB4-B41F-61DBF8647A75}"/>
+                <a16:creationId xmlns:a16="http://schemas.microsoft.com/office/drawing/2014/main" id="{C3E26295-4A8F-4C15-9184-D10936049525}"/>
               </a:ext>
             </a:extLst>
           </p:cNvPr>
@@ -15390,7 +15454,7 @@
           <p:cNvPr id="9" name="">
             <a:extLst xmlns:a="http://schemas.openxmlformats.org/drawingml/2006/main">
               <a:ext uri="{FF2B5EF4-FFF2-40B4-BE49-F238E27FC236}">
-                <a16:creationId xmlns:a16="http://schemas.microsoft.com/office/drawing/2014/main" id="{3A8B22CA-744F-4A2B-A1F2-5F39EDC723C2}"/>
+                <a16:creationId xmlns:a16="http://schemas.microsoft.com/office/drawing/2014/main" id="{615A5331-8F70-4FB5-B544-0723F944115B}"/>
               </a:ext>
             </a:extLst>
           </p:cNvPr>
@@ -15444,7 +15508,7 @@
                 <a:ea typeface="Aptos"/>
                 <a:cs typeface="Aptos"/>
               </a:rPr>
-              <a:t>异步参数同步</a:t>
+              <a:t>训练引擎</a:t>
             </a:r>
           </a:p>
         </p:txBody>
@@ -15454,7 +15518,7 @@
           <p:cNvPr id="10" name="">
             <a:extLst xmlns:a="http://schemas.openxmlformats.org/drawingml/2006/main">
               <a:ext uri="{FF2B5EF4-FFF2-40B4-BE49-F238E27FC236}">
-                <a16:creationId xmlns:a16="http://schemas.microsoft.com/office/drawing/2014/main" id="{353B690B-91C1-4755-9854-0EADFC24F031}"/>
+                <a16:creationId xmlns:a16="http://schemas.microsoft.com/office/drawing/2014/main" id="{CA43F725-FC46-4BE9-8042-0C44EDF64C99}"/>
               </a:ext>
             </a:extLst>
           </p:cNvPr>
@@ -15508,7 +15572,7 @@
                 <a:ea typeface="Aptos"/>
                 <a:cs typeface="Aptos"/>
               </a:rPr>
-              <a:t>prefetch / commit</a:t>
+              <a:t>Actor / Critic / Reward</a:t>
             </a:r>
           </a:p>
         </p:txBody>
@@ -15518,7 +15582,7 @@
           <p:cNvPr id="11" name="">
             <a:extLst xmlns:a="http://schemas.openxmlformats.org/drawingml/2006/main">
               <a:ext uri="{FF2B5EF4-FFF2-40B4-BE49-F238E27FC236}">
-                <a16:creationId xmlns:a16="http://schemas.microsoft.com/office/drawing/2014/main" id="{6CA56868-15F4-4A4E-A012-F97B23D15A8E}"/>
+                <a16:creationId xmlns:a16="http://schemas.microsoft.com/office/drawing/2014/main" id="{D2B36A78-D067-40BE-AC5B-29DD41D1E644}"/>
               </a:ext>
             </a:extLst>
           </p:cNvPr>
@@ -15551,7 +15615,7 @@
           <p:cNvPr id="12" name="">
             <a:extLst xmlns:a="http://schemas.openxmlformats.org/drawingml/2006/main">
               <a:ext uri="{FF2B5EF4-FFF2-40B4-BE49-F238E27FC236}">
-                <a16:creationId xmlns:a16="http://schemas.microsoft.com/office/drawing/2014/main" id="{67B41ECE-78AB-4075-8907-33F1727789BD}"/>
+                <a16:creationId xmlns:a16="http://schemas.microsoft.com/office/drawing/2014/main" id="{9D15E895-B5E6-4CCB-9863-7D5B956A8D64}"/>
               </a:ext>
             </a:extLst>
           </p:cNvPr>
@@ -15605,7 +15669,7 @@
                 <a:ea typeface="Aptos"/>
                 <a:cs typeface="Aptos"/>
               </a:rPr>
-              <a:t>Bucket IPC 增强</a:t>
+              <a:t>推理引擎</a:t>
             </a:r>
           </a:p>
         </p:txBody>
@@ -15615,7 +15679,7 @@
           <p:cNvPr id="13" name="">
             <a:extLst xmlns:a="http://schemas.openxmlformats.org/drawingml/2006/main">
               <a:ext uri="{FF2B5EF4-FFF2-40B4-BE49-F238E27FC236}">
-                <a16:creationId xmlns:a16="http://schemas.microsoft.com/office/drawing/2014/main" id="{0458ACE5-6D63-4B97-BFF9-EE8A5C0659C5}"/>
+                <a16:creationId xmlns:a16="http://schemas.microsoft.com/office/drawing/2014/main" id="{C333B891-20E1-4283-82C8-8E7419B14BDC}"/>
               </a:ext>
             </a:extLst>
           </p:cNvPr>
@@ -15669,7 +15733,7 @@
                 <a:ea typeface="Aptos"/>
                 <a:cs typeface="Aptos"/>
               </a:rPr>
-              <a:t>HCCL / IPC / SHM</a:t>
+              <a:t>vLLM / vLLM-Ascend</a:t>
             </a:r>
           </a:p>
         </p:txBody>
@@ -15679,7 +15743,7 @@
           <p:cNvPr id="14" name="">
             <a:extLst xmlns:a="http://schemas.openxmlformats.org/drawingml/2006/main">
               <a:ext uri="{FF2B5EF4-FFF2-40B4-BE49-F238E27FC236}">
-                <a16:creationId xmlns:a16="http://schemas.microsoft.com/office/drawing/2014/main" id="{04B34A56-3E89-4930-8312-1BB2E927661A}"/>
+                <a16:creationId xmlns:a16="http://schemas.microsoft.com/office/drawing/2014/main" id="{088CAFC2-7432-4535-84B1-F06DCD737219}"/>
               </a:ext>
             </a:extLst>
           </p:cNvPr>
@@ -15712,7 +15776,7 @@
           <p:cNvPr id="15" name="">
             <a:extLst xmlns:a="http://schemas.openxmlformats.org/drawingml/2006/main">
               <a:ext uri="{FF2B5EF4-FFF2-40B4-BE49-F238E27FC236}">
-                <a16:creationId xmlns:a16="http://schemas.microsoft.com/office/drawing/2014/main" id="{EDECCC67-0F19-4CA8-82EF-4E7CD9BCE37F}"/>
+                <a16:creationId xmlns:a16="http://schemas.microsoft.com/office/drawing/2014/main" id="{F6315993-6C07-4C2D-BB4B-A0BAADA44C80}"/>
               </a:ext>
             </a:extLst>
           </p:cNvPr>
@@ -15766,7 +15830,7 @@
                 <a:ea typeface="Aptos"/>
                 <a:cs typeface="Aptos"/>
               </a:rPr>
-              <a:t>Ray queue 轻量化</a:t>
+              <a:t>调度系统</a:t>
             </a:r>
           </a:p>
         </p:txBody>
@@ -15776,7 +15840,7 @@
           <p:cNvPr id="16" name="">
             <a:extLst xmlns:a="http://schemas.openxmlformats.org/drawingml/2006/main">
               <a:ext uri="{FF2B5EF4-FFF2-40B4-BE49-F238E27FC236}">
-                <a16:creationId xmlns:a16="http://schemas.microsoft.com/office/drawing/2014/main" id="{92EAE411-EDA7-42BE-8AFF-563177620211}"/>
+                <a16:creationId xmlns:a16="http://schemas.microsoft.com/office/drawing/2014/main" id="{5BEB5070-524F-4624-BDD4-682B0864E310}"/>
               </a:ext>
             </a:extLst>
           </p:cNvPr>
@@ -15830,7 +15894,7 @@
                 <a:ea typeface="Aptos"/>
                 <a:cs typeface="Aptos"/>
               </a:rPr>
-              <a:t>batch get / shard</a:t>
+              <a:t>Ray Worker / Actor</a:t>
             </a:r>
           </a:p>
         </p:txBody>
@@ -15840,7 +15904,7 @@
           <p:cNvPr id="17" name="">
             <a:extLst xmlns:a="http://schemas.openxmlformats.org/drawingml/2006/main">
               <a:ext uri="{FF2B5EF4-FFF2-40B4-BE49-F238E27FC236}">
-                <a16:creationId xmlns:a16="http://schemas.microsoft.com/office/drawing/2014/main" id="{EEB54DAA-0AD5-4A99-9A14-B69430D5EA9D}"/>
+                <a16:creationId xmlns:a16="http://schemas.microsoft.com/office/drawing/2014/main" id="{7AD51AC8-FC13-46D3-9679-527BD3A03E77}"/>
               </a:ext>
             </a:extLst>
           </p:cNvPr>
@@ -15873,7 +15937,7 @@
           <p:cNvPr id="18" name="">
             <a:extLst xmlns:a="http://schemas.openxmlformats.org/drawingml/2006/main">
               <a:ext uri="{FF2B5EF4-FFF2-40B4-BE49-F238E27FC236}">
-                <a16:creationId xmlns:a16="http://schemas.microsoft.com/office/drawing/2014/main" id="{D0D4F16B-17E8-4E68-94A2-4AC77D5BD86B}"/>
+                <a16:creationId xmlns:a16="http://schemas.microsoft.com/office/drawing/2014/main" id="{DF4111F9-7626-40FC-BC01-77DFC02D1E56}"/>
               </a:ext>
             </a:extLst>
           </p:cNvPr>
@@ -15927,7 +15991,7 @@
                 <a:ea typeface="Aptos"/>
                 <a:cs typeface="Aptos"/>
               </a:rPr>
-              <a:t>SampleRef 数据面</a:t>
+              <a:t>权重与样本</a:t>
             </a:r>
           </a:p>
         </p:txBody>
@@ -15937,7 +16001,7 @@
           <p:cNvPr id="19" name="">
             <a:extLst xmlns:a="http://schemas.openxmlformats.org/drawingml/2006/main">
               <a:ext uri="{FF2B5EF4-FFF2-40B4-BE49-F238E27FC236}">
-                <a16:creationId xmlns:a16="http://schemas.microsoft.com/office/drawing/2014/main" id="{64FCAF70-54CE-4104-8FCF-720919DEA085}"/>
+                <a16:creationId xmlns:a16="http://schemas.microsoft.com/office/drawing/2014/main" id="{7F1458F9-BB4E-41DF-B2E2-B79E46F3573B}"/>
               </a:ext>
             </a:extLst>
           </p:cNvPr>
@@ -15991,7 +16055,7 @@
                 <a:ea typeface="Aptos"/>
                 <a:cs typeface="Aptos"/>
               </a:rPr>
-              <a:t>TransferQueue</a:t>
+              <a:t>HCCL / IPC / Queue</a:t>
             </a:r>
           </a:p>
         </p:txBody>
@@ -16001,7 +16065,7 @@
           <p:cNvPr id="20" name="">
             <a:extLst xmlns:a="http://schemas.openxmlformats.org/drawingml/2006/main">
               <a:ext uri="{FF2B5EF4-FFF2-40B4-BE49-F238E27FC236}">
-                <a16:creationId xmlns:a16="http://schemas.microsoft.com/office/drawing/2014/main" id="{4268DADB-5C52-4468-8C99-52B3278D422B}"/>
+                <a16:creationId xmlns:a16="http://schemas.microsoft.com/office/drawing/2014/main" id="{F07CDB2D-1ABE-4288-87D5-08B3DC6D07CC}"/>
               </a:ext>
             </a:extLst>
           </p:cNvPr>
@@ -16036,7 +16100,7 @@
           <p:cNvPr id="21" name="">
             <a:extLst xmlns:a="http://schemas.openxmlformats.org/drawingml/2006/main">
               <a:ext uri="{FF2B5EF4-FFF2-40B4-BE49-F238E27FC236}">
-                <a16:creationId xmlns:a16="http://schemas.microsoft.com/office/drawing/2014/main" id="{AFCB2ABC-576D-4CF3-BADE-D593D71D40B5}"/>
+                <a16:creationId xmlns:a16="http://schemas.microsoft.com/office/drawing/2014/main" id="{7743F16F-1BE0-4B08-AEF3-AB8C9A5CB5E7}"/>
               </a:ext>
             </a:extLst>
           </p:cNvPr>
@@ -16100,7 +16164,7 @@
           <p:cNvPr id="22" name="">
             <a:extLst xmlns:a="http://schemas.openxmlformats.org/drawingml/2006/main">
               <a:ext uri="{FF2B5EF4-FFF2-40B4-BE49-F238E27FC236}">
-                <a16:creationId xmlns:a16="http://schemas.microsoft.com/office/drawing/2014/main" id="{4612761D-375E-44EE-BE53-8214F7BED02F}"/>
+                <a16:creationId xmlns:a16="http://schemas.microsoft.com/office/drawing/2014/main" id="{7078951F-AEB4-4F1D-8978-830473CAFC5B}"/>
               </a:ext>
             </a:extLst>
           </p:cNvPr>
@@ -16135,7 +16199,7 @@
           <p:cNvPr id="23" name="">
             <a:extLst xmlns:a="http://schemas.openxmlformats.org/drawingml/2006/main">
               <a:ext uri="{FF2B5EF4-FFF2-40B4-BE49-F238E27FC236}">
-                <a16:creationId xmlns:a16="http://schemas.microsoft.com/office/drawing/2014/main" id="{2F8C80DE-8EBB-4E09-9923-BA914B51561E}"/>
+                <a16:creationId xmlns:a16="http://schemas.microsoft.com/office/drawing/2014/main" id="{97B7EA71-8D5D-4C51-9A3D-E76E5CFB9EB4}"/>
               </a:ext>
             </a:extLst>
           </p:cNvPr>
@@ -16199,7 +16263,7 @@
           <p:cNvPr id="24" name="">
             <a:extLst xmlns:a="http://schemas.openxmlformats.org/drawingml/2006/main">
               <a:ext uri="{FF2B5EF4-FFF2-40B4-BE49-F238E27FC236}">
-                <a16:creationId xmlns:a16="http://schemas.microsoft.com/office/drawing/2014/main" id="{478AEDAE-DB58-4B97-83B6-46D73448E4B7}"/>
+                <a16:creationId xmlns:a16="http://schemas.microsoft.com/office/drawing/2014/main" id="{AE26C614-AE5A-4A7F-9FBA-F6E68A5DE69B}"/>
               </a:ext>
             </a:extLst>
           </p:cNvPr>
@@ -16234,7 +16298,7 @@
           <p:cNvPr id="25" name="">
             <a:extLst xmlns:a="http://schemas.openxmlformats.org/drawingml/2006/main">
               <a:ext uri="{FF2B5EF4-FFF2-40B4-BE49-F238E27FC236}">
-                <a16:creationId xmlns:a16="http://schemas.microsoft.com/office/drawing/2014/main" id="{D25316EA-B691-4EBB-9DAE-AC0455B7562E}"/>
+                <a16:creationId xmlns:a16="http://schemas.microsoft.com/office/drawing/2014/main" id="{7CFF701A-9089-498B-81AB-93C9EB8F40BB}"/>
               </a:ext>
             </a:extLst>
           </p:cNvPr>
@@ -16298,7 +16362,7 @@
           <p:cNvPr id="26" name="">
             <a:extLst xmlns:a="http://schemas.openxmlformats.org/drawingml/2006/main">
               <a:ext uri="{FF2B5EF4-FFF2-40B4-BE49-F238E27FC236}">
-                <a16:creationId xmlns:a16="http://schemas.microsoft.com/office/drawing/2014/main" id="{8B827CCB-06A0-476B-9D7E-FC48A08E9F25}"/>
+                <a16:creationId xmlns:a16="http://schemas.microsoft.com/office/drawing/2014/main" id="{D1B1F154-3E90-4FFD-959B-B23687D1F873}"/>
               </a:ext>
             </a:extLst>
           </p:cNvPr>
@@ -16333,7 +16397,7 @@
           <p:cNvPr id="27" name="">
             <a:extLst xmlns:a="http://schemas.openxmlformats.org/drawingml/2006/main">
               <a:ext uri="{FF2B5EF4-FFF2-40B4-BE49-F238E27FC236}">
-                <a16:creationId xmlns:a16="http://schemas.microsoft.com/office/drawing/2014/main" id="{CA594AE8-4A5F-46AE-9570-0AAF2FDE928A}"/>
+                <a16:creationId xmlns:a16="http://schemas.microsoft.com/office/drawing/2014/main" id="{BD45D91B-083E-4812-A8D8-AA87C7917C69}"/>
               </a:ext>
             </a:extLst>
           </p:cNvPr>
@@ -16397,7 +16461,7 @@
           <p:cNvPr id="28" name="">
             <a:extLst xmlns:a="http://schemas.openxmlformats.org/drawingml/2006/main">
               <a:ext uri="{FF2B5EF4-FFF2-40B4-BE49-F238E27FC236}">
-                <a16:creationId xmlns:a16="http://schemas.microsoft.com/office/drawing/2014/main" id="{7AFB3D29-EB6B-4B37-8D67-C2079D4341C5}"/>
+                <a16:creationId xmlns:a16="http://schemas.microsoft.com/office/drawing/2014/main" id="{B475BE4A-B1F6-4C87-B998-208BF9308BBA}"/>
               </a:ext>
             </a:extLst>
           </p:cNvPr>
@@ -16451,7 +16515,7 @@
                 <a:ea typeface="Aptos"/>
                 <a:cs typeface="Aptos"/>
               </a:rPr>
-              <a:t>一句话目标</a:t>
+              <a:t>一句话理解</a:t>
             </a:r>
           </a:p>
         </p:txBody>
@@ -16461,19 +16525,19 @@
           <p:cNvPr id="29" name="">
             <a:extLst xmlns:a="http://schemas.openxmlformats.org/drawingml/2006/main">
               <a:ext uri="{FF2B5EF4-FFF2-40B4-BE49-F238E27FC236}">
-                <a16:creationId xmlns:a16="http://schemas.microsoft.com/office/drawing/2014/main" id="{BEDE493B-BB85-4D17-91A5-3FA4994240C4}"/>
-              </a:ext>
-            </a:extLst>
-          </p:cNvPr>
-          <p:cNvSpPr>
-            <a:spLocks xmlns:a="http://schemas.openxmlformats.org/drawingml/2006/main" noGrp="1"/>
-          </p:cNvSpPr>
-          <p:nvPr/>
-        </p:nvSpPr>
-        <p:spPr>
-          <a:xfrm xmlns:a="http://schemas.openxmlformats.org/drawingml/2006/main">
-            <a:off x="2190750" y="5715000"/>
-            <a:ext cx="7810500" cy="342900"/>
+                <a16:creationId xmlns:a16="http://schemas.microsoft.com/office/drawing/2014/main" id="{ACA237A6-BC62-47AD-8CE0-17F32F49029B}"/>
+              </a:ext>
+            </a:extLst>
+          </p:cNvPr>
+          <p:cNvSpPr>
+            <a:spLocks xmlns:a="http://schemas.openxmlformats.org/drawingml/2006/main" noGrp="1"/>
+          </p:cNvSpPr>
+          <p:nvPr/>
+        </p:nvSpPr>
+        <p:spPr>
+          <a:xfrm xmlns:a="http://schemas.openxmlformats.org/drawingml/2006/main">
+            <a:off x="1847850" y="5715000"/>
+            <a:ext cx="8496300" cy="342900"/>
           </a:xfrm>
           <a:prstGeom xmlns:a="http://schemas.openxmlformats.org/drawingml/2006/main" prst="rect">
             <a:avLst/>
@@ -16515,7 +16579,7 @@
                 <a:ea typeface="Aptos"/>
                 <a:cs typeface="Aptos"/>
               </a:rPr>
-              <a:t>把 Ascend verl 的训练-推理闭环改得更异步、更批量、更引用化、更可观测。</a:t>
+              <a:t>Ascend verl 是把大模型 RL 后训练的训练、推理、通信和调度流程落到昇腾 NPU 栈上的系统工程。</a:t>
             </a:r>
           </a:p>
         </p:txBody>
@@ -16525,7 +16589,7 @@
           <p:cNvPr id="30" name="">
             <a:extLst xmlns:a="http://schemas.openxmlformats.org/drawingml/2006/main">
               <a:ext uri="{FF2B5EF4-FFF2-40B4-BE49-F238E27FC236}">
-                <a16:creationId xmlns:a16="http://schemas.microsoft.com/office/drawing/2014/main" id="{69D34F80-89FF-4D91-9D9B-FED009ED59B0}"/>
+                <a16:creationId xmlns:a16="http://schemas.microsoft.com/office/drawing/2014/main" id="{2DDA951B-3F26-4657-AF8B-32E7B0623357}"/>
               </a:ext>
             </a:extLst>
           </p:cNvPr>
@@ -16560,7 +16624,7 @@
           <p:cNvPr id="31" name="">
             <a:extLst xmlns:a="http://schemas.openxmlformats.org/drawingml/2006/main">
               <a:ext uri="{FF2B5EF4-FFF2-40B4-BE49-F238E27FC236}">
-                <a16:creationId xmlns:a16="http://schemas.microsoft.com/office/drawing/2014/main" id="{7C572C4D-A130-4690-BC49-DAF75F6D0909}"/>
+                <a16:creationId xmlns:a16="http://schemas.microsoft.com/office/drawing/2014/main" id="{15EE7A8C-7895-4128-9344-DE33C834CA88}"/>
               </a:ext>
             </a:extLst>
           </p:cNvPr>
@@ -16624,7 +16688,7 @@
           <p:cNvPr id="32" name="">
             <a:extLst xmlns:a="http://schemas.openxmlformats.org/drawingml/2006/main">
               <a:ext uri="{FF2B5EF4-FFF2-40B4-BE49-F238E27FC236}">
-                <a16:creationId xmlns:a16="http://schemas.microsoft.com/office/drawing/2014/main" id="{A02E15FF-20ED-4A3A-A32D-FDB40A5506A6}"/>
+                <a16:creationId xmlns:a16="http://schemas.microsoft.com/office/drawing/2014/main" id="{2FE110BC-087E-4E8B-A362-B437F91BB1B3}"/>
               </a:ext>
             </a:extLst>
           </p:cNvPr>
@@ -16686,7 +16750,7 @@
     </p:spTree>
     <p:extLst>
       <p:ext uri="{BB962C8B-B14F-4D97-AF65-F5344CB8AC3E}">
-        <p14:creationId xmlns:p14="http://schemas.microsoft.com/office/powerpoint/2010/main" val="1570765635"/>
+        <p14:creationId xmlns:p14="http://schemas.microsoft.com/office/powerpoint/2010/main" val="1733943599"/>
       </p:ext>
     </p:extLst>
   </p:cSld>
